--- a/documents/presentations/Jannis_Meyer_Presentation_01_06_2026.pptx
+++ b/documents/presentations/Jannis_Meyer_Presentation_01_06_2026.pptx
@@ -1695,7 +1695,7 @@
           <a:p>
             <a:fld id="{8664C608-40B1-4030-A28D-5B74BC98ADCE}" type="datetimeFigureOut">
               <a:rPr lang="en-US" dirty="0"/>
-              <a:t>5/29/2026</a:t>
+              <a:t>5/31/2026</a:t>
             </a:fld>
             <a:endParaRPr lang="en-US" dirty="0"/>
           </a:p>
@@ -6574,7 +6574,7 @@
         </p:spPr>
         <p:txBody>
           <a:bodyPr vert="horz" lIns="91440" tIns="45720" rIns="91440" bIns="45720" rtlCol="0" anchor="t">
-            <a:normAutofit/>
+            <a:normAutofit lnSpcReduction="10000"/>
           </a:bodyPr>
           <a:lstStyle/>
           <a:p>
@@ -6590,15 +6590,25 @@
             </a:r>
           </a:p>
           <a:p>
-            <a:pPr marL="0" indent="0">
+            <a:pPr>
               <a:buClr>
                 <a:srgbClr val="9E3611"/>
               </a:buClr>
-              <a:buNone/>
             </a:pPr>
             <a:r>
               <a:rPr lang="en-US" sz="2000" b="0" dirty="0"/>
               <a:t>Error between estimated position and GT of final frame</a:t>
+            </a:r>
+          </a:p>
+          <a:p>
+            <a:pPr>
+              <a:buClr>
+                <a:srgbClr val="9E3611"/>
+              </a:buClr>
+            </a:pPr>
+            <a:r>
+              <a:rPr lang="en-US" sz="2000" b="0" dirty="0"/>
+              <a:t>Common error metric in 3D US reconstruction</a:t>
             </a:r>
           </a:p>
           <a:p>
@@ -6623,15 +6633,25 @@
             </a:r>
           </a:p>
           <a:p>
-            <a:pPr marL="0" indent="0">
+            <a:pPr>
               <a:buClr>
                 <a:srgbClr val="9E3611"/>
               </a:buClr>
-              <a:buNone/>
             </a:pPr>
             <a:r>
               <a:rPr lang="en-US" sz="2000" b="0" dirty="0"/>
               <a:t>“Average point error between the true position and the fully reconstructed trajectory estimate at each timestep”</a:t>
+            </a:r>
+          </a:p>
+          <a:p>
+            <a:pPr>
+              <a:buClr>
+                <a:srgbClr val="9E3611"/>
+              </a:buClr>
+            </a:pPr>
+            <a:r>
+              <a:rPr lang="en-US" sz="2000" b="0" dirty="0"/>
+              <a:t>Used in TUSREC challenge to evaluate model</a:t>
             </a:r>
           </a:p>
           <a:p>
@@ -6704,7 +6724,7 @@
         <p:spPr>
           <a:xfrm>
             <a:off x="179512" y="4704588"/>
-            <a:ext cx="2508444" cy="276999"/>
+            <a:ext cx="6182013" cy="461665"/>
           </a:xfrm>
           <a:prstGeom prst="rect">
             <a:avLst/>
@@ -6718,9 +6738,25 @@
           <a:lstStyle/>
           <a:p>
             <a:r>
+              <a:rPr lang="en-US" sz="1200" dirty="0">
+                <a:hlinkClick r:id="rId3"/>
+              </a:rPr>
+              <a:t>https://arxiv.org/pdf/2509.09530</a:t>
+            </a:r>
+            <a:r>
               <a:rPr lang="en-US" sz="1200" dirty="0"/>
-              <a:t>https://arxiv.org/pdf/2509.09530</a:t>
-            </a:r>
+              <a:t>, </a:t>
+            </a:r>
+            <a:r>
+              <a:rPr lang="en-US" sz="1200" dirty="0">
+                <a:hlinkClick r:id="rId4"/>
+              </a:rPr>
+              <a:t>https://github-pages.ucl.ac.uk/tus-rec-challenge/</a:t>
+            </a:r>
+            <a:endParaRPr lang="en-US" sz="1200" dirty="0"/>
+          </a:p>
+          <a:p>
+            <a:endParaRPr lang="en-US" sz="1200" dirty="0"/>
           </a:p>
         </p:txBody>
       </p:sp>
@@ -6845,14 +6881,14 @@
           <p:nvPr>
             <p:extLst>
               <p:ext uri="{D42A27DB-BD31-4B8C-83A1-F6EECF244321}">
-                <p14:modId xmlns:p14="http://schemas.microsoft.com/office/powerpoint/2010/main" val="818402404"/>
+                <p14:modId xmlns:p14="http://schemas.microsoft.com/office/powerpoint/2010/main" val="1626087587"/>
               </p:ext>
             </p:extLst>
           </p:nvPr>
         </p:nvGraphicFramePr>
         <p:xfrm>
           <a:off x="229947" y="699542"/>
-          <a:ext cx="8684105" cy="3950614"/>
+          <a:ext cx="8684105" cy="3888433"/>
         </p:xfrm>
         <a:graphic>
           <a:graphicData uri="http://schemas.openxmlformats.org/drawingml/2006/table">
@@ -7006,6 +7042,16 @@
                         <a:t>TUSREC24 Validation Data</a:t>
                       </a:r>
                     </a:p>
+                    <a:p>
+                      <a:r>
+                        <a:rPr lang="en-US" b="1" dirty="0">
+                          <a:solidFill>
+                            <a:schemeClr val="bg1"/>
+                          </a:solidFill>
+                        </a:rPr>
+                        <a:t>(72 scans)</a:t>
+                      </a:r>
+                    </a:p>
                   </a:txBody>
                   <a:tcPr>
                     <a:solidFill>
@@ -7020,7 +7066,7 @@
                     <a:p>
                       <a:r>
                         <a:rPr lang="en-US" dirty="0"/>
-                        <a:t>AVG FDR: 5.1%</a:t>
+                        <a:t>FDR: 5.1%</a:t>
                       </a:r>
                     </a:p>
                     <a:p>
@@ -7029,7 +7075,7 @@
                     <a:p>
                       <a:r>
                         <a:rPr lang="en-US" dirty="0"/>
-                        <a:t>AVG GPE: 4.9mm</a:t>
+                        <a:t>GPE: 4.9mm</a:t>
                       </a:r>
                     </a:p>
                     <a:p>
@@ -7048,7 +7094,40 @@
                     <a:p>
                       <a:r>
                         <a:rPr lang="en-US" dirty="0"/>
-                        <a:t>/</a:t>
+                        <a:t>FDR: </a:t>
+                      </a:r>
+                      <a:r>
+                        <a:rPr kumimoji="1" lang="en-US" sz="1350" b="0" kern="1200" dirty="0">
+                          <a:solidFill>
+                            <a:schemeClr val="dk1"/>
+                          </a:solidFill>
+                          <a:effectLst/>
+                          <a:latin typeface="+mn-lt"/>
+                          <a:ea typeface="+mn-ea"/>
+                          <a:cs typeface="+mn-cs"/>
+                        </a:rPr>
+                        <a:t>28.54%</a:t>
+                      </a:r>
+                    </a:p>
+                    <a:p>
+                      <a:endParaRPr lang="en-US" dirty="0"/>
+                    </a:p>
+                    <a:p>
+                      <a:r>
+                        <a:rPr lang="en-US" dirty="0"/>
+                        <a:t>AVG GPE: </a:t>
+                      </a:r>
+                      <a:r>
+                        <a:rPr kumimoji="1" lang="en-US" sz="1350" b="0" kern="1200" dirty="0">
+                          <a:solidFill>
+                            <a:schemeClr val="dk1"/>
+                          </a:solidFill>
+                          <a:effectLst/>
+                          <a:latin typeface="+mn-lt"/>
+                          <a:ea typeface="+mn-ea"/>
+                          <a:cs typeface="+mn-cs"/>
+                        </a:rPr>
+                        <a:t>24.79mm</a:t>
                       </a:r>
                     </a:p>
                   </a:txBody>
@@ -7118,6 +7197,46 @@
                         <a:t>TUSREC25 Validation Data</a:t>
                       </a:r>
                     </a:p>
+                    <a:p>
+                      <a:pPr marL="0" marR="0" lvl="0" indent="0" algn="l" defTabSz="685800" rtl="0" eaLnBrk="1" fontAlgn="auto" latinLnBrk="0" hangingPunct="1">
+                        <a:lnSpc>
+                          <a:spcPct val="100000"/>
+                        </a:lnSpc>
+                        <a:spcBef>
+                          <a:spcPts val="0"/>
+                        </a:spcBef>
+                        <a:spcAft>
+                          <a:spcPts val="0"/>
+                        </a:spcAft>
+                        <a:buClrTx/>
+                        <a:buSzTx/>
+                        <a:buFontTx/>
+                        <a:buNone/>
+                        <a:tabLst/>
+                        <a:defRPr/>
+                      </a:pPr>
+                      <a:r>
+                        <a:rPr lang="en-US" b="1" dirty="0">
+                          <a:solidFill>
+                            <a:schemeClr val="bg1"/>
+                          </a:solidFill>
+                        </a:rPr>
+                        <a:t>(</a:t>
+                      </a:r>
+                      <a:r>
+                        <a:rPr lang="en-US" b="1">
+                          <a:solidFill>
+                            <a:schemeClr val="bg1"/>
+                          </a:solidFill>
+                        </a:rPr>
+                        <a:t>six scans)</a:t>
+                      </a:r>
+                      <a:endParaRPr lang="en-US" b="1" dirty="0">
+                        <a:solidFill>
+                          <a:schemeClr val="bg1"/>
+                        </a:solidFill>
+                      </a:endParaRPr>
+                    </a:p>
                   </a:txBody>
                   <a:tcPr>
                     <a:solidFill>
@@ -7140,21 +7259,7 @@
                           <a:ea typeface="+mn-ea"/>
                           <a:cs typeface="+mn-cs"/>
                         </a:rPr>
-                        <a:t>AVG FDR:</a:t>
-                      </a:r>
-                    </a:p>
-                    <a:p>
-                      <a:r>
-                        <a:rPr kumimoji="1" lang="en-US" sz="1350" b="0" kern="1200">
-                          <a:solidFill>
-                            <a:schemeClr val="dk1"/>
-                          </a:solidFill>
-                          <a:effectLst/>
-                          <a:latin typeface="+mn-lt"/>
-                          <a:ea typeface="+mn-ea"/>
-                          <a:cs typeface="+mn-cs"/>
-                        </a:rPr>
-                        <a:t>488.77%</a:t>
+                        <a:t>FDR: 488.77%</a:t>
                       </a:r>
                     </a:p>
                     <a:p>
@@ -7179,21 +7284,7 @@
                           <a:ea typeface="+mn-ea"/>
                           <a:cs typeface="+mn-cs"/>
                         </a:rPr>
-                        <a:t>AVG GPE:</a:t>
-                      </a:r>
-                    </a:p>
-                    <a:p>
-                      <a:r>
-                        <a:rPr kumimoji="1" lang="en-US" sz="1350" b="0" kern="1200" dirty="0">
-                          <a:solidFill>
-                            <a:schemeClr val="dk1"/>
-                          </a:solidFill>
-                          <a:effectLst/>
-                          <a:latin typeface="+mn-lt"/>
-                          <a:ea typeface="+mn-ea"/>
-                          <a:cs typeface="+mn-cs"/>
-                        </a:rPr>
-                        <a:t>56.53mm</a:t>
+                        <a:t>GPE: 56.53mm</a:t>
                       </a:r>
                     </a:p>
                   </a:txBody>
@@ -7206,13 +7297,7 @@
                     <a:p>
                       <a:r>
                         <a:rPr lang="en-US" dirty="0"/>
-                        <a:t>AVG FDR: 72.9%</a:t>
-                      </a:r>
-                    </a:p>
-                    <a:p>
-                      <a:r>
-                        <a:rPr lang="en-US" dirty="0"/>
-                        <a:t>(extremely bad!)</a:t>
+                        <a:t>FDR: 72.9%</a:t>
                       </a:r>
                     </a:p>
                     <a:p>
@@ -7221,7 +7306,7 @@
                     <a:p>
                       <a:r>
                         <a:rPr lang="en-US" dirty="0"/>
-                        <a:t>AVG GPE: 9.1mm</a:t>
+                        <a:t>GPE: 9.1mm</a:t>
                       </a:r>
                     </a:p>
                     <a:p>
@@ -7272,6 +7357,44 @@
           </a:graphicData>
         </a:graphic>
       </p:graphicFrame>
+      <p:sp>
+        <p:nvSpPr>
+          <p:cNvPr id="2" name="TextBox 1">
+            <a:extLst>
+              <a:ext uri="{FF2B5EF4-FFF2-40B4-BE49-F238E27FC236}">
+                <a16:creationId xmlns:a16="http://schemas.microsoft.com/office/drawing/2014/main" id="{7A594B44-DBCF-6B17-6075-4E33289543B8}"/>
+              </a:ext>
+            </a:extLst>
+          </p:cNvPr>
+          <p:cNvSpPr txBox="1"/>
+          <p:nvPr/>
+        </p:nvSpPr>
+        <p:spPr>
+          <a:xfrm>
+            <a:off x="179512" y="4704588"/>
+            <a:ext cx="2901948" cy="461665"/>
+          </a:xfrm>
+          <a:prstGeom prst="rect">
+            <a:avLst/>
+          </a:prstGeom>
+          <a:noFill/>
+        </p:spPr>
+        <p:txBody>
+          <a:bodyPr wrap="none" rtlCol="0">
+            <a:spAutoFit/>
+          </a:bodyPr>
+          <a:lstStyle/>
+          <a:p>
+            <a:r>
+              <a:rPr lang="en-US" sz="1200" dirty="0"/>
+              <a:t>*FDR and GPE averaged over all scans</a:t>
+            </a:r>
+          </a:p>
+          <a:p>
+            <a:endParaRPr lang="en-US" sz="1200" dirty="0"/>
+          </a:p>
+        </p:txBody>
+      </p:sp>
     </p:spTree>
     <p:extLst>
       <p:ext uri="{BB962C8B-B14F-4D97-AF65-F5344CB8AC3E}">
@@ -7517,7 +7640,7 @@
         <p:spPr>
           <a:xfrm>
             <a:off x="182430" y="4694682"/>
-            <a:ext cx="3710246" cy="276999"/>
+            <a:ext cx="3793603" cy="276999"/>
           </a:xfrm>
           <a:prstGeom prst="rect">
             <a:avLst/>
@@ -7531,9 +7654,12 @@
           <a:lstStyle/>
           <a:p>
             <a:r>
-              <a:rPr lang="en-US" sz="1200" dirty="0"/>
+              <a:rPr lang="en-US" sz="1200" dirty="0">
+                <a:hlinkClick r:id="rId3"/>
+              </a:rPr>
               <a:t>https://github-pages.ucl.ac.uk/tus-rec-challenge/</a:t>
             </a:r>
+            <a:endParaRPr lang="en-US" sz="1200" dirty="0"/>
           </a:p>
         </p:txBody>
       </p:sp>
@@ -8534,6 +8660,15 @@
 </file>
 
 <file path=customXml/item2.xml><?xml version="1.0" encoding="utf-8"?>
+<?mso-contentType ?>
+<FormTemplates xmlns="http://schemas.microsoft.com/sharepoint/v3/contenttype/forms">
+  <Display>DocumentLibraryForm</Display>
+  <Edit>DocumentLibraryForm</Edit>
+  <New>DocumentLibraryForm</New>
+</FormTemplates>
+</file>
+
+<file path=customXml/item3.xml><?xml version="1.0" encoding="utf-8"?>
 <p:properties xmlns:p="http://schemas.microsoft.com/office/2006/metadata/properties" xmlns:xsi="http://www.w3.org/2001/XMLSchema-instance" xmlns:pc="http://schemas.microsoft.com/office/infopath/2007/PartnerControls">
   <documentManagement>
     <TaxCatchAll xmlns="bbdc8989-56fb-4b1d-a38b-166581c893ff" xsi:nil="true"/>
@@ -8594,15 +8729,6 @@
 </p:properties>
 </file>
 
-<file path=customXml/item3.xml><?xml version="1.0" encoding="utf-8"?>
-<?mso-contentType ?>
-<FormTemplates xmlns="http://schemas.microsoft.com/sharepoint/v3/contenttype/forms">
-  <Display>DocumentLibraryForm</Display>
-  <Edit>DocumentLibraryForm</Edit>
-  <New>DocumentLibraryForm</New>
-</FormTemplates>
-</file>
-
 <file path=customXml/itemProps1.xml><?xml version="1.0" encoding="utf-8"?>
 <ds:datastoreItem xmlns:ds="http://schemas.openxmlformats.org/officeDocument/2006/customXml" ds:itemID="{F2D09310-C45E-477D-9B05-494A1C2D1783}">
   <ds:schemaRefs>
@@ -8623,6 +8749,14 @@
 </file>
 
 <file path=customXml/itemProps2.xml><?xml version="1.0" encoding="utf-8"?>
+<ds:datastoreItem xmlns:ds="http://schemas.openxmlformats.org/officeDocument/2006/customXml" ds:itemID="{0A8BCAEC-5EDD-4F8B-8062-E645C37DABB6}">
+  <ds:schemaRefs>
+    <ds:schemaRef ds:uri="http://schemas.microsoft.com/sharepoint/v3/contenttype/forms"/>
+  </ds:schemaRefs>
+</ds:datastoreItem>
+</file>
+
+<file path=customXml/itemProps3.xml><?xml version="1.0" encoding="utf-8"?>
 <ds:datastoreItem xmlns:ds="http://schemas.openxmlformats.org/officeDocument/2006/customXml" ds:itemID="{726A834E-B1B5-46FD-BC6A-86110B9E53A8}">
   <ds:schemaRefs>
     <ds:schemaRef ds:uri="f61654bb-b7fc-45ad-85e3-d08f7c4a7ee2"/>
@@ -8637,12 +8771,4 @@
     <ds:schemaRef ds:uri="http://schemas.microsoft.com/office/2006/metadata/properties"/>
   </ds:schemaRefs>
 </ds:datastoreItem>
-</file>
-
-<file path=customXml/itemProps3.xml><?xml version="1.0" encoding="utf-8"?>
-<ds:datastoreItem xmlns:ds="http://schemas.openxmlformats.org/officeDocument/2006/customXml" ds:itemID="{0A8BCAEC-5EDD-4F8B-8062-E645C37DABB6}">
-  <ds:schemaRefs>
-    <ds:schemaRef ds:uri="http://schemas.microsoft.com/sharepoint/v3/contenttype/forms"/>
-  </ds:schemaRefs>
-</ds:datastoreItem>
 </file>
--- a/documents/presentations/Jannis_Meyer_Presentation_01_06_2026.pptx
+++ b/documents/presentations/Jannis_Meyer_Presentation_01_06_2026.pptx
@@ -5,15 +5,16 @@
     <p:sldMasterId id="2284242785" r:id="rId4"/>
   </p:sldMasterIdLst>
   <p:notesMasterIdLst>
-    <p:notesMasterId r:id="rId11"/>
+    <p:notesMasterId r:id="rId12"/>
   </p:notesMasterIdLst>
   <p:sldIdLst>
     <p:sldId id="256" r:id="rId5"/>
     <p:sldId id="281" r:id="rId6"/>
     <p:sldId id="282" r:id="rId7"/>
     <p:sldId id="284" r:id="rId8"/>
-    <p:sldId id="283" r:id="rId9"/>
-    <p:sldId id="285" r:id="rId10"/>
+    <p:sldId id="286" r:id="rId9"/>
+    <p:sldId id="283" r:id="rId10"/>
+    <p:sldId id="285" r:id="rId11"/>
   </p:sldIdLst>
   <p:sldSz cx="9144000" cy="5143500" type="screen16x9"/>
   <p:notesSz cx="9144000" cy="6858000"/>
@@ -529,6 +530,107 @@
         <p:cNvPr id="1" name="">
           <a:extLst>
             <a:ext uri="{FF2B5EF4-FFF2-40B4-BE49-F238E27FC236}">
+              <a16:creationId xmlns:a16="http://schemas.microsoft.com/office/drawing/2014/main" id="{F4316842-0B0E-91C8-7F35-B356EFFB7314}"/>
+            </a:ext>
+          </a:extLst>
+        </p:cNvPr>
+        <p:cNvGrpSpPr/>
+        <p:nvPr/>
+      </p:nvGrpSpPr>
+      <p:grpSpPr>
+        <a:xfrm>
+          <a:off x="0" y="0"/>
+          <a:ext cx="0" cy="0"/>
+          <a:chOff x="0" y="0"/>
+          <a:chExt cx="0" cy="0"/>
+        </a:xfrm>
+      </p:grpSpPr>
+      <p:sp>
+        <p:nvSpPr>
+          <p:cNvPr id="2" name="Slide Image Placeholder 1">
+            <a:extLst>
+              <a:ext uri="{FF2B5EF4-FFF2-40B4-BE49-F238E27FC236}">
+                <a16:creationId xmlns:a16="http://schemas.microsoft.com/office/drawing/2014/main" id="{8D7FB22F-F84F-D3D2-EF9C-3CF06ED1624C}"/>
+              </a:ext>
+            </a:extLst>
+          </p:cNvPr>
+          <p:cNvSpPr>
+            <a:spLocks noGrp="1" noRot="1" noChangeAspect="1"/>
+          </p:cNvSpPr>
+          <p:nvPr>
+            <p:ph type="sldImg"/>
+          </p:nvPr>
+        </p:nvSpPr>
+        <p:spPr>
+          <a:xfrm>
+            <a:off x="2514600" y="857250"/>
+            <a:ext cx="4114800" cy="2314575"/>
+          </a:xfrm>
+          <a:prstGeom prst="rect">
+            <a:avLst/>
+          </a:prstGeom>
+          <a:noFill/>
+          <a:ln w="12700">
+            <a:solidFill>
+              <a:prstClr val="black"/>
+            </a:solidFill>
+          </a:ln>
+        </p:spPr>
+      </p:sp>
+      <p:sp>
+        <p:nvSpPr>
+          <p:cNvPr id="3" name="Notes Placeholder 2">
+            <a:extLst>
+              <a:ext uri="{FF2B5EF4-FFF2-40B4-BE49-F238E27FC236}">
+                <a16:creationId xmlns:a16="http://schemas.microsoft.com/office/drawing/2014/main" id="{DAD00DD1-C3C9-F066-CCEC-C1128C44AC7F}"/>
+              </a:ext>
+            </a:extLst>
+          </p:cNvPr>
+          <p:cNvSpPr>
+            <a:spLocks noGrp="1"/>
+          </p:cNvSpPr>
+          <p:nvPr>
+            <p:ph type="body" idx="1"/>
+          </p:nvPr>
+        </p:nvSpPr>
+        <p:spPr>
+          <a:xfrm>
+            <a:off x="914400" y="3300413"/>
+            <a:ext cx="7315200" cy="2700337"/>
+          </a:xfrm>
+          <a:prstGeom prst="rect">
+            <a:avLst/>
+          </a:prstGeom>
+        </p:spPr>
+        <p:txBody>
+          <a:bodyPr/>
+          <a:lstStyle/>
+          <a:p>
+            <a:endParaRPr lang="en-US" dirty="0"/>
+          </a:p>
+        </p:txBody>
+      </p:sp>
+    </p:spTree>
+    <p:extLst>
+      <p:ext uri="{BB962C8B-B14F-4D97-AF65-F5344CB8AC3E}">
+        <p14:creationId xmlns:p14="http://schemas.microsoft.com/office/powerpoint/2010/main" val="2294665136"/>
+      </p:ext>
+    </p:extLst>
+  </p:cSld>
+  <p:clrMapOvr>
+    <a:masterClrMapping/>
+  </p:clrMapOvr>
+</p:notes>
+</file>
+
+<file path=ppt/notesSlides/notesSlide5.xml><?xml version="1.0" encoding="utf-8"?>
+<p:notes xmlns:a="http://schemas.openxmlformats.org/drawingml/2006/main" xmlns:r="http://schemas.openxmlformats.org/officeDocument/2006/relationships" xmlns:p="http://schemas.openxmlformats.org/presentationml/2006/main">
+  <p:cSld>
+    <p:spTree>
+      <p:nvGrpSpPr>
+        <p:cNvPr id="1" name="">
+          <a:extLst>
+            <a:ext uri="{FF2B5EF4-FFF2-40B4-BE49-F238E27FC236}">
               <a16:creationId xmlns:a16="http://schemas.microsoft.com/office/drawing/2014/main" id="{61282EDE-AC15-F05A-2039-AFB22CC1A359}"/>
             </a:ext>
           </a:extLst>
@@ -622,7 +724,7 @@
 </p:notes>
 </file>
 
-<file path=ppt/notesSlides/notesSlide5.xml><?xml version="1.0" encoding="utf-8"?>
+<file path=ppt/notesSlides/notesSlide6.xml><?xml version="1.0" encoding="utf-8"?>
 <p:notes xmlns:a="http://schemas.openxmlformats.org/drawingml/2006/main" xmlns:r="http://schemas.openxmlformats.org/officeDocument/2006/relationships" xmlns:p="http://schemas.openxmlformats.org/presentationml/2006/main">
   <p:cSld>
     <p:spTree>
@@ -6574,7 +6676,7 @@
         </p:spPr>
         <p:txBody>
           <a:bodyPr vert="horz" lIns="91440" tIns="45720" rIns="91440" bIns="45720" rtlCol="0" anchor="t">
-            <a:normAutofit lnSpcReduction="10000"/>
+            <a:normAutofit fontScale="92500" lnSpcReduction="10000"/>
           </a:bodyPr>
           <a:lstStyle/>
           <a:p>
@@ -6598,6 +6700,17 @@
             <a:r>
               <a:rPr lang="en-US" sz="2000" b="0" dirty="0"/>
               <a:t>Error between estimated position and GT of final frame</a:t>
+            </a:r>
+          </a:p>
+          <a:p>
+            <a:pPr>
+              <a:buClr>
+                <a:srgbClr val="9E3611"/>
+              </a:buClr>
+            </a:pPr>
+            <a:r>
+              <a:rPr lang="en-US" sz="2000" b="0" dirty="0"/>
+              <a:t>Only translation</a:t>
             </a:r>
           </a:p>
           <a:p>
@@ -6651,7 +6764,15 @@
             </a:pPr>
             <a:r>
               <a:rPr lang="en-US" sz="2000" b="0" dirty="0"/>
-              <a:t>Used in TUSREC challenge to evaluate model</a:t>
+              <a:t>Mentioned in </a:t>
+            </a:r>
+            <a:r>
+              <a:rPr lang="en-US" sz="2000" b="0" dirty="0" err="1"/>
+              <a:t>DualTrack</a:t>
+            </a:r>
+            <a:r>
+              <a:rPr lang="en-US" sz="2000" b="0" dirty="0"/>
+              <a:t> paper and TUSREC challenge</a:t>
             </a:r>
           </a:p>
           <a:p>
@@ -6774,6 +6895,159 @@
 </file>
 
 <file path=ppt/slides/slide5.xml><?xml version="1.0" encoding="utf-8"?>
+<p:sld xmlns:a="http://schemas.openxmlformats.org/drawingml/2006/main" xmlns:r="http://schemas.openxmlformats.org/officeDocument/2006/relationships" xmlns:p="http://schemas.openxmlformats.org/presentationml/2006/main">
+  <p:cSld>
+    <p:spTree>
+      <p:nvGrpSpPr>
+        <p:cNvPr id="1" name="">
+          <a:extLst>
+            <a:ext uri="{FF2B5EF4-FFF2-40B4-BE49-F238E27FC236}">
+              <a16:creationId xmlns:a16="http://schemas.microsoft.com/office/drawing/2014/main" id="{D407B051-0EF6-8F7B-56A4-C014AFF651F2}"/>
+            </a:ext>
+          </a:extLst>
+        </p:cNvPr>
+        <p:cNvGrpSpPr/>
+        <p:nvPr/>
+      </p:nvGrpSpPr>
+      <p:grpSpPr>
+        <a:xfrm>
+          <a:off x="0" y="0"/>
+          <a:ext cx="0" cy="0"/>
+          <a:chOff x="0" y="0"/>
+          <a:chExt cx="0" cy="0"/>
+        </a:xfrm>
+      </p:grpSpPr>
+      <p:sp>
+        <p:nvSpPr>
+          <p:cNvPr id="3" name="Slide Number Placeholder 2">
+            <a:extLst>
+              <a:ext uri="{FF2B5EF4-FFF2-40B4-BE49-F238E27FC236}">
+                <a16:creationId xmlns:a16="http://schemas.microsoft.com/office/drawing/2014/main" id="{A78766EF-93D2-0D43-4288-D3C14DFB3187}"/>
+              </a:ext>
+            </a:extLst>
+          </p:cNvPr>
+          <p:cNvSpPr>
+            <a:spLocks noGrp="1"/>
+          </p:cNvSpPr>
+          <p:nvPr>
+            <p:ph type="sldNum" idx="1"/>
+          </p:nvPr>
+        </p:nvSpPr>
+        <p:spPr>
+          <a:xfrm>
+            <a:off x="9093107" y="4704588"/>
+            <a:ext cx="480060" cy="273844"/>
+          </a:xfrm>
+        </p:spPr>
+        <p:txBody>
+          <a:bodyPr/>
+          <a:lstStyle/>
+          <a:p>
+            <a:fld id="{7475F232-FFFE-5E6C-5554-2F165DAD28C0}" type="slidenum">
+              <a:rPr lang="en-JP" smtClean="0"/>
+              <a:t>5</a:t>
+            </a:fld>
+            <a:endParaRPr lang="en-JP" dirty="0"/>
+          </a:p>
+        </p:txBody>
+      </p:sp>
+      <p:sp>
+        <p:nvSpPr>
+          <p:cNvPr id="4" name="Title 3">
+            <a:extLst>
+              <a:ext uri="{FF2B5EF4-FFF2-40B4-BE49-F238E27FC236}">
+                <a16:creationId xmlns:a16="http://schemas.microsoft.com/office/drawing/2014/main" id="{33B2CB50-C8A5-0856-D78D-E98286EBC0A2}"/>
+              </a:ext>
+            </a:extLst>
+          </p:cNvPr>
+          <p:cNvSpPr>
+            <a:spLocks noGrp="1"/>
+          </p:cNvSpPr>
+          <p:nvPr>
+            <p:ph type="title" idx="2"/>
+          </p:nvPr>
+        </p:nvSpPr>
+        <p:spPr/>
+        <p:txBody>
+          <a:bodyPr/>
+          <a:lstStyle/>
+          <a:p>
+            <a:pPr marL="0">
+              <a:buClr>
+                <a:srgbClr val="9E3611"/>
+              </a:buClr>
+            </a:pPr>
+            <a:r>
+              <a:rPr lang="en-US" sz="2400" dirty="0">
+                <a:ea typeface="游ゴシック Medium"/>
+                <a:cs typeface="Times New Roman"/>
+              </a:rPr>
+              <a:t>   Pose Graph Optimization</a:t>
+            </a:r>
+          </a:p>
+        </p:txBody>
+      </p:sp>
+      <p:sp>
+        <p:nvSpPr>
+          <p:cNvPr id="16" name="Text Placeholder 1">
+            <a:extLst>
+              <a:ext uri="{FF2B5EF4-FFF2-40B4-BE49-F238E27FC236}">
+                <a16:creationId xmlns:a16="http://schemas.microsoft.com/office/drawing/2014/main" id="{00107EA1-420E-69FE-51CB-AEE3F5273065}"/>
+              </a:ext>
+            </a:extLst>
+          </p:cNvPr>
+          <p:cNvSpPr>
+            <a:spLocks noGrp="1"/>
+          </p:cNvSpPr>
+          <p:nvPr>
+            <p:ph type="body"/>
+          </p:nvPr>
+        </p:nvSpPr>
+        <p:spPr>
+          <a:xfrm>
+            <a:off x="170325" y="707816"/>
+            <a:ext cx="8218099" cy="3986866"/>
+          </a:xfrm>
+        </p:spPr>
+        <p:txBody>
+          <a:bodyPr vert="horz" lIns="91440" tIns="45720" rIns="91440" bIns="45720" rtlCol="0" anchor="t">
+            <a:normAutofit/>
+          </a:bodyPr>
+          <a:lstStyle/>
+          <a:p>
+            <a:pPr marL="0" indent="0">
+              <a:buClr>
+                <a:srgbClr val="9E3611"/>
+              </a:buClr>
+              <a:buNone/>
+            </a:pPr>
+            <a:endParaRPr lang="en-US" sz="2000" b="0" dirty="0"/>
+          </a:p>
+          <a:p>
+            <a:pPr marL="0" indent="0">
+              <a:buClr>
+                <a:srgbClr val="9E3611"/>
+              </a:buClr>
+              <a:buNone/>
+            </a:pPr>
+            <a:endParaRPr lang="en-US" sz="2000" b="0" dirty="0"/>
+          </a:p>
+        </p:txBody>
+      </p:sp>
+    </p:spTree>
+    <p:extLst>
+      <p:ext uri="{BB962C8B-B14F-4D97-AF65-F5344CB8AC3E}">
+        <p14:creationId xmlns:p14="http://schemas.microsoft.com/office/powerpoint/2010/main" val="1411381841"/>
+      </p:ext>
+    </p:extLst>
+  </p:cSld>
+  <p:clrMapOvr>
+    <a:masterClrMapping/>
+  </p:clrMapOvr>
+</p:sld>
+</file>
+
+<file path=ppt/slides/slide6.xml><?xml version="1.0" encoding="utf-8"?>
 <p:sld xmlns:a="http://schemas.openxmlformats.org/drawingml/2006/main" xmlns:r="http://schemas.openxmlformats.org/officeDocument/2006/relationships" xmlns:p="http://schemas.openxmlformats.org/presentationml/2006/main">
   <p:cSld>
     <p:spTree>
@@ -6824,7 +7098,7 @@
           <a:p>
             <a:fld id="{7475F232-FFFE-5E6C-5554-2F165DAD28C0}" type="slidenum">
               <a:rPr lang="en-JP" smtClean="0"/>
-              <a:t>5</a:t>
+              <a:t>6</a:t>
             </a:fld>
             <a:endParaRPr lang="en-JP" dirty="0"/>
           </a:p>
@@ -6881,7 +7155,7 @@
           <p:nvPr>
             <p:extLst>
               <p:ext uri="{D42A27DB-BD31-4B8C-83A1-F6EECF244321}">
-                <p14:modId xmlns:p14="http://schemas.microsoft.com/office/powerpoint/2010/main" val="1626087587"/>
+                <p14:modId xmlns:p14="http://schemas.microsoft.com/office/powerpoint/2010/main" val="4214190468"/>
               </p:ext>
             </p:extLst>
           </p:nvPr>
@@ -7221,21 +7495,8 @@
                             <a:schemeClr val="bg1"/>
                           </a:solidFill>
                         </a:rPr>
-                        <a:t>(</a:t>
+                        <a:t>(six scans)</a:t>
                       </a:r>
-                      <a:r>
-                        <a:rPr lang="en-US" b="1">
-                          <a:solidFill>
-                            <a:schemeClr val="bg1"/>
-                          </a:solidFill>
-                        </a:rPr>
-                        <a:t>six scans)</a:t>
-                      </a:r>
-                      <a:endParaRPr lang="en-US" b="1" dirty="0">
-                        <a:solidFill>
-                          <a:schemeClr val="bg1"/>
-                        </a:solidFill>
-                      </a:endParaRPr>
                     </a:p>
                   </a:txBody>
                   <a:tcPr>
@@ -7341,8 +7602,13 @@
                     <a:p>
                       <a:r>
                         <a:rPr lang="en-US" dirty="0"/>
-                        <a:t>/</a:t>
+                        <a:t>FDR</a:t>
                       </a:r>
+                      <a:r>
+                        <a:rPr lang="en-US"/>
+                        <a:t>: 72.47%</a:t>
+                      </a:r>
+                      <a:endParaRPr lang="en-US" dirty="0"/>
                     </a:p>
                   </a:txBody>
                   <a:tcPr/>
@@ -7408,7 +7674,7 @@
 </p:sld>
 </file>
 
-<file path=ppt/slides/slide6.xml><?xml version="1.0" encoding="utf-8"?>
+<file path=ppt/slides/slide7.xml><?xml version="1.0" encoding="utf-8"?>
 <p:sld xmlns:a="http://schemas.openxmlformats.org/drawingml/2006/main" xmlns:r="http://schemas.openxmlformats.org/officeDocument/2006/relationships" xmlns:p="http://schemas.openxmlformats.org/presentationml/2006/main">
   <p:cSld>
     <p:spTree>
@@ -7459,7 +7725,7 @@
           <a:p>
             <a:fld id="{7475F232-FFFE-5E6C-5554-2F165DAD28C0}" type="slidenum">
               <a:rPr lang="en-JP" smtClean="0"/>
-              <a:t>6</a:t>
+              <a:t>7</a:t>
             </a:fld>
             <a:endParaRPr lang="en-JP" dirty="0"/>
           </a:p>
@@ -7591,7 +7857,7 @@
             </a:pPr>
             <a:r>
               <a:rPr lang="en-US" sz="2000" dirty="0"/>
-              <a:t>No cross-evaluation:</a:t>
+              <a:t>Low performance for cross-evaluation:</a:t>
             </a:r>
           </a:p>
           <a:p>
@@ -7602,15 +7868,25 @@
             </a:pPr>
             <a:r>
               <a:rPr lang="en-US" sz="2000" b="0" dirty="0"/>
-              <a:t>Different data structure TUSREC24 and TUSREC25 data sets (frame number, )</a:t>
-            </a:r>
-          </a:p>
-          <a:p>
-            <a:pPr marL="0" indent="0">
+              <a:t>Different TUSREC24 and TUSREC25 data sets</a:t>
+            </a:r>
+          </a:p>
+          <a:p>
+            <a:pPr>
               <a:buClr>
                 <a:srgbClr val="9E3611"/>
               </a:buClr>
-              <a:buNone/>
+            </a:pPr>
+            <a:r>
+              <a:rPr lang="en-US" sz="2000" b="0" dirty="0"/>
+              <a:t>No calibration or retraining of models</a:t>
+            </a:r>
+          </a:p>
+          <a:p>
+            <a:pPr>
+              <a:buClr>
+                <a:srgbClr val="9E3611"/>
+              </a:buClr>
             </a:pPr>
             <a:endParaRPr lang="en-US" sz="2000" b="0" dirty="0"/>
           </a:p>

--- a/documents/presentations/Jannis_Meyer_Presentation_01_06_2026.pptx
+++ b/documents/presentations/Jannis_Meyer_Presentation_01_06_2026.pptx
@@ -5,7 +5,7 @@
     <p:sldMasterId id="2284242785" r:id="rId4"/>
   </p:sldMasterIdLst>
   <p:notesMasterIdLst>
-    <p:notesMasterId r:id="rId12"/>
+    <p:notesMasterId r:id="rId13"/>
   </p:notesMasterIdLst>
   <p:sldIdLst>
     <p:sldId id="256" r:id="rId5"/>
@@ -15,6 +15,7 @@
     <p:sldId id="286" r:id="rId9"/>
     <p:sldId id="283" r:id="rId10"/>
     <p:sldId id="285" r:id="rId11"/>
+    <p:sldId id="287" r:id="rId12"/>
   </p:sldIdLst>
   <p:sldSz cx="9144000" cy="5143500" type="screen16x9"/>
   <p:notesSz cx="9144000" cy="6858000"/>
@@ -816,6 +817,107 @@
     <p:extLst>
       <p:ext uri="{BB962C8B-B14F-4D97-AF65-F5344CB8AC3E}">
         <p14:creationId xmlns:p14="http://schemas.microsoft.com/office/powerpoint/2010/main" val="3196550776"/>
+      </p:ext>
+    </p:extLst>
+  </p:cSld>
+  <p:clrMapOvr>
+    <a:masterClrMapping/>
+  </p:clrMapOvr>
+</p:notes>
+</file>
+
+<file path=ppt/notesSlides/notesSlide7.xml><?xml version="1.0" encoding="utf-8"?>
+<p:notes xmlns:a="http://schemas.openxmlformats.org/drawingml/2006/main" xmlns:r="http://schemas.openxmlformats.org/officeDocument/2006/relationships" xmlns:p="http://schemas.openxmlformats.org/presentationml/2006/main">
+  <p:cSld>
+    <p:spTree>
+      <p:nvGrpSpPr>
+        <p:cNvPr id="1" name="">
+          <a:extLst>
+            <a:ext uri="{FF2B5EF4-FFF2-40B4-BE49-F238E27FC236}">
+              <a16:creationId xmlns:a16="http://schemas.microsoft.com/office/drawing/2014/main" id="{FAFC1803-8A6C-3FBD-DBC2-FA922A28530A}"/>
+            </a:ext>
+          </a:extLst>
+        </p:cNvPr>
+        <p:cNvGrpSpPr/>
+        <p:nvPr/>
+      </p:nvGrpSpPr>
+      <p:grpSpPr>
+        <a:xfrm>
+          <a:off x="0" y="0"/>
+          <a:ext cx="0" cy="0"/>
+          <a:chOff x="0" y="0"/>
+          <a:chExt cx="0" cy="0"/>
+        </a:xfrm>
+      </p:grpSpPr>
+      <p:sp>
+        <p:nvSpPr>
+          <p:cNvPr id="2" name="Slide Image Placeholder 1">
+            <a:extLst>
+              <a:ext uri="{FF2B5EF4-FFF2-40B4-BE49-F238E27FC236}">
+                <a16:creationId xmlns:a16="http://schemas.microsoft.com/office/drawing/2014/main" id="{55E8D1BF-7DF1-BD75-8C21-EB8F2C8576A4}"/>
+              </a:ext>
+            </a:extLst>
+          </p:cNvPr>
+          <p:cNvSpPr>
+            <a:spLocks noGrp="1" noRot="1" noChangeAspect="1"/>
+          </p:cNvSpPr>
+          <p:nvPr>
+            <p:ph type="sldImg"/>
+          </p:nvPr>
+        </p:nvSpPr>
+        <p:spPr>
+          <a:xfrm>
+            <a:off x="2514600" y="857250"/>
+            <a:ext cx="4114800" cy="2314575"/>
+          </a:xfrm>
+          <a:prstGeom prst="rect">
+            <a:avLst/>
+          </a:prstGeom>
+          <a:noFill/>
+          <a:ln w="12700">
+            <a:solidFill>
+              <a:prstClr val="black"/>
+            </a:solidFill>
+          </a:ln>
+        </p:spPr>
+      </p:sp>
+      <p:sp>
+        <p:nvSpPr>
+          <p:cNvPr id="3" name="Notes Placeholder 2">
+            <a:extLst>
+              <a:ext uri="{FF2B5EF4-FFF2-40B4-BE49-F238E27FC236}">
+                <a16:creationId xmlns:a16="http://schemas.microsoft.com/office/drawing/2014/main" id="{188AB29E-5148-BED2-2406-67334CE64D93}"/>
+              </a:ext>
+            </a:extLst>
+          </p:cNvPr>
+          <p:cNvSpPr>
+            <a:spLocks noGrp="1"/>
+          </p:cNvSpPr>
+          <p:nvPr>
+            <p:ph type="body" idx="1"/>
+          </p:nvPr>
+        </p:nvSpPr>
+        <p:spPr>
+          <a:xfrm>
+            <a:off x="914400" y="3300413"/>
+            <a:ext cx="7315200" cy="2700337"/>
+          </a:xfrm>
+          <a:prstGeom prst="rect">
+            <a:avLst/>
+          </a:prstGeom>
+        </p:spPr>
+        <p:txBody>
+          <a:bodyPr/>
+          <a:lstStyle/>
+          <a:p>
+            <a:endParaRPr lang="en-US" dirty="0"/>
+          </a:p>
+        </p:txBody>
+      </p:sp>
+    </p:spTree>
+    <p:extLst>
+      <p:ext uri="{BB962C8B-B14F-4D97-AF65-F5344CB8AC3E}">
+        <p14:creationId xmlns:p14="http://schemas.microsoft.com/office/powerpoint/2010/main" val="3715969738"/>
       </p:ext>
     </p:extLst>
   </p:cSld>
@@ -6676,7 +6778,7 @@
         </p:spPr>
         <p:txBody>
           <a:bodyPr vert="horz" lIns="91440" tIns="45720" rIns="91440" bIns="45720" rtlCol="0" anchor="t">
-            <a:normAutofit fontScale="92500" lnSpcReduction="10000"/>
+            <a:noAutofit/>
           </a:bodyPr>
           <a:lstStyle/>
           <a:p>
@@ -6731,15 +6833,6 @@
               </a:buClr>
               <a:buNone/>
             </a:pPr>
-            <a:endParaRPr lang="en-US" sz="2000" b="0" dirty="0"/>
-          </a:p>
-          <a:p>
-            <a:pPr marL="0" indent="0">
-              <a:buClr>
-                <a:srgbClr val="9E3611"/>
-              </a:buClr>
-              <a:buNone/>
-            </a:pPr>
             <a:r>
               <a:rPr lang="en-US" sz="2000" dirty="0"/>
               <a:t>Global Point Error (GPE):</a:t>
@@ -6752,7 +6845,7 @@
               </a:buClr>
             </a:pPr>
             <a:r>
-              <a:rPr lang="en-US" sz="2000" b="0" dirty="0"/>
+              <a:rPr lang="en-US" sz="2000" b="0" i="1" dirty="0"/>
               <a:t>“Average point error between the true position and the fully reconstructed trajectory estimate at each timestep”</a:t>
             </a:r>
           </a:p>
@@ -7034,6 +7127,403 @@
           </a:p>
         </p:txBody>
       </p:sp>
+      <p:sp>
+        <p:nvSpPr>
+          <p:cNvPr id="5" name="Text Placeholder 1">
+            <a:extLst>
+              <a:ext uri="{FF2B5EF4-FFF2-40B4-BE49-F238E27FC236}">
+                <a16:creationId xmlns:a16="http://schemas.microsoft.com/office/drawing/2014/main" id="{8E78D97E-74FD-2C66-7EBF-94EB233ED3EB}"/>
+              </a:ext>
+            </a:extLst>
+          </p:cNvPr>
+          <p:cNvSpPr txBox="1">
+            <a:spLocks/>
+          </p:cNvSpPr>
+          <p:nvPr/>
+        </p:nvSpPr>
+        <p:spPr>
+          <a:xfrm>
+            <a:off x="322725" y="860216"/>
+            <a:ext cx="8218099" cy="3986866"/>
+          </a:xfrm>
+          <a:prstGeom prst="rect">
+            <a:avLst/>
+          </a:prstGeom>
+          <a:noFill/>
+        </p:spPr>
+        <p:txBody>
+          <a:bodyPr vert="horz" lIns="91440" tIns="45720" rIns="91440" bIns="45720" rtlCol="0" anchor="t">
+            <a:normAutofit/>
+          </a:bodyPr>
+          <a:lstStyle>
+            <a:lvl1pPr marL="137160" indent="-137160" algn="l" defTabSz="685800" rtl="0" eaLnBrk="1" latinLnBrk="0" hangingPunct="1">
+              <a:lnSpc>
+                <a:spcPct val="90000"/>
+              </a:lnSpc>
+              <a:spcBef>
+                <a:spcPts val="900"/>
+              </a:spcBef>
+              <a:buClr>
+                <a:schemeClr val="accent1">
+                  <a:lumMod val="75000"/>
+                </a:schemeClr>
+              </a:buClr>
+              <a:buSzPct val="100000"/>
+              <a:buFont typeface="Arial" panose="020B0604020202020204" pitchFamily="34" charset="0"/>
+              <a:buChar char="•"/>
+              <a:defRPr kumimoji="1" sz="1500" b="1" kern="1200">
+                <a:solidFill>
+                  <a:schemeClr val="tx1"/>
+                </a:solidFill>
+                <a:latin typeface="游ゴシック Medium" panose="020B0500000000000000" pitchFamily="50" charset="-128"/>
+                <a:ea typeface="游ゴシック Medium" panose="020B0500000000000000" pitchFamily="50" charset="-128"/>
+                <a:cs typeface="+mn-cs"/>
+              </a:defRPr>
+            </a:lvl1pPr>
+            <a:lvl2pPr marL="342900" indent="-137160" algn="l" defTabSz="685800" rtl="0" eaLnBrk="1" latinLnBrk="0" hangingPunct="1">
+              <a:lnSpc>
+                <a:spcPct val="90000"/>
+              </a:lnSpc>
+              <a:spcBef>
+                <a:spcPts val="300"/>
+              </a:spcBef>
+              <a:spcAft>
+                <a:spcPts val="150"/>
+              </a:spcAft>
+              <a:buClr>
+                <a:schemeClr val="accent1">
+                  <a:lumMod val="75000"/>
+                </a:schemeClr>
+              </a:buClr>
+              <a:buSzPct val="100000"/>
+              <a:buFont typeface="Arial" panose="020B0604020202020204" pitchFamily="34" charset="0"/>
+              <a:buChar char="•"/>
+              <a:defRPr kumimoji="1" sz="1350" b="1" kern="1200">
+                <a:solidFill>
+                  <a:schemeClr val="tx1"/>
+                </a:solidFill>
+                <a:latin typeface="游ゴシック Medium" panose="020B0500000000000000" pitchFamily="50" charset="-128"/>
+                <a:ea typeface="游ゴシック Medium" panose="020B0500000000000000" pitchFamily="50" charset="-128"/>
+                <a:cs typeface="+mn-cs"/>
+              </a:defRPr>
+            </a:lvl2pPr>
+            <a:lvl3pPr marL="548640" indent="-137160" algn="l" defTabSz="685800" rtl="0" eaLnBrk="1" latinLnBrk="0" hangingPunct="1">
+              <a:lnSpc>
+                <a:spcPct val="90000"/>
+              </a:lnSpc>
+              <a:spcBef>
+                <a:spcPts val="300"/>
+              </a:spcBef>
+              <a:spcAft>
+                <a:spcPts val="150"/>
+              </a:spcAft>
+              <a:buClr>
+                <a:schemeClr val="accent1">
+                  <a:lumMod val="75000"/>
+                </a:schemeClr>
+              </a:buClr>
+              <a:buSzPct val="100000"/>
+              <a:buFont typeface="Arial" panose="020B0604020202020204" pitchFamily="34" charset="0"/>
+              <a:buChar char="•"/>
+              <a:defRPr kumimoji="1" sz="1200" b="1" kern="1200">
+                <a:solidFill>
+                  <a:schemeClr val="tx1"/>
+                </a:solidFill>
+                <a:latin typeface="游ゴシック Medium" panose="020B0500000000000000" pitchFamily="50" charset="-128"/>
+                <a:ea typeface="游ゴシック Medium" panose="020B0500000000000000" pitchFamily="50" charset="-128"/>
+                <a:cs typeface="+mn-cs"/>
+              </a:defRPr>
+            </a:lvl3pPr>
+            <a:lvl4pPr marL="754380" indent="-137160" algn="l" defTabSz="685800" rtl="0" eaLnBrk="1" latinLnBrk="0" hangingPunct="1">
+              <a:lnSpc>
+                <a:spcPct val="90000"/>
+              </a:lnSpc>
+              <a:spcBef>
+                <a:spcPts val="300"/>
+              </a:spcBef>
+              <a:spcAft>
+                <a:spcPts val="150"/>
+              </a:spcAft>
+              <a:buClr>
+                <a:schemeClr val="accent1">
+                  <a:lumMod val="75000"/>
+                </a:schemeClr>
+              </a:buClr>
+              <a:buSzPct val="100000"/>
+              <a:buFont typeface="Arial" panose="020B0604020202020204" pitchFamily="34" charset="0"/>
+              <a:buChar char="•"/>
+              <a:defRPr kumimoji="1" sz="1200" b="1" kern="1200">
+                <a:solidFill>
+                  <a:schemeClr val="tx1"/>
+                </a:solidFill>
+                <a:latin typeface="游ゴシック Medium" panose="020B0500000000000000" pitchFamily="50" charset="-128"/>
+                <a:ea typeface="游ゴシック Medium" panose="020B0500000000000000" pitchFamily="50" charset="-128"/>
+                <a:cs typeface="+mn-cs"/>
+              </a:defRPr>
+            </a:lvl4pPr>
+            <a:lvl5pPr marL="960120" indent="-137160" algn="l" defTabSz="685800" rtl="0" eaLnBrk="1" latinLnBrk="0" hangingPunct="1">
+              <a:lnSpc>
+                <a:spcPct val="90000"/>
+              </a:lnSpc>
+              <a:spcBef>
+                <a:spcPts val="300"/>
+              </a:spcBef>
+              <a:spcAft>
+                <a:spcPts val="150"/>
+              </a:spcAft>
+              <a:buClr>
+                <a:schemeClr val="accent1">
+                  <a:lumMod val="75000"/>
+                </a:schemeClr>
+              </a:buClr>
+              <a:buSzPct val="100000"/>
+              <a:buFont typeface="Arial" panose="020B0604020202020204" pitchFamily="34" charset="0"/>
+              <a:buChar char="•"/>
+              <a:defRPr kumimoji="1" sz="1200" b="1" kern="1200">
+                <a:solidFill>
+                  <a:schemeClr val="tx1"/>
+                </a:solidFill>
+                <a:latin typeface="游ゴシック Medium" panose="020B0500000000000000" pitchFamily="50" charset="-128"/>
+                <a:ea typeface="游ゴシック Medium" panose="020B0500000000000000" pitchFamily="50" charset="-128"/>
+                <a:cs typeface="+mn-cs"/>
+              </a:defRPr>
+            </a:lvl5pPr>
+            <a:lvl6pPr marL="1200000" indent="-171450" algn="l" defTabSz="685800" rtl="0" eaLnBrk="1" latinLnBrk="0" hangingPunct="1">
+              <a:lnSpc>
+                <a:spcPct val="90000"/>
+              </a:lnSpc>
+              <a:spcBef>
+                <a:spcPts val="300"/>
+              </a:spcBef>
+              <a:spcAft>
+                <a:spcPts val="150"/>
+              </a:spcAft>
+              <a:buClr>
+                <a:schemeClr val="accent1">
+                  <a:lumMod val="75000"/>
+                </a:schemeClr>
+              </a:buClr>
+              <a:buSzPct val="100000"/>
+              <a:buFont typeface="Arial" panose="020B0604020202020204" pitchFamily="34" charset="0"/>
+              <a:buChar char="•"/>
+              <a:defRPr kumimoji="1" sz="1200" kern="1200">
+                <a:solidFill>
+                  <a:schemeClr val="tx1"/>
+                </a:solidFill>
+                <a:latin typeface="+mn-lt"/>
+                <a:ea typeface="+mn-ea"/>
+                <a:cs typeface="+mn-cs"/>
+              </a:defRPr>
+            </a:lvl6pPr>
+            <a:lvl7pPr marL="1425000" indent="-171450" algn="l" defTabSz="685800" rtl="0" eaLnBrk="1" latinLnBrk="0" hangingPunct="1">
+              <a:lnSpc>
+                <a:spcPct val="90000"/>
+              </a:lnSpc>
+              <a:spcBef>
+                <a:spcPts val="300"/>
+              </a:spcBef>
+              <a:spcAft>
+                <a:spcPts val="150"/>
+              </a:spcAft>
+              <a:buClr>
+                <a:schemeClr val="accent1">
+                  <a:lumMod val="75000"/>
+                </a:schemeClr>
+              </a:buClr>
+              <a:buSzPct val="100000"/>
+              <a:buFont typeface="Arial" panose="020B0604020202020204" pitchFamily="34" charset="0"/>
+              <a:buChar char="•"/>
+              <a:defRPr kumimoji="1" sz="1200" kern="1200">
+                <a:solidFill>
+                  <a:schemeClr val="tx1"/>
+                </a:solidFill>
+                <a:latin typeface="+mn-lt"/>
+                <a:ea typeface="+mn-ea"/>
+                <a:cs typeface="+mn-cs"/>
+              </a:defRPr>
+            </a:lvl7pPr>
+            <a:lvl8pPr marL="1650000" indent="-171450" algn="l" defTabSz="685800" rtl="0" eaLnBrk="1" latinLnBrk="0" hangingPunct="1">
+              <a:lnSpc>
+                <a:spcPct val="90000"/>
+              </a:lnSpc>
+              <a:spcBef>
+                <a:spcPts val="300"/>
+              </a:spcBef>
+              <a:spcAft>
+                <a:spcPts val="150"/>
+              </a:spcAft>
+              <a:buClr>
+                <a:schemeClr val="accent1">
+                  <a:lumMod val="75000"/>
+                </a:schemeClr>
+              </a:buClr>
+              <a:buSzPct val="100000"/>
+              <a:buFont typeface="Arial" panose="020B0604020202020204" pitchFamily="34" charset="0"/>
+              <a:buChar char="•"/>
+              <a:defRPr kumimoji="1" sz="1200" kern="1200">
+                <a:solidFill>
+                  <a:schemeClr val="tx1"/>
+                </a:solidFill>
+                <a:latin typeface="+mn-lt"/>
+                <a:ea typeface="+mn-ea"/>
+                <a:cs typeface="+mn-cs"/>
+              </a:defRPr>
+            </a:lvl8pPr>
+            <a:lvl9pPr marL="1875000" indent="-171450" algn="l" defTabSz="685800" rtl="0" eaLnBrk="1" latinLnBrk="0" hangingPunct="1">
+              <a:lnSpc>
+                <a:spcPct val="90000"/>
+              </a:lnSpc>
+              <a:spcBef>
+                <a:spcPts val="300"/>
+              </a:spcBef>
+              <a:spcAft>
+                <a:spcPts val="150"/>
+              </a:spcAft>
+              <a:buClr>
+                <a:schemeClr val="accent1">
+                  <a:lumMod val="75000"/>
+                </a:schemeClr>
+              </a:buClr>
+              <a:buSzPct val="100000"/>
+              <a:buFont typeface="Arial" panose="020B0604020202020204" pitchFamily="34" charset="0"/>
+              <a:buChar char="•"/>
+              <a:defRPr kumimoji="1" sz="1200" kern="1200">
+                <a:solidFill>
+                  <a:schemeClr val="tx1"/>
+                </a:solidFill>
+                <a:latin typeface="+mn-lt"/>
+                <a:ea typeface="+mn-ea"/>
+                <a:cs typeface="+mn-cs"/>
+              </a:defRPr>
+            </a:lvl9pPr>
+          </a:lstStyle>
+          <a:p>
+            <a:pPr marL="0" indent="0">
+              <a:buClr>
+                <a:srgbClr val="9E3611"/>
+              </a:buClr>
+              <a:buFont typeface="Arial" panose="020B0604020202020204" pitchFamily="34" charset="0"/>
+              <a:buNone/>
+            </a:pPr>
+            <a:r>
+              <a:rPr lang="en-US" sz="2000" dirty="0"/>
+              <a:t>Optimizer:</a:t>
+            </a:r>
+          </a:p>
+          <a:p>
+            <a:pPr>
+              <a:buClr>
+                <a:srgbClr val="9E3611"/>
+              </a:buClr>
+            </a:pPr>
+            <a:r>
+              <a:rPr lang="en-US" sz="2000" b="0" dirty="0"/>
+              <a:t>Levenberg-Marquardt: Additional factor to Jacobi-matrices for solving linear optimization problem</a:t>
+            </a:r>
+          </a:p>
+          <a:p>
+            <a:pPr marL="0" indent="0">
+              <a:buClr>
+                <a:srgbClr val="9E3611"/>
+              </a:buClr>
+              <a:buNone/>
+            </a:pPr>
+            <a:endParaRPr lang="en-US" sz="2000" b="0" dirty="0"/>
+          </a:p>
+          <a:p>
+            <a:pPr marL="0" indent="0">
+              <a:buClr>
+                <a:srgbClr val="9E3611"/>
+              </a:buClr>
+              <a:buNone/>
+            </a:pPr>
+            <a:r>
+              <a:rPr lang="en-US" sz="2000" dirty="0"/>
+              <a:t>Weights:</a:t>
+            </a:r>
+          </a:p>
+          <a:p>
+            <a:pPr>
+              <a:buClr>
+                <a:srgbClr val="9E3611"/>
+              </a:buClr>
+            </a:pPr>
+            <a:r>
+              <a:rPr lang="en-US" sz="2000" b="0" dirty="0"/>
+              <a:t>Prior (first node): 6*10</a:t>
+            </a:r>
+            <a:r>
+              <a:rPr lang="en-US" sz="2000" b="0" baseline="30000" dirty="0"/>
+              <a:t>5</a:t>
+            </a:r>
+            <a:endParaRPr lang="en-US" sz="2000" b="0" dirty="0"/>
+          </a:p>
+          <a:p>
+            <a:pPr>
+              <a:buClr>
+                <a:srgbClr val="9E3611"/>
+              </a:buClr>
+            </a:pPr>
+            <a:r>
+              <a:rPr lang="en-US" sz="2000" b="0" dirty="0"/>
+              <a:t>Rest: 6*10</a:t>
+            </a:r>
+            <a:r>
+              <a:rPr lang="en-US" sz="2000" b="0" baseline="30000" dirty="0"/>
+              <a:t>2</a:t>
+            </a:r>
+          </a:p>
+          <a:p>
+            <a:pPr marL="0" indent="0">
+              <a:buClr>
+                <a:srgbClr val="9E3611"/>
+              </a:buClr>
+              <a:buNone/>
+            </a:pPr>
+            <a:endParaRPr lang="en-US" sz="2000" b="0" baseline="30000" dirty="0"/>
+          </a:p>
+          <a:p>
+            <a:pPr marL="0" indent="0">
+              <a:buClr>
+                <a:srgbClr val="9E3611"/>
+              </a:buClr>
+              <a:buNone/>
+            </a:pPr>
+            <a:r>
+              <a:rPr lang="en-US" sz="2000" dirty="0">
+                <a:solidFill>
+                  <a:schemeClr val="accent1"/>
+                </a:solidFill>
+              </a:rPr>
+              <a:t>➔ </a:t>
+            </a:r>
+            <a:r>
+              <a:rPr lang="en-US" sz="2000" b="0" dirty="0"/>
+              <a:t>Base line PGO, no individual weighting nor additional edges yet</a:t>
+            </a:r>
+          </a:p>
+          <a:p>
+            <a:pPr marL="0" indent="0">
+              <a:buClr>
+                <a:srgbClr val="9E3611"/>
+              </a:buClr>
+              <a:buFont typeface="Arial" panose="020B0604020202020204" pitchFamily="34" charset="0"/>
+              <a:buNone/>
+            </a:pPr>
+            <a:endParaRPr lang="en-US" sz="2000" b="0" dirty="0"/>
+          </a:p>
+          <a:p>
+            <a:pPr marL="0" indent="0">
+              <a:buClr>
+                <a:srgbClr val="9E3611"/>
+              </a:buClr>
+              <a:buFont typeface="Arial" panose="020B0604020202020204" pitchFamily="34" charset="0"/>
+              <a:buNone/>
+            </a:pPr>
+            <a:endParaRPr lang="en-US" sz="2000" b="0" dirty="0"/>
+          </a:p>
+        </p:txBody>
+      </p:sp>
     </p:spTree>
     <p:extLst>
       <p:ext uri="{BB962C8B-B14F-4D97-AF65-F5344CB8AC3E}">
@@ -7155,7 +7645,7 @@
           <p:nvPr>
             <p:extLst>
               <p:ext uri="{D42A27DB-BD31-4B8C-83A1-F6EECF244321}">
-                <p14:modId xmlns:p14="http://schemas.microsoft.com/office/powerpoint/2010/main" val="4214190468"/>
+                <p14:modId xmlns:p14="http://schemas.microsoft.com/office/powerpoint/2010/main" val="759695160"/>
               </p:ext>
             </p:extLst>
           </p:nvPr>
@@ -7380,7 +7870,7 @@
                           <a:ea typeface="+mn-ea"/>
                           <a:cs typeface="+mn-cs"/>
                         </a:rPr>
-                        <a:t>28.54%</a:t>
+                        <a:t>28.5%</a:t>
                       </a:r>
                     </a:p>
                     <a:p>
@@ -7427,7 +7917,7 @@
                     <a:p>
                       <a:r>
                         <a:rPr lang="en-US" dirty="0"/>
-                        <a:t>/</a:t>
+                        <a:t>FDR: 28.6%</a:t>
                       </a:r>
                     </a:p>
                   </a:txBody>
@@ -7520,7 +8010,7 @@
                           <a:ea typeface="+mn-ea"/>
                           <a:cs typeface="+mn-cs"/>
                         </a:rPr>
-                        <a:t>FDR: 488.77%</a:t>
+                        <a:t>FDR: 488.8%</a:t>
                       </a:r>
                     </a:p>
                     <a:p>
@@ -7545,7 +8035,7 @@
                           <a:ea typeface="+mn-ea"/>
                           <a:cs typeface="+mn-cs"/>
                         </a:rPr>
-                        <a:t>GPE: 56.53mm</a:t>
+                        <a:t>GPE: 56.5mm</a:t>
                       </a:r>
                     </a:p>
                   </a:txBody>
@@ -7602,13 +8092,8 @@
                     <a:p>
                       <a:r>
                         <a:rPr lang="en-US" dirty="0"/>
-                        <a:t>FDR</a:t>
+                        <a:t>FDR: 72.5%</a:t>
                       </a:r>
-                      <a:r>
-                        <a:rPr lang="en-US"/>
-                        <a:t>: 72.47%</a:t>
-                      </a:r>
-                      <a:endParaRPr lang="en-US" dirty="0"/>
                     </a:p>
                   </a:txBody>
                   <a:tcPr/>
@@ -7758,12 +8243,16 @@
               </a:buClr>
             </a:pPr>
             <a:r>
-              <a:rPr lang="en-US" sz="2400" dirty="0">
+              <a:rPr lang="en-US" sz="2400">
                 <a:ea typeface="游ゴシック Medium"/>
                 <a:cs typeface="Times New Roman"/>
               </a:rPr>
-              <a:t>   Explanations</a:t>
-            </a:r>
+              <a:t>   Explanations of Results</a:t>
+            </a:r>
+            <a:endParaRPr lang="en-US" sz="2400" dirty="0">
+              <a:ea typeface="游ゴシック Medium"/>
+              <a:cs typeface="Times New Roman"/>
+            </a:endParaRPr>
           </a:p>
         </p:txBody>
       </p:sp>
@@ -7791,7 +8280,7 @@
         </p:spPr>
         <p:txBody>
           <a:bodyPr vert="horz" lIns="91440" tIns="45720" rIns="91440" bIns="45720" rtlCol="0" anchor="t">
-            <a:normAutofit/>
+            <a:normAutofit lnSpcReduction="10000"/>
           </a:bodyPr>
           <a:lstStyle/>
           <a:p>
@@ -7837,6 +8326,48 @@
             <a:r>
               <a:rPr lang="en-US" sz="2000" b="0" dirty="0"/>
               <a:t>TUSREC challenge rating does not evaluate FDR</a:t>
+            </a:r>
+          </a:p>
+          <a:p>
+            <a:pPr>
+              <a:buClr>
+                <a:srgbClr val="9E3611"/>
+              </a:buClr>
+            </a:pPr>
+            <a:endParaRPr lang="en-US" sz="2000" b="0" dirty="0"/>
+          </a:p>
+          <a:p>
+            <a:pPr marL="0" indent="0">
+              <a:buClr>
+                <a:srgbClr val="9E3611"/>
+              </a:buClr>
+              <a:buNone/>
+            </a:pPr>
+            <a:r>
+              <a:rPr lang="en-US" sz="2000" dirty="0"/>
+              <a:t>Low performance for cross-evaluation:</a:t>
+            </a:r>
+          </a:p>
+          <a:p>
+            <a:pPr>
+              <a:buClr>
+                <a:srgbClr val="9E3611"/>
+              </a:buClr>
+            </a:pPr>
+            <a:r>
+              <a:rPr lang="en-US" sz="2000" b="0" dirty="0"/>
+              <a:t>Different TUSREC24 and TUSREC25 data sets</a:t>
+            </a:r>
+          </a:p>
+          <a:p>
+            <a:pPr>
+              <a:buClr>
+                <a:srgbClr val="9E3611"/>
+              </a:buClr>
+            </a:pPr>
+            <a:r>
+              <a:rPr lang="en-US" sz="2000" b="0" dirty="0"/>
+              <a:t>No calibration or retraining of models</a:t>
             </a:r>
           </a:p>
           <a:p>
@@ -7857,7 +8388,7 @@
             </a:pPr>
             <a:r>
               <a:rPr lang="en-US" sz="2000" dirty="0"/>
-              <a:t>Low performance for cross-evaluation:</a:t>
+              <a:t>Near-zero improvement from PGO:</a:t>
             </a:r>
           </a:p>
           <a:p>
@@ -7868,27 +8399,8 @@
             </a:pPr>
             <a:r>
               <a:rPr lang="en-US" sz="2000" b="0" dirty="0"/>
-              <a:t>Different TUSREC24 and TUSREC25 data sets</a:t>
-            </a:r>
-          </a:p>
-          <a:p>
-            <a:pPr>
-              <a:buClr>
-                <a:srgbClr val="9E3611"/>
-              </a:buClr>
-            </a:pPr>
-            <a:r>
-              <a:rPr lang="en-US" sz="2000" b="0" dirty="0"/>
-              <a:t>No calibration or retraining of models</a:t>
-            </a:r>
-          </a:p>
-          <a:p>
-            <a:pPr>
-              <a:buClr>
-                <a:srgbClr val="9E3611"/>
-              </a:buClr>
-            </a:pPr>
-            <a:endParaRPr lang="en-US" sz="2000" b="0" dirty="0"/>
+              <a:t>Base line, perfect consistency of graph</a:t>
+            </a:r>
           </a:p>
           <a:p>
             <a:pPr marL="0" indent="0">
@@ -7943,6 +8455,181 @@
     <p:extLst>
       <p:ext uri="{BB962C8B-B14F-4D97-AF65-F5344CB8AC3E}">
         <p14:creationId xmlns:p14="http://schemas.microsoft.com/office/powerpoint/2010/main" val="4193761839"/>
+      </p:ext>
+    </p:extLst>
+  </p:cSld>
+  <p:clrMapOvr>
+    <a:masterClrMapping/>
+  </p:clrMapOvr>
+</p:sld>
+</file>
+
+<file path=ppt/slides/slide8.xml><?xml version="1.0" encoding="utf-8"?>
+<p:sld xmlns:a="http://schemas.openxmlformats.org/drawingml/2006/main" xmlns:r="http://schemas.openxmlformats.org/officeDocument/2006/relationships" xmlns:p="http://schemas.openxmlformats.org/presentationml/2006/main">
+  <p:cSld>
+    <p:spTree>
+      <p:nvGrpSpPr>
+        <p:cNvPr id="1" name="">
+          <a:extLst>
+            <a:ext uri="{FF2B5EF4-FFF2-40B4-BE49-F238E27FC236}">
+              <a16:creationId xmlns:a16="http://schemas.microsoft.com/office/drawing/2014/main" id="{5AE726CA-0C73-DB6F-B294-0390FAAB0F12}"/>
+            </a:ext>
+          </a:extLst>
+        </p:cNvPr>
+        <p:cNvGrpSpPr/>
+        <p:nvPr/>
+      </p:nvGrpSpPr>
+      <p:grpSpPr>
+        <a:xfrm>
+          <a:off x="0" y="0"/>
+          <a:ext cx="0" cy="0"/>
+          <a:chOff x="0" y="0"/>
+          <a:chExt cx="0" cy="0"/>
+        </a:xfrm>
+      </p:grpSpPr>
+      <p:sp>
+        <p:nvSpPr>
+          <p:cNvPr id="3" name="Slide Number Placeholder 2">
+            <a:extLst>
+              <a:ext uri="{FF2B5EF4-FFF2-40B4-BE49-F238E27FC236}">
+                <a16:creationId xmlns:a16="http://schemas.microsoft.com/office/drawing/2014/main" id="{92C7D031-FCFC-5294-550C-4173DEE77689}"/>
+              </a:ext>
+            </a:extLst>
+          </p:cNvPr>
+          <p:cNvSpPr>
+            <a:spLocks noGrp="1"/>
+          </p:cNvSpPr>
+          <p:nvPr>
+            <p:ph type="sldNum" idx="1"/>
+          </p:nvPr>
+        </p:nvSpPr>
+        <p:spPr>
+          <a:xfrm>
+            <a:off x="9093107" y="4704588"/>
+            <a:ext cx="480060" cy="273844"/>
+          </a:xfrm>
+        </p:spPr>
+        <p:txBody>
+          <a:bodyPr/>
+          <a:lstStyle/>
+          <a:p>
+            <a:fld id="{7475F232-FFFE-5E6C-5554-2F165DAD28C0}" type="slidenum">
+              <a:rPr lang="en-JP" smtClean="0"/>
+              <a:t>8</a:t>
+            </a:fld>
+            <a:endParaRPr lang="en-JP" dirty="0"/>
+          </a:p>
+        </p:txBody>
+      </p:sp>
+      <p:sp>
+        <p:nvSpPr>
+          <p:cNvPr id="4" name="Title 3">
+            <a:extLst>
+              <a:ext uri="{FF2B5EF4-FFF2-40B4-BE49-F238E27FC236}">
+                <a16:creationId xmlns:a16="http://schemas.microsoft.com/office/drawing/2014/main" id="{56478381-4841-7228-4B1D-4F7BD3499DF0}"/>
+              </a:ext>
+            </a:extLst>
+          </p:cNvPr>
+          <p:cNvSpPr>
+            <a:spLocks noGrp="1"/>
+          </p:cNvSpPr>
+          <p:nvPr>
+            <p:ph type="title" idx="2"/>
+          </p:nvPr>
+        </p:nvSpPr>
+        <p:spPr/>
+        <p:txBody>
+          <a:bodyPr/>
+          <a:lstStyle/>
+          <a:p>
+            <a:pPr marL="0">
+              <a:buClr>
+                <a:srgbClr val="9E3611"/>
+              </a:buClr>
+            </a:pPr>
+            <a:r>
+              <a:rPr lang="en-US" sz="2400" dirty="0">
+                <a:ea typeface="游ゴシック Medium"/>
+                <a:cs typeface="Times New Roman"/>
+              </a:rPr>
+              <a:t>   What else?</a:t>
+            </a:r>
+          </a:p>
+        </p:txBody>
+      </p:sp>
+      <p:sp>
+        <p:nvSpPr>
+          <p:cNvPr id="16" name="Text Placeholder 1">
+            <a:extLst>
+              <a:ext uri="{FF2B5EF4-FFF2-40B4-BE49-F238E27FC236}">
+                <a16:creationId xmlns:a16="http://schemas.microsoft.com/office/drawing/2014/main" id="{321A1F38-7EB0-6CA7-732A-8A35F3AD5CB0}"/>
+              </a:ext>
+            </a:extLst>
+          </p:cNvPr>
+          <p:cNvSpPr>
+            <a:spLocks noGrp="1"/>
+          </p:cNvSpPr>
+          <p:nvPr>
+            <p:ph type="body"/>
+          </p:nvPr>
+        </p:nvSpPr>
+        <p:spPr>
+          <a:xfrm>
+            <a:off x="170325" y="707816"/>
+            <a:ext cx="8218099" cy="3986866"/>
+          </a:xfrm>
+        </p:spPr>
+        <p:txBody>
+          <a:bodyPr vert="horz" lIns="91440" tIns="45720" rIns="91440" bIns="45720" rtlCol="0" anchor="t">
+            <a:normAutofit/>
+          </a:bodyPr>
+          <a:lstStyle/>
+          <a:p>
+            <a:pPr>
+              <a:buClr>
+                <a:srgbClr val="9E3611"/>
+              </a:buClr>
+            </a:pPr>
+            <a:r>
+              <a:rPr lang="en-US" sz="2000" b="0" dirty="0"/>
+              <a:t>Writing Master thesis</a:t>
+            </a:r>
+          </a:p>
+          <a:p>
+            <a:pPr marL="0" indent="0">
+              <a:buClr>
+                <a:srgbClr val="9E3611"/>
+              </a:buClr>
+              <a:buNone/>
+            </a:pPr>
+            <a:endParaRPr lang="en-US" sz="2000" b="0" dirty="0"/>
+          </a:p>
+          <a:p>
+            <a:pPr>
+              <a:buClr>
+                <a:srgbClr val="9E3611"/>
+              </a:buClr>
+            </a:pPr>
+            <a:r>
+              <a:rPr lang="en-US" sz="2000" b="0" dirty="0"/>
+              <a:t>Reading</a:t>
+            </a:r>
+          </a:p>
+          <a:p>
+            <a:pPr marL="0" indent="0">
+              <a:buClr>
+                <a:srgbClr val="9E3611"/>
+              </a:buClr>
+              <a:buNone/>
+            </a:pPr>
+            <a:endParaRPr lang="en-US" sz="2000" b="0" dirty="0"/>
+          </a:p>
+        </p:txBody>
+      </p:sp>
+    </p:spTree>
+    <p:extLst>
+      <p:ext uri="{BB962C8B-B14F-4D97-AF65-F5344CB8AC3E}">
+        <p14:creationId xmlns:p14="http://schemas.microsoft.com/office/powerpoint/2010/main" val="3849738365"/>
       </p:ext>
     </p:extLst>
   </p:cSld>

--- a/documents/presentations/Jannis_Meyer_Presentation_01_06_2026.pptx
+++ b/documents/presentations/Jannis_Meyer_Presentation_01_06_2026.pptx
@@ -5,7 +5,7 @@
     <p:sldMasterId id="2284242785" r:id="rId4"/>
   </p:sldMasterIdLst>
   <p:notesMasterIdLst>
-    <p:notesMasterId r:id="rId13"/>
+    <p:notesMasterId r:id="rId15"/>
   </p:notesMasterIdLst>
   <p:sldIdLst>
     <p:sldId id="256" r:id="rId5"/>
@@ -16,6 +16,8 @@
     <p:sldId id="283" r:id="rId10"/>
     <p:sldId id="285" r:id="rId11"/>
     <p:sldId id="287" r:id="rId12"/>
+    <p:sldId id="288" r:id="rId13"/>
+    <p:sldId id="289" r:id="rId14"/>
   </p:sldIdLst>
   <p:sldSz cx="9144000" cy="5143500" type="screen16x9"/>
   <p:notesSz cx="9144000" cy="6858000"/>
@@ -918,6 +920,208 @@
     <p:extLst>
       <p:ext uri="{BB962C8B-B14F-4D97-AF65-F5344CB8AC3E}">
         <p14:creationId xmlns:p14="http://schemas.microsoft.com/office/powerpoint/2010/main" val="3715969738"/>
+      </p:ext>
+    </p:extLst>
+  </p:cSld>
+  <p:clrMapOvr>
+    <a:masterClrMapping/>
+  </p:clrMapOvr>
+</p:notes>
+</file>
+
+<file path=ppt/notesSlides/notesSlide8.xml><?xml version="1.0" encoding="utf-8"?>
+<p:notes xmlns:a="http://schemas.openxmlformats.org/drawingml/2006/main" xmlns:r="http://schemas.openxmlformats.org/officeDocument/2006/relationships" xmlns:p="http://schemas.openxmlformats.org/presentationml/2006/main">
+  <p:cSld>
+    <p:spTree>
+      <p:nvGrpSpPr>
+        <p:cNvPr id="1" name="">
+          <a:extLst>
+            <a:ext uri="{FF2B5EF4-FFF2-40B4-BE49-F238E27FC236}">
+              <a16:creationId xmlns:a16="http://schemas.microsoft.com/office/drawing/2014/main" id="{B58B1C46-4E65-E93E-2442-6E4ED72D93A0}"/>
+            </a:ext>
+          </a:extLst>
+        </p:cNvPr>
+        <p:cNvGrpSpPr/>
+        <p:nvPr/>
+      </p:nvGrpSpPr>
+      <p:grpSpPr>
+        <a:xfrm>
+          <a:off x="0" y="0"/>
+          <a:ext cx="0" cy="0"/>
+          <a:chOff x="0" y="0"/>
+          <a:chExt cx="0" cy="0"/>
+        </a:xfrm>
+      </p:grpSpPr>
+      <p:sp>
+        <p:nvSpPr>
+          <p:cNvPr id="2" name="Slide Image Placeholder 1">
+            <a:extLst>
+              <a:ext uri="{FF2B5EF4-FFF2-40B4-BE49-F238E27FC236}">
+                <a16:creationId xmlns:a16="http://schemas.microsoft.com/office/drawing/2014/main" id="{673AE776-D8E7-8B49-4B82-41D2C9B13B52}"/>
+              </a:ext>
+            </a:extLst>
+          </p:cNvPr>
+          <p:cNvSpPr>
+            <a:spLocks noGrp="1" noRot="1" noChangeAspect="1"/>
+          </p:cNvSpPr>
+          <p:nvPr>
+            <p:ph type="sldImg"/>
+          </p:nvPr>
+        </p:nvSpPr>
+        <p:spPr>
+          <a:xfrm>
+            <a:off x="2514600" y="857250"/>
+            <a:ext cx="4114800" cy="2314575"/>
+          </a:xfrm>
+          <a:prstGeom prst="rect">
+            <a:avLst/>
+          </a:prstGeom>
+          <a:noFill/>
+          <a:ln w="12700">
+            <a:solidFill>
+              <a:prstClr val="black"/>
+            </a:solidFill>
+          </a:ln>
+        </p:spPr>
+      </p:sp>
+      <p:sp>
+        <p:nvSpPr>
+          <p:cNvPr id="3" name="Notes Placeholder 2">
+            <a:extLst>
+              <a:ext uri="{FF2B5EF4-FFF2-40B4-BE49-F238E27FC236}">
+                <a16:creationId xmlns:a16="http://schemas.microsoft.com/office/drawing/2014/main" id="{6C68AC5B-B7E6-3B4E-1AEA-7F35DF4B1173}"/>
+              </a:ext>
+            </a:extLst>
+          </p:cNvPr>
+          <p:cNvSpPr>
+            <a:spLocks noGrp="1"/>
+          </p:cNvSpPr>
+          <p:nvPr>
+            <p:ph type="body" idx="1"/>
+          </p:nvPr>
+        </p:nvSpPr>
+        <p:spPr>
+          <a:xfrm>
+            <a:off x="914400" y="3300413"/>
+            <a:ext cx="7315200" cy="2700337"/>
+          </a:xfrm>
+          <a:prstGeom prst="rect">
+            <a:avLst/>
+          </a:prstGeom>
+        </p:spPr>
+        <p:txBody>
+          <a:bodyPr/>
+          <a:lstStyle/>
+          <a:p>
+            <a:endParaRPr lang="en-US" dirty="0"/>
+          </a:p>
+        </p:txBody>
+      </p:sp>
+    </p:spTree>
+    <p:extLst>
+      <p:ext uri="{BB962C8B-B14F-4D97-AF65-F5344CB8AC3E}">
+        <p14:creationId xmlns:p14="http://schemas.microsoft.com/office/powerpoint/2010/main" val="2698343785"/>
+      </p:ext>
+    </p:extLst>
+  </p:cSld>
+  <p:clrMapOvr>
+    <a:masterClrMapping/>
+  </p:clrMapOvr>
+</p:notes>
+</file>
+
+<file path=ppt/notesSlides/notesSlide9.xml><?xml version="1.0" encoding="utf-8"?>
+<p:notes xmlns:a="http://schemas.openxmlformats.org/drawingml/2006/main" xmlns:r="http://schemas.openxmlformats.org/officeDocument/2006/relationships" xmlns:p="http://schemas.openxmlformats.org/presentationml/2006/main">
+  <p:cSld>
+    <p:spTree>
+      <p:nvGrpSpPr>
+        <p:cNvPr id="1" name="">
+          <a:extLst>
+            <a:ext uri="{FF2B5EF4-FFF2-40B4-BE49-F238E27FC236}">
+              <a16:creationId xmlns:a16="http://schemas.microsoft.com/office/drawing/2014/main" id="{B456F6D0-3100-79C4-7AA9-879773F7A22C}"/>
+            </a:ext>
+          </a:extLst>
+        </p:cNvPr>
+        <p:cNvGrpSpPr/>
+        <p:nvPr/>
+      </p:nvGrpSpPr>
+      <p:grpSpPr>
+        <a:xfrm>
+          <a:off x="0" y="0"/>
+          <a:ext cx="0" cy="0"/>
+          <a:chOff x="0" y="0"/>
+          <a:chExt cx="0" cy="0"/>
+        </a:xfrm>
+      </p:grpSpPr>
+      <p:sp>
+        <p:nvSpPr>
+          <p:cNvPr id="2" name="Slide Image Placeholder 1">
+            <a:extLst>
+              <a:ext uri="{FF2B5EF4-FFF2-40B4-BE49-F238E27FC236}">
+                <a16:creationId xmlns:a16="http://schemas.microsoft.com/office/drawing/2014/main" id="{C4721FE9-E15C-3631-B457-B85439BDB37B}"/>
+              </a:ext>
+            </a:extLst>
+          </p:cNvPr>
+          <p:cNvSpPr>
+            <a:spLocks noGrp="1" noRot="1" noChangeAspect="1"/>
+          </p:cNvSpPr>
+          <p:nvPr>
+            <p:ph type="sldImg"/>
+          </p:nvPr>
+        </p:nvSpPr>
+        <p:spPr>
+          <a:xfrm>
+            <a:off x="2514600" y="857250"/>
+            <a:ext cx="4114800" cy="2314575"/>
+          </a:xfrm>
+          <a:prstGeom prst="rect">
+            <a:avLst/>
+          </a:prstGeom>
+          <a:noFill/>
+          <a:ln w="12700">
+            <a:solidFill>
+              <a:prstClr val="black"/>
+            </a:solidFill>
+          </a:ln>
+        </p:spPr>
+      </p:sp>
+      <p:sp>
+        <p:nvSpPr>
+          <p:cNvPr id="3" name="Notes Placeholder 2">
+            <a:extLst>
+              <a:ext uri="{FF2B5EF4-FFF2-40B4-BE49-F238E27FC236}">
+                <a16:creationId xmlns:a16="http://schemas.microsoft.com/office/drawing/2014/main" id="{49E508A6-9778-0A51-71DE-079E8F4C628E}"/>
+              </a:ext>
+            </a:extLst>
+          </p:cNvPr>
+          <p:cNvSpPr>
+            <a:spLocks noGrp="1"/>
+          </p:cNvSpPr>
+          <p:nvPr>
+            <p:ph type="body" idx="1"/>
+          </p:nvPr>
+        </p:nvSpPr>
+        <p:spPr>
+          <a:xfrm>
+            <a:off x="914400" y="3300413"/>
+            <a:ext cx="7315200" cy="2700337"/>
+          </a:xfrm>
+          <a:prstGeom prst="rect">
+            <a:avLst/>
+          </a:prstGeom>
+        </p:spPr>
+        <p:txBody>
+          <a:bodyPr/>
+          <a:lstStyle/>
+          <a:p>
+            <a:endParaRPr lang="en-US" dirty="0"/>
+          </a:p>
+        </p:txBody>
+      </p:sp>
+    </p:spTree>
+    <p:extLst>
+      <p:ext uri="{BB962C8B-B14F-4D97-AF65-F5344CB8AC3E}">
+        <p14:creationId xmlns:p14="http://schemas.microsoft.com/office/powerpoint/2010/main" val="1468915175"/>
       </p:ext>
     </p:extLst>
   </p:cSld>
@@ -2655,6 +2859,204 @@
 </p:sld>
 </file>
 
+<file path=ppt/slides/slide10.xml><?xml version="1.0" encoding="utf-8"?>
+<p:sld xmlns:a="http://schemas.openxmlformats.org/drawingml/2006/main" xmlns:r="http://schemas.openxmlformats.org/officeDocument/2006/relationships" xmlns:p="http://schemas.openxmlformats.org/presentationml/2006/main">
+  <p:cSld>
+    <p:spTree>
+      <p:nvGrpSpPr>
+        <p:cNvPr id="1" name="">
+          <a:extLst>
+            <a:ext uri="{FF2B5EF4-FFF2-40B4-BE49-F238E27FC236}">
+              <a16:creationId xmlns:a16="http://schemas.microsoft.com/office/drawing/2014/main" id="{4C1FC825-EA20-2DF9-0CC1-759E20FBCDD8}"/>
+            </a:ext>
+          </a:extLst>
+        </p:cNvPr>
+        <p:cNvGrpSpPr/>
+        <p:nvPr/>
+      </p:nvGrpSpPr>
+      <p:grpSpPr>
+        <a:xfrm>
+          <a:off x="0" y="0"/>
+          <a:ext cx="0" cy="0"/>
+          <a:chOff x="0" y="0"/>
+          <a:chExt cx="0" cy="0"/>
+        </a:xfrm>
+      </p:grpSpPr>
+      <p:sp>
+        <p:nvSpPr>
+          <p:cNvPr id="3" name="Slide Number Placeholder 2">
+            <a:extLst>
+              <a:ext uri="{FF2B5EF4-FFF2-40B4-BE49-F238E27FC236}">
+                <a16:creationId xmlns:a16="http://schemas.microsoft.com/office/drawing/2014/main" id="{C6FFC526-D2F6-722E-5995-A5B6FE708617}"/>
+              </a:ext>
+            </a:extLst>
+          </p:cNvPr>
+          <p:cNvSpPr>
+            <a:spLocks noGrp="1"/>
+          </p:cNvSpPr>
+          <p:nvPr>
+            <p:ph type="sldNum" idx="1"/>
+          </p:nvPr>
+        </p:nvSpPr>
+        <p:spPr>
+          <a:xfrm>
+            <a:off x="9093107" y="4704588"/>
+            <a:ext cx="480060" cy="273844"/>
+          </a:xfrm>
+        </p:spPr>
+        <p:txBody>
+          <a:bodyPr/>
+          <a:lstStyle/>
+          <a:p>
+            <a:fld id="{7475F232-FFFE-5E6C-5554-2F165DAD28C0}" type="slidenum">
+              <a:rPr lang="en-JP" smtClean="0"/>
+              <a:t>10</a:t>
+            </a:fld>
+            <a:endParaRPr lang="en-JP" dirty="0"/>
+          </a:p>
+        </p:txBody>
+      </p:sp>
+      <p:sp>
+        <p:nvSpPr>
+          <p:cNvPr id="4" name="Title 3">
+            <a:extLst>
+              <a:ext uri="{FF2B5EF4-FFF2-40B4-BE49-F238E27FC236}">
+                <a16:creationId xmlns:a16="http://schemas.microsoft.com/office/drawing/2014/main" id="{F216613E-BA4C-F197-DEDA-9CD69CC962E1}"/>
+              </a:ext>
+            </a:extLst>
+          </p:cNvPr>
+          <p:cNvSpPr>
+            <a:spLocks noGrp="1"/>
+          </p:cNvSpPr>
+          <p:nvPr>
+            <p:ph type="title" idx="2"/>
+          </p:nvPr>
+        </p:nvSpPr>
+        <p:spPr/>
+        <p:txBody>
+          <a:bodyPr/>
+          <a:lstStyle/>
+          <a:p>
+            <a:pPr marL="0">
+              <a:buClr>
+                <a:srgbClr val="9E3611"/>
+              </a:buClr>
+            </a:pPr>
+            <a:r>
+              <a:rPr lang="en-US" sz="2400" dirty="0">
+                <a:ea typeface="游ゴシック Medium"/>
+                <a:cs typeface="Times New Roman"/>
+              </a:rPr>
+              <a:t>   Sources</a:t>
+            </a:r>
+          </a:p>
+        </p:txBody>
+      </p:sp>
+      <p:sp>
+        <p:nvSpPr>
+          <p:cNvPr id="16" name="Text Placeholder 1">
+            <a:extLst>
+              <a:ext uri="{FF2B5EF4-FFF2-40B4-BE49-F238E27FC236}">
+                <a16:creationId xmlns:a16="http://schemas.microsoft.com/office/drawing/2014/main" id="{DBD762D5-1AB2-3853-4553-76D09EEE9794}"/>
+              </a:ext>
+            </a:extLst>
+          </p:cNvPr>
+          <p:cNvSpPr>
+            <a:spLocks noGrp="1"/>
+          </p:cNvSpPr>
+          <p:nvPr>
+            <p:ph type="body"/>
+          </p:nvPr>
+        </p:nvSpPr>
+        <p:spPr>
+          <a:xfrm>
+            <a:off x="170325" y="707816"/>
+            <a:ext cx="8218099" cy="3986866"/>
+          </a:xfrm>
+        </p:spPr>
+        <p:txBody>
+          <a:bodyPr vert="horz" lIns="91440" tIns="45720" rIns="91440" bIns="45720" rtlCol="0" anchor="t">
+            <a:normAutofit/>
+          </a:bodyPr>
+          <a:lstStyle/>
+          <a:p>
+            <a:pPr marL="0" indent="0">
+              <a:buClr>
+                <a:srgbClr val="9E3611"/>
+              </a:buClr>
+              <a:buNone/>
+            </a:pPr>
+            <a:r>
+              <a:rPr lang="en-US" sz="2000" dirty="0">
+                <a:hlinkClick r:id="rId3"/>
+              </a:rPr>
+              <a:t>https://github-pages.ucl.ac.uk/tus-rec-challenge/</a:t>
+            </a:r>
+            <a:endParaRPr lang="en-US" sz="2000" dirty="0"/>
+          </a:p>
+          <a:p>
+            <a:pPr marL="0" indent="0">
+              <a:buClr>
+                <a:srgbClr val="9E3611"/>
+              </a:buClr>
+              <a:buNone/>
+            </a:pPr>
+            <a:endParaRPr lang="en-US" sz="2000" dirty="0"/>
+          </a:p>
+          <a:p>
+            <a:pPr marL="0" indent="0">
+              <a:buClr>
+                <a:srgbClr val="9E3611"/>
+              </a:buClr>
+              <a:buNone/>
+            </a:pPr>
+            <a:r>
+              <a:rPr lang="en-US" sz="2000" dirty="0">
+                <a:hlinkClick r:id="rId4"/>
+              </a:rPr>
+              <a:t>https://arxiv.org/pdf/2509.09530</a:t>
+            </a:r>
+            <a:r>
+              <a:rPr lang="en-US" sz="2000" dirty="0">
+                <a:hlinkClick r:id="rId3"/>
+              </a:rPr>
+              <a:t>/</a:t>
+            </a:r>
+            <a:endParaRPr lang="en-US" sz="2000" dirty="0"/>
+          </a:p>
+          <a:p>
+            <a:pPr marL="0" indent="0">
+              <a:buClr>
+                <a:srgbClr val="9E3611"/>
+              </a:buClr>
+              <a:buNone/>
+            </a:pPr>
+            <a:endParaRPr lang="en-US" sz="2000" dirty="0"/>
+          </a:p>
+          <a:p>
+            <a:pPr marL="0" indent="0">
+              <a:buClr>
+                <a:srgbClr val="9E3611"/>
+              </a:buClr>
+              <a:buNone/>
+            </a:pPr>
+            <a:endParaRPr lang="en-US" sz="2000" b="0" dirty="0"/>
+          </a:p>
+        </p:txBody>
+      </p:sp>
+    </p:spTree>
+    <p:extLst>
+      <p:ext uri="{BB962C8B-B14F-4D97-AF65-F5344CB8AC3E}">
+        <p14:creationId xmlns:p14="http://schemas.microsoft.com/office/powerpoint/2010/main" val="729830890"/>
+      </p:ext>
+    </p:extLst>
+  </p:cSld>
+  <p:clrMapOvr>
+    <a:masterClrMapping/>
+  </p:clrMapOvr>
+</p:sld>
+</file>
+
 <file path=ppt/slides/slide2.xml><?xml version="1.0" encoding="utf-8"?>
 <p:sld xmlns:a="http://schemas.openxmlformats.org/drawingml/2006/main" xmlns:r="http://schemas.openxmlformats.org/officeDocument/2006/relationships" xmlns:p="http://schemas.openxmlformats.org/presentationml/2006/main">
   <p:cSld>
@@ -6801,18 +7203,7 @@
             </a:pPr>
             <a:r>
               <a:rPr lang="en-US" sz="2000" b="0" dirty="0"/>
-              <a:t>Error between estimated position and GT of final frame</a:t>
-            </a:r>
-          </a:p>
-          <a:p>
-            <a:pPr>
-              <a:buClr>
-                <a:srgbClr val="9E3611"/>
-              </a:buClr>
-            </a:pPr>
-            <a:r>
-              <a:rPr lang="en-US" sz="2000" b="0" dirty="0"/>
-              <a:t>Only translation</a:t>
+              <a:t>Error between pose prediction and GT of final frame (translation only)</a:t>
             </a:r>
           </a:p>
           <a:p>
@@ -6825,6 +7216,15 @@
               <a:rPr lang="en-US" sz="2000" b="0" dirty="0"/>
               <a:t>Common error metric in 3D US reconstruction</a:t>
             </a:r>
+          </a:p>
+          <a:p>
+            <a:pPr marL="0" indent="0">
+              <a:buClr>
+                <a:srgbClr val="9E3611"/>
+              </a:buClr>
+              <a:buNone/>
+            </a:pPr>
+            <a:endParaRPr lang="en-US" sz="2000" b="0" dirty="0"/>
           </a:p>
           <a:p>
             <a:pPr marL="0" indent="0">
@@ -6920,57 +7320,6 @@
               <a:buNone/>
             </a:pPr>
             <a:endParaRPr lang="en-US" sz="2000" b="0" dirty="0"/>
-          </a:p>
-        </p:txBody>
-      </p:sp>
-      <p:sp>
-        <p:nvSpPr>
-          <p:cNvPr id="2" name="TextBox 1">
-            <a:extLst>
-              <a:ext uri="{FF2B5EF4-FFF2-40B4-BE49-F238E27FC236}">
-                <a16:creationId xmlns:a16="http://schemas.microsoft.com/office/drawing/2014/main" id="{60F2A635-F014-3979-5089-35526A4D575B}"/>
-              </a:ext>
-            </a:extLst>
-          </p:cNvPr>
-          <p:cNvSpPr txBox="1"/>
-          <p:nvPr/>
-        </p:nvSpPr>
-        <p:spPr>
-          <a:xfrm>
-            <a:off x="179512" y="4704588"/>
-            <a:ext cx="6182013" cy="461665"/>
-          </a:xfrm>
-          <a:prstGeom prst="rect">
-            <a:avLst/>
-          </a:prstGeom>
-          <a:noFill/>
-        </p:spPr>
-        <p:txBody>
-          <a:bodyPr wrap="none" rtlCol="0">
-            <a:spAutoFit/>
-          </a:bodyPr>
-          <a:lstStyle/>
-          <a:p>
-            <a:r>
-              <a:rPr lang="en-US" sz="1200" dirty="0">
-                <a:hlinkClick r:id="rId3"/>
-              </a:rPr>
-              <a:t>https://arxiv.org/pdf/2509.09530</a:t>
-            </a:r>
-            <a:r>
-              <a:rPr lang="en-US" sz="1200" dirty="0"/>
-              <a:t>, </a:t>
-            </a:r>
-            <a:r>
-              <a:rPr lang="en-US" sz="1200" dirty="0">
-                <a:hlinkClick r:id="rId4"/>
-              </a:rPr>
-              <a:t>https://github-pages.ucl.ac.uk/tus-rec-challenge/</a:t>
-            </a:r>
-            <a:endParaRPr lang="en-US" sz="1200" dirty="0"/>
-          </a:p>
-          <a:p>
-            <a:endParaRPr lang="en-US" sz="1200" dirty="0"/>
           </a:p>
         </p:txBody>
       </p:sp>
@@ -8243,16 +8592,12 @@
               </a:buClr>
             </a:pPr>
             <a:r>
-              <a:rPr lang="en-US" sz="2400">
+              <a:rPr lang="en-US" sz="2400" dirty="0">
                 <a:ea typeface="游ゴシック Medium"/>
                 <a:cs typeface="Times New Roman"/>
               </a:rPr>
               <a:t>   Explanations of Results</a:t>
             </a:r>
-            <a:endParaRPr lang="en-US" sz="2400" dirty="0">
-              <a:ea typeface="游ゴシック Medium"/>
-              <a:cs typeface="Times New Roman"/>
-            </a:endParaRPr>
           </a:p>
         </p:txBody>
       </p:sp>
@@ -8410,44 +8755,6 @@
               <a:buNone/>
             </a:pPr>
             <a:endParaRPr lang="en-US" sz="2000" b="0" dirty="0"/>
-          </a:p>
-        </p:txBody>
-      </p:sp>
-      <p:sp>
-        <p:nvSpPr>
-          <p:cNvPr id="2" name="TextBox 1">
-            <a:extLst>
-              <a:ext uri="{FF2B5EF4-FFF2-40B4-BE49-F238E27FC236}">
-                <a16:creationId xmlns:a16="http://schemas.microsoft.com/office/drawing/2014/main" id="{40CD821A-763B-5C8A-3CE4-BFFA3D0DEB63}"/>
-              </a:ext>
-            </a:extLst>
-          </p:cNvPr>
-          <p:cNvSpPr txBox="1"/>
-          <p:nvPr/>
-        </p:nvSpPr>
-        <p:spPr>
-          <a:xfrm>
-            <a:off x="182430" y="4694682"/>
-            <a:ext cx="3793603" cy="276999"/>
-          </a:xfrm>
-          <a:prstGeom prst="rect">
-            <a:avLst/>
-          </a:prstGeom>
-          <a:noFill/>
-        </p:spPr>
-        <p:txBody>
-          <a:bodyPr wrap="none" rtlCol="0">
-            <a:spAutoFit/>
-          </a:bodyPr>
-          <a:lstStyle/>
-          <a:p>
-            <a:r>
-              <a:rPr lang="en-US" sz="1200" dirty="0">
-                <a:hlinkClick r:id="rId3"/>
-              </a:rPr>
-              <a:t>https://github-pages.ucl.ac.uk/tus-rec-challenge/</a:t>
-            </a:r>
-            <a:endParaRPr lang="en-US" sz="1200" dirty="0"/>
           </a:p>
         </p:txBody>
       </p:sp>
@@ -8630,6 +8937,228 @@
     <p:extLst>
       <p:ext uri="{BB962C8B-B14F-4D97-AF65-F5344CB8AC3E}">
         <p14:creationId xmlns:p14="http://schemas.microsoft.com/office/powerpoint/2010/main" val="3849738365"/>
+      </p:ext>
+    </p:extLst>
+  </p:cSld>
+  <p:clrMapOvr>
+    <a:masterClrMapping/>
+  </p:clrMapOvr>
+</p:sld>
+</file>
+
+<file path=ppt/slides/slide9.xml><?xml version="1.0" encoding="utf-8"?>
+<p:sld xmlns:a="http://schemas.openxmlformats.org/drawingml/2006/main" xmlns:r="http://schemas.openxmlformats.org/officeDocument/2006/relationships" xmlns:p="http://schemas.openxmlformats.org/presentationml/2006/main">
+  <p:cSld>
+    <p:spTree>
+      <p:nvGrpSpPr>
+        <p:cNvPr id="1" name="">
+          <a:extLst>
+            <a:ext uri="{FF2B5EF4-FFF2-40B4-BE49-F238E27FC236}">
+              <a16:creationId xmlns:a16="http://schemas.microsoft.com/office/drawing/2014/main" id="{C03B665E-ABBA-75F0-DDD0-2300F8B172DE}"/>
+            </a:ext>
+          </a:extLst>
+        </p:cNvPr>
+        <p:cNvGrpSpPr/>
+        <p:nvPr/>
+      </p:nvGrpSpPr>
+      <p:grpSpPr>
+        <a:xfrm>
+          <a:off x="0" y="0"/>
+          <a:ext cx="0" cy="0"/>
+          <a:chOff x="0" y="0"/>
+          <a:chExt cx="0" cy="0"/>
+        </a:xfrm>
+      </p:grpSpPr>
+      <p:sp>
+        <p:nvSpPr>
+          <p:cNvPr id="3" name="Slide Number Placeholder 2">
+            <a:extLst>
+              <a:ext uri="{FF2B5EF4-FFF2-40B4-BE49-F238E27FC236}">
+                <a16:creationId xmlns:a16="http://schemas.microsoft.com/office/drawing/2014/main" id="{D4B1C4A8-5367-B5DE-7B2A-2E206E2D51BE}"/>
+              </a:ext>
+            </a:extLst>
+          </p:cNvPr>
+          <p:cNvSpPr>
+            <a:spLocks noGrp="1"/>
+          </p:cNvSpPr>
+          <p:nvPr>
+            <p:ph type="sldNum" idx="1"/>
+          </p:nvPr>
+        </p:nvSpPr>
+        <p:spPr>
+          <a:xfrm>
+            <a:off x="9093107" y="4704588"/>
+            <a:ext cx="480060" cy="273844"/>
+          </a:xfrm>
+        </p:spPr>
+        <p:txBody>
+          <a:bodyPr/>
+          <a:lstStyle/>
+          <a:p>
+            <a:fld id="{7475F232-FFFE-5E6C-5554-2F165DAD28C0}" type="slidenum">
+              <a:rPr lang="en-JP" smtClean="0"/>
+              <a:t>9</a:t>
+            </a:fld>
+            <a:endParaRPr lang="en-JP" dirty="0"/>
+          </a:p>
+        </p:txBody>
+      </p:sp>
+      <p:sp>
+        <p:nvSpPr>
+          <p:cNvPr id="4" name="Title 3">
+            <a:extLst>
+              <a:ext uri="{FF2B5EF4-FFF2-40B4-BE49-F238E27FC236}">
+                <a16:creationId xmlns:a16="http://schemas.microsoft.com/office/drawing/2014/main" id="{06180094-856D-1CD3-DE71-FC505B21C9A1}"/>
+              </a:ext>
+            </a:extLst>
+          </p:cNvPr>
+          <p:cNvSpPr>
+            <a:spLocks noGrp="1"/>
+          </p:cNvSpPr>
+          <p:nvPr>
+            <p:ph type="title" idx="2"/>
+          </p:nvPr>
+        </p:nvSpPr>
+        <p:spPr/>
+        <p:txBody>
+          <a:bodyPr/>
+          <a:lstStyle/>
+          <a:p>
+            <a:pPr marL="0">
+              <a:buClr>
+                <a:srgbClr val="9E3611"/>
+              </a:buClr>
+            </a:pPr>
+            <a:r>
+              <a:rPr lang="en-US" sz="2400" dirty="0">
+                <a:ea typeface="游ゴシック Medium"/>
+                <a:cs typeface="Times New Roman"/>
+              </a:rPr>
+              <a:t>   Next steps</a:t>
+            </a:r>
+          </a:p>
+        </p:txBody>
+      </p:sp>
+      <p:sp>
+        <p:nvSpPr>
+          <p:cNvPr id="16" name="Text Placeholder 1">
+            <a:extLst>
+              <a:ext uri="{FF2B5EF4-FFF2-40B4-BE49-F238E27FC236}">
+                <a16:creationId xmlns:a16="http://schemas.microsoft.com/office/drawing/2014/main" id="{E29D1C51-7DEF-2EA1-2A56-4E230D7F9E15}"/>
+              </a:ext>
+            </a:extLst>
+          </p:cNvPr>
+          <p:cNvSpPr>
+            <a:spLocks noGrp="1"/>
+          </p:cNvSpPr>
+          <p:nvPr>
+            <p:ph type="body"/>
+          </p:nvPr>
+        </p:nvSpPr>
+        <p:spPr>
+          <a:xfrm>
+            <a:off x="170325" y="707816"/>
+            <a:ext cx="8218099" cy="3986866"/>
+          </a:xfrm>
+        </p:spPr>
+        <p:txBody>
+          <a:bodyPr vert="horz" lIns="91440" tIns="45720" rIns="91440" bIns="45720" rtlCol="0" anchor="t">
+            <a:normAutofit/>
+          </a:bodyPr>
+          <a:lstStyle/>
+          <a:p>
+            <a:pPr>
+              <a:buClr>
+                <a:srgbClr val="9E3611"/>
+              </a:buClr>
+            </a:pPr>
+            <a:r>
+              <a:rPr lang="en-US" sz="2000" b="0" dirty="0"/>
+              <a:t>Writing Master thesis</a:t>
+            </a:r>
+          </a:p>
+          <a:p>
+            <a:pPr marL="0" indent="0">
+              <a:buClr>
+                <a:srgbClr val="9E3611"/>
+              </a:buClr>
+              <a:buNone/>
+            </a:pPr>
+            <a:endParaRPr lang="en-US" sz="2000" b="0" dirty="0"/>
+          </a:p>
+          <a:p>
+            <a:pPr>
+              <a:buClr>
+                <a:srgbClr val="9E3611"/>
+              </a:buClr>
+            </a:pPr>
+            <a:r>
+              <a:rPr lang="en-US" sz="2000" b="0" dirty="0"/>
+              <a:t>Fit </a:t>
+            </a:r>
+            <a:r>
+              <a:rPr lang="en-US" sz="2000" b="0" dirty="0" err="1"/>
+              <a:t>DualTrack</a:t>
+            </a:r>
+            <a:r>
+              <a:rPr lang="en-US" sz="2000" b="0" dirty="0"/>
+              <a:t> code to my needs</a:t>
+            </a:r>
+          </a:p>
+          <a:p>
+            <a:pPr marL="0" indent="0">
+              <a:buClr>
+                <a:srgbClr val="9E3611"/>
+              </a:buClr>
+              <a:buNone/>
+            </a:pPr>
+            <a:endParaRPr lang="en-US" sz="2000" b="0" dirty="0"/>
+          </a:p>
+          <a:p>
+            <a:pPr>
+              <a:buClr>
+                <a:srgbClr val="9E3611"/>
+              </a:buClr>
+            </a:pPr>
+            <a:r>
+              <a:rPr lang="en-US" sz="2000" b="0" dirty="0"/>
+              <a:t>Improve PGO/Implement actual PGO</a:t>
+            </a:r>
+          </a:p>
+          <a:p>
+            <a:pPr>
+              <a:buClr>
+                <a:srgbClr val="9E3611"/>
+              </a:buClr>
+            </a:pPr>
+            <a:endParaRPr lang="en-US" sz="2000" b="0" dirty="0"/>
+          </a:p>
+          <a:p>
+            <a:pPr>
+              <a:buClr>
+                <a:srgbClr val="9E3611"/>
+              </a:buClr>
+            </a:pPr>
+            <a:r>
+              <a:rPr lang="en-US" sz="2000" b="0" dirty="0"/>
+              <a:t>(Evaluate on TUSREC training data)</a:t>
+            </a:r>
+          </a:p>
+          <a:p>
+            <a:pPr marL="0" indent="0">
+              <a:buClr>
+                <a:srgbClr val="9E3611"/>
+              </a:buClr>
+              <a:buNone/>
+            </a:pPr>
+            <a:endParaRPr lang="en-US" sz="2000" b="0" dirty="0"/>
+          </a:p>
+        </p:txBody>
+      </p:sp>
+    </p:spTree>
+    <p:extLst>
+      <p:ext uri="{BB962C8B-B14F-4D97-AF65-F5344CB8AC3E}">
+        <p14:creationId xmlns:p14="http://schemas.microsoft.com/office/powerpoint/2010/main" val="1155058640"/>
       </p:ext>
     </p:extLst>
   </p:cSld>

--- a/documents/presentations/Jannis_Meyer_Presentation_01_06_2026.pptx
+++ b/documents/presentations/Jannis_Meyer_Presentation_01_06_2026.pptx
@@ -11,11 +11,11 @@
     <p:sldId id="256" r:id="rId5"/>
     <p:sldId id="281" r:id="rId6"/>
     <p:sldId id="282" r:id="rId7"/>
-    <p:sldId id="284" r:id="rId8"/>
-    <p:sldId id="286" r:id="rId9"/>
-    <p:sldId id="283" r:id="rId10"/>
-    <p:sldId id="285" r:id="rId11"/>
-    <p:sldId id="287" r:id="rId12"/>
+    <p:sldId id="286" r:id="rId8"/>
+    <p:sldId id="290" r:id="rId9"/>
+    <p:sldId id="284" r:id="rId10"/>
+    <p:sldId id="283" r:id="rId11"/>
+    <p:sldId id="285" r:id="rId12"/>
     <p:sldId id="288" r:id="rId13"/>
     <p:sldId id="289" r:id="rId14"/>
   </p:sldIdLst>
@@ -341,6 +341,107 @@
 </p:notes>
 </file>
 
+<file path=ppt/notesSlides/notesSlide10.xml><?xml version="1.0" encoding="utf-8"?>
+<p:notes xmlns:a="http://schemas.openxmlformats.org/drawingml/2006/main" xmlns:r="http://schemas.openxmlformats.org/officeDocument/2006/relationships" xmlns:p="http://schemas.openxmlformats.org/presentationml/2006/main">
+  <p:cSld>
+    <p:spTree>
+      <p:nvGrpSpPr>
+        <p:cNvPr id="1" name="">
+          <a:extLst>
+            <a:ext uri="{FF2B5EF4-FFF2-40B4-BE49-F238E27FC236}">
+              <a16:creationId xmlns:a16="http://schemas.microsoft.com/office/drawing/2014/main" id="{B456F6D0-3100-79C4-7AA9-879773F7A22C}"/>
+            </a:ext>
+          </a:extLst>
+        </p:cNvPr>
+        <p:cNvGrpSpPr/>
+        <p:nvPr/>
+      </p:nvGrpSpPr>
+      <p:grpSpPr>
+        <a:xfrm>
+          <a:off x="0" y="0"/>
+          <a:ext cx="0" cy="0"/>
+          <a:chOff x="0" y="0"/>
+          <a:chExt cx="0" cy="0"/>
+        </a:xfrm>
+      </p:grpSpPr>
+      <p:sp>
+        <p:nvSpPr>
+          <p:cNvPr id="2" name="Slide Image Placeholder 1">
+            <a:extLst>
+              <a:ext uri="{FF2B5EF4-FFF2-40B4-BE49-F238E27FC236}">
+                <a16:creationId xmlns:a16="http://schemas.microsoft.com/office/drawing/2014/main" id="{C4721FE9-E15C-3631-B457-B85439BDB37B}"/>
+              </a:ext>
+            </a:extLst>
+          </p:cNvPr>
+          <p:cNvSpPr>
+            <a:spLocks noGrp="1" noRot="1" noChangeAspect="1"/>
+          </p:cNvSpPr>
+          <p:nvPr>
+            <p:ph type="sldImg"/>
+          </p:nvPr>
+        </p:nvSpPr>
+        <p:spPr>
+          <a:xfrm>
+            <a:off x="2514600" y="857250"/>
+            <a:ext cx="4114800" cy="2314575"/>
+          </a:xfrm>
+          <a:prstGeom prst="rect">
+            <a:avLst/>
+          </a:prstGeom>
+          <a:noFill/>
+          <a:ln w="12700">
+            <a:solidFill>
+              <a:prstClr val="black"/>
+            </a:solidFill>
+          </a:ln>
+        </p:spPr>
+      </p:sp>
+      <p:sp>
+        <p:nvSpPr>
+          <p:cNvPr id="3" name="Notes Placeholder 2">
+            <a:extLst>
+              <a:ext uri="{FF2B5EF4-FFF2-40B4-BE49-F238E27FC236}">
+                <a16:creationId xmlns:a16="http://schemas.microsoft.com/office/drawing/2014/main" id="{49E508A6-9778-0A51-71DE-079E8F4C628E}"/>
+              </a:ext>
+            </a:extLst>
+          </p:cNvPr>
+          <p:cNvSpPr>
+            <a:spLocks noGrp="1"/>
+          </p:cNvSpPr>
+          <p:nvPr>
+            <p:ph type="body" idx="1"/>
+          </p:nvPr>
+        </p:nvSpPr>
+        <p:spPr>
+          <a:xfrm>
+            <a:off x="914400" y="3300413"/>
+            <a:ext cx="7315200" cy="2700337"/>
+          </a:xfrm>
+          <a:prstGeom prst="rect">
+            <a:avLst/>
+          </a:prstGeom>
+        </p:spPr>
+        <p:txBody>
+          <a:bodyPr/>
+          <a:lstStyle/>
+          <a:p>
+            <a:endParaRPr lang="en-US" dirty="0"/>
+          </a:p>
+        </p:txBody>
+      </p:sp>
+    </p:spTree>
+    <p:extLst>
+      <p:ext uri="{BB962C8B-B14F-4D97-AF65-F5344CB8AC3E}">
+        <p14:creationId xmlns:p14="http://schemas.microsoft.com/office/powerpoint/2010/main" val="1468915175"/>
+      </p:ext>
+    </p:extLst>
+  </p:cSld>
+  <p:clrMapOvr>
+    <a:masterClrMapping/>
+  </p:clrMapOvr>
+</p:notes>
+</file>
+
 <file path=ppt/notesSlides/notesSlide2.xml><?xml version="1.0" encoding="utf-8"?>
 <p:notes xmlns:a="http://schemas.openxmlformats.org/drawingml/2006/main" xmlns:r="http://schemas.openxmlformats.org/officeDocument/2006/relationships" xmlns:p="http://schemas.openxmlformats.org/presentationml/2006/main">
   <p:cSld>
@@ -407,14 +508,61 @@
           <a:bodyPr/>
           <a:lstStyle/>
           <a:p>
-            <a:endParaRPr lang="en-US" dirty="0"/>
+            <a:pPr marL="171450" indent="-171450">
+              <a:buFontTx/>
+              <a:buChar char="-"/>
+            </a:pPr>
+            <a:r>
+              <a:rPr lang="en-US" dirty="0"/>
+              <a:t>Reminder</a:t>
+            </a:r>
+          </a:p>
+          <a:p>
+            <a:pPr marL="171450" indent="-171450">
+              <a:buFontTx/>
+              <a:buChar char="-"/>
+            </a:pPr>
+            <a:r>
+              <a:rPr lang="en-US" dirty="0"/>
+              <a:t>US frames from TUSREC data for now</a:t>
+            </a:r>
+          </a:p>
+          <a:p>
+            <a:pPr marL="171450" indent="-171450">
+              <a:buFontTx/>
+              <a:buChar char="-"/>
+            </a:pPr>
+            <a:r>
+              <a:rPr lang="en-US" dirty="0"/>
+              <a:t>DT model for now</a:t>
+            </a:r>
+          </a:p>
+          <a:p>
+            <a:pPr marL="171450" indent="-171450">
+              <a:buFontTx/>
+              <a:buChar char="-"/>
+            </a:pPr>
+            <a:r>
+              <a:rPr lang="en-US" dirty="0"/>
+              <a:t>Get pose predictions and more from that</a:t>
+            </a:r>
+          </a:p>
+          <a:p>
+            <a:pPr marL="171450" indent="-171450">
+              <a:buFontTx/>
+              <a:buChar char="-"/>
+            </a:pPr>
+            <a:r>
+              <a:rPr lang="en-US" dirty="0"/>
+              <a:t>Build pose graph and optimize using extra constraints and weights</a:t>
+            </a:r>
           </a:p>
         </p:txBody>
       </p:sp>
     </p:spTree>
     <p:extLst>
       <p:ext uri="{BB962C8B-B14F-4D97-AF65-F5344CB8AC3E}">
-        <p14:creationId xmlns:p14="http://schemas.microsoft.com/office/powerpoint/2010/main" val="1496618303"/>
+        <p14:creationId xmlns:p14="http://schemas.microsoft.com/office/powerpoint/2010/main" val="2547025491"/>
       </p:ext>
     </p:extLst>
   </p:cSld>
@@ -429,13 +577,7 @@
   <p:cSld>
     <p:spTree>
       <p:nvGrpSpPr>
-        <p:cNvPr id="1" name="">
-          <a:extLst>
-            <a:ext uri="{FF2B5EF4-FFF2-40B4-BE49-F238E27FC236}">
-              <a16:creationId xmlns:a16="http://schemas.microsoft.com/office/drawing/2014/main" id="{86467875-7413-35C4-E4D8-CAE05FE1F489}"/>
-            </a:ext>
-          </a:extLst>
-        </p:cNvPr>
+        <p:cNvPr id="1" name=""/>
         <p:cNvGrpSpPr/>
         <p:nvPr/>
       </p:nvGrpSpPr>
@@ -449,13 +591,7 @@
       </p:grpSpPr>
       <p:sp>
         <p:nvSpPr>
-          <p:cNvPr id="2" name="Slide Image Placeholder 1">
-            <a:extLst>
-              <a:ext uri="{FF2B5EF4-FFF2-40B4-BE49-F238E27FC236}">
-                <a16:creationId xmlns:a16="http://schemas.microsoft.com/office/drawing/2014/main" id="{5B08419C-47A3-0F7B-5F8C-9B16F981DAC8}"/>
-              </a:ext>
-            </a:extLst>
-          </p:cNvPr>
+          <p:cNvPr id="2" name="Slide Image Placeholder 1"/>
           <p:cNvSpPr>
             <a:spLocks noGrp="1" noRot="1" noChangeAspect="1"/>
           </p:cNvSpPr>
@@ -481,13 +617,7 @@
       </p:sp>
       <p:sp>
         <p:nvSpPr>
-          <p:cNvPr id="3" name="Notes Placeholder 2">
-            <a:extLst>
-              <a:ext uri="{FF2B5EF4-FFF2-40B4-BE49-F238E27FC236}">
-                <a16:creationId xmlns:a16="http://schemas.microsoft.com/office/drawing/2014/main" id="{386E642B-A82A-2789-9F2E-4A6894837DCD}"/>
-              </a:ext>
-            </a:extLst>
-          </p:cNvPr>
+          <p:cNvPr id="3" name="Notes Placeholder 2"/>
           <p:cNvSpPr>
             <a:spLocks noGrp="1"/>
           </p:cNvSpPr>
@@ -515,7 +645,7 @@
     </p:spTree>
     <p:extLst>
       <p:ext uri="{BB962C8B-B14F-4D97-AF65-F5344CB8AC3E}">
-        <p14:creationId xmlns:p14="http://schemas.microsoft.com/office/powerpoint/2010/main" val="3444482115"/>
+        <p14:creationId xmlns:p14="http://schemas.microsoft.com/office/powerpoint/2010/main" val="1496618303"/>
       </p:ext>
     </p:extLst>
   </p:cSld>
@@ -609,7 +739,54 @@
           <a:bodyPr/>
           <a:lstStyle/>
           <a:p>
-            <a:endParaRPr lang="en-US" dirty="0"/>
+            <a:pPr marL="171450" indent="-171450">
+              <a:buFontTx/>
+              <a:buChar char="-"/>
+            </a:pPr>
+            <a:r>
+              <a:rPr lang="en-US" dirty="0"/>
+              <a:t>More mathematical insights into PGO</a:t>
+            </a:r>
+          </a:p>
+          <a:p>
+            <a:pPr marL="171450" indent="-171450">
+              <a:buFontTx/>
+              <a:buChar char="-"/>
+            </a:pPr>
+            <a:r>
+              <a:rPr lang="en-US" dirty="0"/>
+              <a:t>Base optimization formula from last time</a:t>
+            </a:r>
+          </a:p>
+          <a:p>
+            <a:pPr marL="171450" indent="-171450">
+              <a:buFontTx/>
+              <a:buChar char="-"/>
+            </a:pPr>
+            <a:r>
+              <a:rPr lang="en-US" dirty="0"/>
+              <a:t>More general formulation</a:t>
+            </a:r>
+          </a:p>
+          <a:p>
+            <a:pPr marL="171450" indent="-171450">
+              <a:buFontTx/>
+              <a:buChar char="-"/>
+            </a:pPr>
+            <a:r>
+              <a:rPr lang="en-US" dirty="0"/>
+              <a:t>Linear optimization problem</a:t>
+            </a:r>
+          </a:p>
+          <a:p>
+            <a:pPr marL="171450" indent="-171450">
+              <a:buFontTx/>
+              <a:buChar char="-"/>
+            </a:pPr>
+            <a:r>
+              <a:rPr lang="en-US" dirty="0"/>
+              <a:t>Internal functionality of GTSAM</a:t>
+            </a:r>
           </a:p>
         </p:txBody>
       </p:sp>
@@ -627,6 +804,225 @@
 </file>
 
 <file path=ppt/notesSlides/notesSlide5.xml><?xml version="1.0" encoding="utf-8"?>
+<p:notes xmlns:a="http://schemas.openxmlformats.org/drawingml/2006/main" xmlns:r="http://schemas.openxmlformats.org/officeDocument/2006/relationships" xmlns:p="http://schemas.openxmlformats.org/presentationml/2006/main">
+  <p:cSld>
+    <p:spTree>
+      <p:nvGrpSpPr>
+        <p:cNvPr id="1" name="">
+          <a:extLst>
+            <a:ext uri="{FF2B5EF4-FFF2-40B4-BE49-F238E27FC236}">
+              <a16:creationId xmlns:a16="http://schemas.microsoft.com/office/drawing/2014/main" id="{170B0974-D706-4BBC-A7D3-B951CF0565A8}"/>
+            </a:ext>
+          </a:extLst>
+        </p:cNvPr>
+        <p:cNvGrpSpPr/>
+        <p:nvPr/>
+      </p:nvGrpSpPr>
+      <p:grpSpPr>
+        <a:xfrm>
+          <a:off x="0" y="0"/>
+          <a:ext cx="0" cy="0"/>
+          <a:chOff x="0" y="0"/>
+          <a:chExt cx="0" cy="0"/>
+        </a:xfrm>
+      </p:grpSpPr>
+      <p:sp>
+        <p:nvSpPr>
+          <p:cNvPr id="2" name="Slide Image Placeholder 1">
+            <a:extLst>
+              <a:ext uri="{FF2B5EF4-FFF2-40B4-BE49-F238E27FC236}">
+                <a16:creationId xmlns:a16="http://schemas.microsoft.com/office/drawing/2014/main" id="{48532BCB-1F7B-BA26-1E06-5AB010BA39CA}"/>
+              </a:ext>
+            </a:extLst>
+          </p:cNvPr>
+          <p:cNvSpPr>
+            <a:spLocks noGrp="1" noRot="1" noChangeAspect="1"/>
+          </p:cNvSpPr>
+          <p:nvPr>
+            <p:ph type="sldImg"/>
+          </p:nvPr>
+        </p:nvSpPr>
+        <p:spPr>
+          <a:xfrm>
+            <a:off x="2514600" y="857250"/>
+            <a:ext cx="4114800" cy="2314575"/>
+          </a:xfrm>
+          <a:prstGeom prst="rect">
+            <a:avLst/>
+          </a:prstGeom>
+          <a:noFill/>
+          <a:ln w="12700">
+            <a:solidFill>
+              <a:prstClr val="black"/>
+            </a:solidFill>
+          </a:ln>
+        </p:spPr>
+      </p:sp>
+      <p:sp>
+        <p:nvSpPr>
+          <p:cNvPr id="3" name="Notes Placeholder 2">
+            <a:extLst>
+              <a:ext uri="{FF2B5EF4-FFF2-40B4-BE49-F238E27FC236}">
+                <a16:creationId xmlns:a16="http://schemas.microsoft.com/office/drawing/2014/main" id="{5CB18E18-9526-3196-870C-4FEEBE7E3AFD}"/>
+              </a:ext>
+            </a:extLst>
+          </p:cNvPr>
+          <p:cNvSpPr>
+            <a:spLocks noGrp="1"/>
+          </p:cNvSpPr>
+          <p:nvPr>
+            <p:ph type="body" idx="1"/>
+          </p:nvPr>
+        </p:nvSpPr>
+        <p:spPr>
+          <a:xfrm>
+            <a:off x="914400" y="3300413"/>
+            <a:ext cx="7315200" cy="2700337"/>
+          </a:xfrm>
+          <a:prstGeom prst="rect">
+            <a:avLst/>
+          </a:prstGeom>
+        </p:spPr>
+        <p:txBody>
+          <a:bodyPr/>
+          <a:lstStyle/>
+          <a:p>
+            <a:pPr marL="171450" indent="-171450">
+              <a:buFontTx/>
+              <a:buChar char="-"/>
+            </a:pPr>
+            <a:r>
+              <a:rPr lang="en-US" dirty="0"/>
+              <a:t>Parameters for PGO right now</a:t>
+            </a:r>
+          </a:p>
+          <a:p>
+            <a:pPr marL="171450" indent="-171450">
+              <a:buFontTx/>
+              <a:buChar char="-"/>
+            </a:pPr>
+            <a:r>
+              <a:rPr lang="en-US" dirty="0"/>
+              <a:t>No extra edges or weights</a:t>
+            </a:r>
+          </a:p>
+        </p:txBody>
+      </p:sp>
+    </p:spTree>
+    <p:extLst>
+      <p:ext uri="{BB962C8B-B14F-4D97-AF65-F5344CB8AC3E}">
+        <p14:creationId xmlns:p14="http://schemas.microsoft.com/office/powerpoint/2010/main" val="3057863294"/>
+      </p:ext>
+    </p:extLst>
+  </p:cSld>
+  <p:clrMapOvr>
+    <a:masterClrMapping/>
+  </p:clrMapOvr>
+</p:notes>
+</file>
+
+<file path=ppt/notesSlides/notesSlide6.xml><?xml version="1.0" encoding="utf-8"?>
+<p:notes xmlns:a="http://schemas.openxmlformats.org/drawingml/2006/main" xmlns:r="http://schemas.openxmlformats.org/officeDocument/2006/relationships" xmlns:p="http://schemas.openxmlformats.org/presentationml/2006/main">
+  <p:cSld>
+    <p:spTree>
+      <p:nvGrpSpPr>
+        <p:cNvPr id="1" name="">
+          <a:extLst>
+            <a:ext uri="{FF2B5EF4-FFF2-40B4-BE49-F238E27FC236}">
+              <a16:creationId xmlns:a16="http://schemas.microsoft.com/office/drawing/2014/main" id="{86467875-7413-35C4-E4D8-CAE05FE1F489}"/>
+            </a:ext>
+          </a:extLst>
+        </p:cNvPr>
+        <p:cNvGrpSpPr/>
+        <p:nvPr/>
+      </p:nvGrpSpPr>
+      <p:grpSpPr>
+        <a:xfrm>
+          <a:off x="0" y="0"/>
+          <a:ext cx="0" cy="0"/>
+          <a:chOff x="0" y="0"/>
+          <a:chExt cx="0" cy="0"/>
+        </a:xfrm>
+      </p:grpSpPr>
+      <p:sp>
+        <p:nvSpPr>
+          <p:cNvPr id="2" name="Slide Image Placeholder 1">
+            <a:extLst>
+              <a:ext uri="{FF2B5EF4-FFF2-40B4-BE49-F238E27FC236}">
+                <a16:creationId xmlns:a16="http://schemas.microsoft.com/office/drawing/2014/main" id="{5B08419C-47A3-0F7B-5F8C-9B16F981DAC8}"/>
+              </a:ext>
+            </a:extLst>
+          </p:cNvPr>
+          <p:cNvSpPr>
+            <a:spLocks noGrp="1" noRot="1" noChangeAspect="1"/>
+          </p:cNvSpPr>
+          <p:nvPr>
+            <p:ph type="sldImg"/>
+          </p:nvPr>
+        </p:nvSpPr>
+        <p:spPr>
+          <a:xfrm>
+            <a:off x="2514600" y="857250"/>
+            <a:ext cx="4114800" cy="2314575"/>
+          </a:xfrm>
+          <a:prstGeom prst="rect">
+            <a:avLst/>
+          </a:prstGeom>
+          <a:noFill/>
+          <a:ln w="12700">
+            <a:solidFill>
+              <a:prstClr val="black"/>
+            </a:solidFill>
+          </a:ln>
+        </p:spPr>
+      </p:sp>
+      <p:sp>
+        <p:nvSpPr>
+          <p:cNvPr id="3" name="Notes Placeholder 2">
+            <a:extLst>
+              <a:ext uri="{FF2B5EF4-FFF2-40B4-BE49-F238E27FC236}">
+                <a16:creationId xmlns:a16="http://schemas.microsoft.com/office/drawing/2014/main" id="{386E642B-A82A-2789-9F2E-4A6894837DCD}"/>
+              </a:ext>
+            </a:extLst>
+          </p:cNvPr>
+          <p:cNvSpPr>
+            <a:spLocks noGrp="1"/>
+          </p:cNvSpPr>
+          <p:nvPr>
+            <p:ph type="body" idx="1"/>
+          </p:nvPr>
+        </p:nvSpPr>
+        <p:spPr>
+          <a:xfrm>
+            <a:off x="914400" y="3300413"/>
+            <a:ext cx="7315200" cy="2700337"/>
+          </a:xfrm>
+          <a:prstGeom prst="rect">
+            <a:avLst/>
+          </a:prstGeom>
+        </p:spPr>
+        <p:txBody>
+          <a:bodyPr/>
+          <a:lstStyle/>
+          <a:p>
+            <a:endParaRPr lang="en-US" dirty="0"/>
+          </a:p>
+        </p:txBody>
+      </p:sp>
+    </p:spTree>
+    <p:extLst>
+      <p:ext uri="{BB962C8B-B14F-4D97-AF65-F5344CB8AC3E}">
+        <p14:creationId xmlns:p14="http://schemas.microsoft.com/office/powerpoint/2010/main" val="3444482115"/>
+      </p:ext>
+    </p:extLst>
+  </p:cSld>
+  <p:clrMapOvr>
+    <a:masterClrMapping/>
+  </p:clrMapOvr>
+</p:notes>
+</file>
+
+<file path=ppt/notesSlides/notesSlide7.xml><?xml version="1.0" encoding="utf-8"?>
 <p:notes xmlns:a="http://schemas.openxmlformats.org/drawingml/2006/main" xmlns:r="http://schemas.openxmlformats.org/officeDocument/2006/relationships" xmlns:p="http://schemas.openxmlformats.org/presentationml/2006/main">
   <p:cSld>
     <p:spTree>
@@ -710,7 +1106,34 @@
           <a:bodyPr/>
           <a:lstStyle/>
           <a:p>
-            <a:endParaRPr lang="en-US" dirty="0"/>
+            <a:pPr marL="171450" indent="-171450">
+              <a:buFontTx/>
+              <a:buChar char="-"/>
+            </a:pPr>
+            <a:r>
+              <a:rPr lang="en-US" dirty="0"/>
+              <a:t>See results</a:t>
+            </a:r>
+          </a:p>
+          <a:p>
+            <a:pPr marL="171450" indent="-171450">
+              <a:buFontTx/>
+              <a:buChar char="-"/>
+            </a:pPr>
+            <a:r>
+              <a:rPr lang="en-US" dirty="0"/>
+              <a:t>PGO on DT24 currently not possible as DT24 code doesn’t provide individual results for a single frame, just overall</a:t>
+            </a:r>
+          </a:p>
+          <a:p>
+            <a:pPr marL="171450" indent="-171450">
+              <a:buFontTx/>
+              <a:buChar char="-"/>
+            </a:pPr>
+            <a:r>
+              <a:rPr lang="en-US" dirty="0"/>
+              <a:t>No GPE for PGO results as I didn’t have the time yet to implement that</a:t>
+            </a:r>
           </a:p>
         </p:txBody>
       </p:sp>
@@ -727,7 +1150,7 @@
 </p:notes>
 </file>
 
-<file path=ppt/notesSlides/notesSlide6.xml><?xml version="1.0" encoding="utf-8"?>
+<file path=ppt/notesSlides/notesSlide8.xml><?xml version="1.0" encoding="utf-8"?>
 <p:notes xmlns:a="http://schemas.openxmlformats.org/drawingml/2006/main" xmlns:r="http://schemas.openxmlformats.org/officeDocument/2006/relationships" xmlns:p="http://schemas.openxmlformats.org/presentationml/2006/main">
   <p:cSld>
     <p:spTree>
@@ -828,108 +1251,7 @@
 </p:notes>
 </file>
 
-<file path=ppt/notesSlides/notesSlide7.xml><?xml version="1.0" encoding="utf-8"?>
-<p:notes xmlns:a="http://schemas.openxmlformats.org/drawingml/2006/main" xmlns:r="http://schemas.openxmlformats.org/officeDocument/2006/relationships" xmlns:p="http://schemas.openxmlformats.org/presentationml/2006/main">
-  <p:cSld>
-    <p:spTree>
-      <p:nvGrpSpPr>
-        <p:cNvPr id="1" name="">
-          <a:extLst>
-            <a:ext uri="{FF2B5EF4-FFF2-40B4-BE49-F238E27FC236}">
-              <a16:creationId xmlns:a16="http://schemas.microsoft.com/office/drawing/2014/main" id="{FAFC1803-8A6C-3FBD-DBC2-FA922A28530A}"/>
-            </a:ext>
-          </a:extLst>
-        </p:cNvPr>
-        <p:cNvGrpSpPr/>
-        <p:nvPr/>
-      </p:nvGrpSpPr>
-      <p:grpSpPr>
-        <a:xfrm>
-          <a:off x="0" y="0"/>
-          <a:ext cx="0" cy="0"/>
-          <a:chOff x="0" y="0"/>
-          <a:chExt cx="0" cy="0"/>
-        </a:xfrm>
-      </p:grpSpPr>
-      <p:sp>
-        <p:nvSpPr>
-          <p:cNvPr id="2" name="Slide Image Placeholder 1">
-            <a:extLst>
-              <a:ext uri="{FF2B5EF4-FFF2-40B4-BE49-F238E27FC236}">
-                <a16:creationId xmlns:a16="http://schemas.microsoft.com/office/drawing/2014/main" id="{55E8D1BF-7DF1-BD75-8C21-EB8F2C8576A4}"/>
-              </a:ext>
-            </a:extLst>
-          </p:cNvPr>
-          <p:cNvSpPr>
-            <a:spLocks noGrp="1" noRot="1" noChangeAspect="1"/>
-          </p:cNvSpPr>
-          <p:nvPr>
-            <p:ph type="sldImg"/>
-          </p:nvPr>
-        </p:nvSpPr>
-        <p:spPr>
-          <a:xfrm>
-            <a:off x="2514600" y="857250"/>
-            <a:ext cx="4114800" cy="2314575"/>
-          </a:xfrm>
-          <a:prstGeom prst="rect">
-            <a:avLst/>
-          </a:prstGeom>
-          <a:noFill/>
-          <a:ln w="12700">
-            <a:solidFill>
-              <a:prstClr val="black"/>
-            </a:solidFill>
-          </a:ln>
-        </p:spPr>
-      </p:sp>
-      <p:sp>
-        <p:nvSpPr>
-          <p:cNvPr id="3" name="Notes Placeholder 2">
-            <a:extLst>
-              <a:ext uri="{FF2B5EF4-FFF2-40B4-BE49-F238E27FC236}">
-                <a16:creationId xmlns:a16="http://schemas.microsoft.com/office/drawing/2014/main" id="{188AB29E-5148-BED2-2406-67334CE64D93}"/>
-              </a:ext>
-            </a:extLst>
-          </p:cNvPr>
-          <p:cNvSpPr>
-            <a:spLocks noGrp="1"/>
-          </p:cNvSpPr>
-          <p:nvPr>
-            <p:ph type="body" idx="1"/>
-          </p:nvPr>
-        </p:nvSpPr>
-        <p:spPr>
-          <a:xfrm>
-            <a:off x="914400" y="3300413"/>
-            <a:ext cx="7315200" cy="2700337"/>
-          </a:xfrm>
-          <a:prstGeom prst="rect">
-            <a:avLst/>
-          </a:prstGeom>
-        </p:spPr>
-        <p:txBody>
-          <a:bodyPr/>
-          <a:lstStyle/>
-          <a:p>
-            <a:endParaRPr lang="en-US" dirty="0"/>
-          </a:p>
-        </p:txBody>
-      </p:sp>
-    </p:spTree>
-    <p:extLst>
-      <p:ext uri="{BB962C8B-B14F-4D97-AF65-F5344CB8AC3E}">
-        <p14:creationId xmlns:p14="http://schemas.microsoft.com/office/powerpoint/2010/main" val="3715969738"/>
-      </p:ext>
-    </p:extLst>
-  </p:cSld>
-  <p:clrMapOvr>
-    <a:masterClrMapping/>
-  </p:clrMapOvr>
-</p:notes>
-</file>
-
-<file path=ppt/notesSlides/notesSlide8.xml><?xml version="1.0" encoding="utf-8"?>
+<file path=ppt/notesSlides/notesSlide9.xml><?xml version="1.0" encoding="utf-8"?>
 <p:notes xmlns:a="http://schemas.openxmlformats.org/drawingml/2006/main" xmlns:r="http://schemas.openxmlformats.org/officeDocument/2006/relationships" xmlns:p="http://schemas.openxmlformats.org/presentationml/2006/main">
   <p:cSld>
     <p:spTree>
@@ -1021,107 +1343,6 @@
     <p:extLst>
       <p:ext uri="{BB962C8B-B14F-4D97-AF65-F5344CB8AC3E}">
         <p14:creationId xmlns:p14="http://schemas.microsoft.com/office/powerpoint/2010/main" val="2698343785"/>
-      </p:ext>
-    </p:extLst>
-  </p:cSld>
-  <p:clrMapOvr>
-    <a:masterClrMapping/>
-  </p:clrMapOvr>
-</p:notes>
-</file>
-
-<file path=ppt/notesSlides/notesSlide9.xml><?xml version="1.0" encoding="utf-8"?>
-<p:notes xmlns:a="http://schemas.openxmlformats.org/drawingml/2006/main" xmlns:r="http://schemas.openxmlformats.org/officeDocument/2006/relationships" xmlns:p="http://schemas.openxmlformats.org/presentationml/2006/main">
-  <p:cSld>
-    <p:spTree>
-      <p:nvGrpSpPr>
-        <p:cNvPr id="1" name="">
-          <a:extLst>
-            <a:ext uri="{FF2B5EF4-FFF2-40B4-BE49-F238E27FC236}">
-              <a16:creationId xmlns:a16="http://schemas.microsoft.com/office/drawing/2014/main" id="{B456F6D0-3100-79C4-7AA9-879773F7A22C}"/>
-            </a:ext>
-          </a:extLst>
-        </p:cNvPr>
-        <p:cNvGrpSpPr/>
-        <p:nvPr/>
-      </p:nvGrpSpPr>
-      <p:grpSpPr>
-        <a:xfrm>
-          <a:off x="0" y="0"/>
-          <a:ext cx="0" cy="0"/>
-          <a:chOff x="0" y="0"/>
-          <a:chExt cx="0" cy="0"/>
-        </a:xfrm>
-      </p:grpSpPr>
-      <p:sp>
-        <p:nvSpPr>
-          <p:cNvPr id="2" name="Slide Image Placeholder 1">
-            <a:extLst>
-              <a:ext uri="{FF2B5EF4-FFF2-40B4-BE49-F238E27FC236}">
-                <a16:creationId xmlns:a16="http://schemas.microsoft.com/office/drawing/2014/main" id="{C4721FE9-E15C-3631-B457-B85439BDB37B}"/>
-              </a:ext>
-            </a:extLst>
-          </p:cNvPr>
-          <p:cNvSpPr>
-            <a:spLocks noGrp="1" noRot="1" noChangeAspect="1"/>
-          </p:cNvSpPr>
-          <p:nvPr>
-            <p:ph type="sldImg"/>
-          </p:nvPr>
-        </p:nvSpPr>
-        <p:spPr>
-          <a:xfrm>
-            <a:off x="2514600" y="857250"/>
-            <a:ext cx="4114800" cy="2314575"/>
-          </a:xfrm>
-          <a:prstGeom prst="rect">
-            <a:avLst/>
-          </a:prstGeom>
-          <a:noFill/>
-          <a:ln w="12700">
-            <a:solidFill>
-              <a:prstClr val="black"/>
-            </a:solidFill>
-          </a:ln>
-        </p:spPr>
-      </p:sp>
-      <p:sp>
-        <p:nvSpPr>
-          <p:cNvPr id="3" name="Notes Placeholder 2">
-            <a:extLst>
-              <a:ext uri="{FF2B5EF4-FFF2-40B4-BE49-F238E27FC236}">
-                <a16:creationId xmlns:a16="http://schemas.microsoft.com/office/drawing/2014/main" id="{49E508A6-9778-0A51-71DE-079E8F4C628E}"/>
-              </a:ext>
-            </a:extLst>
-          </p:cNvPr>
-          <p:cNvSpPr>
-            <a:spLocks noGrp="1"/>
-          </p:cNvSpPr>
-          <p:nvPr>
-            <p:ph type="body" idx="1"/>
-          </p:nvPr>
-        </p:nvSpPr>
-        <p:spPr>
-          <a:xfrm>
-            <a:off x="914400" y="3300413"/>
-            <a:ext cx="7315200" cy="2700337"/>
-          </a:xfrm>
-          <a:prstGeom prst="rect">
-            <a:avLst/>
-          </a:prstGeom>
-        </p:spPr>
-        <p:txBody>
-          <a:bodyPr/>
-          <a:lstStyle/>
-          <a:p>
-            <a:endParaRPr lang="en-US" dirty="0"/>
-          </a:p>
-        </p:txBody>
-      </p:sp>
-    </p:spTree>
-    <p:extLst>
-      <p:ext uri="{BB962C8B-B14F-4D97-AF65-F5344CB8AC3E}">
-        <p14:creationId xmlns:p14="http://schemas.microsoft.com/office/powerpoint/2010/main" val="1468915175"/>
       </p:ext>
     </p:extLst>
   </p:cSld>
@@ -2103,7 +2324,7 @@
           <a:p>
             <a:fld id="{8664C608-40B1-4030-A28D-5B74BC98ADCE}" type="datetimeFigureOut">
               <a:rPr lang="en-US" dirty="0"/>
-              <a:t>5/31/2026</a:t>
+              <a:t>6/2/2026</a:t>
             </a:fld>
             <a:endParaRPr lang="en-US" dirty="0"/>
           </a:p>
@@ -2884,40 +3105,6 @@
       </p:grpSpPr>
       <p:sp>
         <p:nvSpPr>
-          <p:cNvPr id="3" name="Slide Number Placeholder 2">
-            <a:extLst>
-              <a:ext uri="{FF2B5EF4-FFF2-40B4-BE49-F238E27FC236}">
-                <a16:creationId xmlns:a16="http://schemas.microsoft.com/office/drawing/2014/main" id="{C6FFC526-D2F6-722E-5995-A5B6FE708617}"/>
-              </a:ext>
-            </a:extLst>
-          </p:cNvPr>
-          <p:cNvSpPr>
-            <a:spLocks noGrp="1"/>
-          </p:cNvSpPr>
-          <p:nvPr>
-            <p:ph type="sldNum" idx="1"/>
-          </p:nvPr>
-        </p:nvSpPr>
-        <p:spPr>
-          <a:xfrm>
-            <a:off x="9093107" y="4704588"/>
-            <a:ext cx="480060" cy="273844"/>
-          </a:xfrm>
-        </p:spPr>
-        <p:txBody>
-          <a:bodyPr/>
-          <a:lstStyle/>
-          <a:p>
-            <a:fld id="{7475F232-FFFE-5E6C-5554-2F165DAD28C0}" type="slidenum">
-              <a:rPr lang="en-JP" smtClean="0"/>
-              <a:t>10</a:t>
-            </a:fld>
-            <a:endParaRPr lang="en-JP" dirty="0"/>
-          </a:p>
-        </p:txBody>
-      </p:sp>
-      <p:sp>
-        <p:nvSpPr>
           <p:cNvPr id="4" name="Title 3">
             <a:extLst>
               <a:ext uri="{FF2B5EF4-FFF2-40B4-BE49-F238E27FC236}">
@@ -3014,13 +3201,7 @@
               <a:rPr lang="en-US" sz="2000" dirty="0">
                 <a:hlinkClick r:id="rId4"/>
               </a:rPr>
-              <a:t>https://arxiv.org/pdf/2509.09530</a:t>
-            </a:r>
-            <a:r>
-              <a:rPr lang="en-US" sz="2000" dirty="0">
-                <a:hlinkClick r:id="rId3"/>
-              </a:rPr>
-              <a:t>/</a:t>
+              <a:t>https://arxiv.org/pdf/2509.09530/</a:t>
             </a:r>
             <a:endParaRPr lang="en-US" sz="2000" dirty="0"/>
           </a:p>
@@ -3040,7 +3221,203 @@
               </a:buClr>
               <a:buNone/>
             </a:pPr>
+            <a:r>
+              <a:rPr lang="en-US" sz="2000" dirty="0">
+                <a:hlinkClick r:id="rId5"/>
+              </a:rPr>
+              <a:t>https://borglab.github.io/gtsam/</a:t>
+            </a:r>
+            <a:endParaRPr lang="en-US" sz="2000" dirty="0"/>
+          </a:p>
+          <a:p>
+            <a:pPr marL="0" indent="0">
+              <a:buClr>
+                <a:srgbClr val="9E3611"/>
+              </a:buClr>
+              <a:buNone/>
+            </a:pPr>
+            <a:endParaRPr lang="en-US" sz="2000" dirty="0"/>
+          </a:p>
+          <a:p>
+            <a:pPr marL="0" indent="0">
+              <a:buClr>
+                <a:srgbClr val="9E3611"/>
+              </a:buClr>
+              <a:buNone/>
+            </a:pPr>
+            <a:r>
+              <a:rPr lang="en-US" sz="2000" dirty="0">
+                <a:hlinkClick r:id="rId6"/>
+              </a:rPr>
+              <a:t>https://borglab.github.io/gtsam/nonlinearoptimizer/</a:t>
+            </a:r>
+            <a:endParaRPr lang="en-US" sz="2000" dirty="0"/>
+          </a:p>
+          <a:p>
+            <a:pPr marL="0" indent="0">
+              <a:buClr>
+                <a:srgbClr val="9E3611"/>
+              </a:buClr>
+              <a:buNone/>
+            </a:pPr>
+            <a:endParaRPr lang="en-US" sz="2000" dirty="0"/>
+          </a:p>
+          <a:p>
+            <a:pPr marL="0" indent="0">
+              <a:buClr>
+                <a:srgbClr val="9E3611"/>
+              </a:buClr>
+              <a:buNone/>
+            </a:pPr>
+            <a:r>
+              <a:rPr lang="en-US" sz="2000" dirty="0">
+                <a:hlinkClick r:id="rId7"/>
+              </a:rPr>
+              <a:t>https://borglab.github.io/gtsam/betweenfactor/</a:t>
+            </a:r>
+            <a:endParaRPr lang="en-US" sz="2000" dirty="0"/>
+          </a:p>
+          <a:p>
+            <a:pPr marL="0" indent="0">
+              <a:buClr>
+                <a:srgbClr val="9E3611"/>
+              </a:buClr>
+              <a:buNone/>
+            </a:pPr>
             <a:endParaRPr lang="en-US" sz="2000" b="0" dirty="0"/>
+          </a:p>
+        </p:txBody>
+      </p:sp>
+      <p:sp>
+        <p:nvSpPr>
+          <p:cNvPr id="2" name="Slide Number Placeholder 2">
+            <a:extLst>
+              <a:ext uri="{FF2B5EF4-FFF2-40B4-BE49-F238E27FC236}">
+                <a16:creationId xmlns:a16="http://schemas.microsoft.com/office/drawing/2014/main" id="{B6ACB501-D4E0-7E04-F9F4-1609F874B511}"/>
+              </a:ext>
+            </a:extLst>
+          </p:cNvPr>
+          <p:cNvSpPr txBox="1">
+            <a:spLocks/>
+          </p:cNvSpPr>
+          <p:nvPr/>
+        </p:nvSpPr>
+        <p:spPr>
+          <a:xfrm>
+            <a:off x="8483346" y="4704588"/>
+            <a:ext cx="480060" cy="273844"/>
+          </a:xfrm>
+          <a:prstGeom prst="rect">
+            <a:avLst/>
+          </a:prstGeom>
+          <a:noFill/>
+        </p:spPr>
+        <p:txBody>
+          <a:bodyPr vert="horz" lIns="91440" tIns="45720" rIns="91440" bIns="45720" rtlCol="0" anchor="ctr">
+            <a:normAutofit/>
+          </a:bodyPr>
+          <a:lstStyle>
+            <a:defPPr>
+              <a:defRPr lang="en-US"/>
+            </a:defPPr>
+            <a:lvl1pPr marL="0" algn="ctr" defTabSz="457200" rtl="0" eaLnBrk="1" latinLnBrk="0" hangingPunct="1">
+              <a:defRPr sz="1050" b="1" kern="1200">
+                <a:solidFill>
+                  <a:srgbClr val="FFFFFF"/>
+                </a:solidFill>
+                <a:latin typeface="+mj-lt"/>
+                <a:ea typeface="+mn-ea"/>
+                <a:cs typeface="+mn-cs"/>
+              </a:defRPr>
+            </a:lvl1pPr>
+            <a:lvl2pPr marL="457200" algn="l" defTabSz="457200" rtl="0" eaLnBrk="1" latinLnBrk="0" hangingPunct="1">
+              <a:defRPr sz="1800" kern="1200">
+                <a:solidFill>
+                  <a:schemeClr val="tx1"/>
+                </a:solidFill>
+                <a:latin typeface="+mn-lt"/>
+                <a:ea typeface="+mn-ea"/>
+                <a:cs typeface="+mn-cs"/>
+              </a:defRPr>
+            </a:lvl2pPr>
+            <a:lvl3pPr marL="914400" algn="l" defTabSz="457200" rtl="0" eaLnBrk="1" latinLnBrk="0" hangingPunct="1">
+              <a:defRPr sz="1800" kern="1200">
+                <a:solidFill>
+                  <a:schemeClr val="tx1"/>
+                </a:solidFill>
+                <a:latin typeface="+mn-lt"/>
+                <a:ea typeface="+mn-ea"/>
+                <a:cs typeface="+mn-cs"/>
+              </a:defRPr>
+            </a:lvl3pPr>
+            <a:lvl4pPr marL="1371600" algn="l" defTabSz="457200" rtl="0" eaLnBrk="1" latinLnBrk="0" hangingPunct="1">
+              <a:defRPr sz="1800" kern="1200">
+                <a:solidFill>
+                  <a:schemeClr val="tx1"/>
+                </a:solidFill>
+                <a:latin typeface="+mn-lt"/>
+                <a:ea typeface="+mn-ea"/>
+                <a:cs typeface="+mn-cs"/>
+              </a:defRPr>
+            </a:lvl4pPr>
+            <a:lvl5pPr marL="1828800" algn="l" defTabSz="457200" rtl="0" eaLnBrk="1" latinLnBrk="0" hangingPunct="1">
+              <a:defRPr sz="1800" kern="1200">
+                <a:solidFill>
+                  <a:schemeClr val="tx1"/>
+                </a:solidFill>
+                <a:latin typeface="+mn-lt"/>
+                <a:ea typeface="+mn-ea"/>
+                <a:cs typeface="+mn-cs"/>
+              </a:defRPr>
+            </a:lvl5pPr>
+            <a:lvl6pPr marL="2286000" algn="l" defTabSz="457200" rtl="0" eaLnBrk="1" latinLnBrk="0" hangingPunct="1">
+              <a:defRPr sz="1800" kern="1200">
+                <a:solidFill>
+                  <a:schemeClr val="tx1"/>
+                </a:solidFill>
+                <a:latin typeface="+mn-lt"/>
+                <a:ea typeface="+mn-ea"/>
+                <a:cs typeface="+mn-cs"/>
+              </a:defRPr>
+            </a:lvl6pPr>
+            <a:lvl7pPr marL="2743200" algn="l" defTabSz="457200" rtl="0" eaLnBrk="1" latinLnBrk="0" hangingPunct="1">
+              <a:defRPr sz="1800" kern="1200">
+                <a:solidFill>
+                  <a:schemeClr val="tx1"/>
+                </a:solidFill>
+                <a:latin typeface="+mn-lt"/>
+                <a:ea typeface="+mn-ea"/>
+                <a:cs typeface="+mn-cs"/>
+              </a:defRPr>
+            </a:lvl7pPr>
+            <a:lvl8pPr marL="3200400" algn="l" defTabSz="457200" rtl="0" eaLnBrk="1" latinLnBrk="0" hangingPunct="1">
+              <a:defRPr sz="1800" kern="1200">
+                <a:solidFill>
+                  <a:schemeClr val="tx1"/>
+                </a:solidFill>
+                <a:latin typeface="+mn-lt"/>
+                <a:ea typeface="+mn-ea"/>
+                <a:cs typeface="+mn-cs"/>
+              </a:defRPr>
+            </a:lvl8pPr>
+            <a:lvl9pPr marL="3657600" algn="l" defTabSz="457200" rtl="0" eaLnBrk="1" latinLnBrk="0" hangingPunct="1">
+              <a:defRPr sz="1800" kern="1200">
+                <a:solidFill>
+                  <a:schemeClr val="tx1"/>
+                </a:solidFill>
+                <a:latin typeface="+mn-lt"/>
+                <a:ea typeface="+mn-ea"/>
+                <a:cs typeface="+mn-cs"/>
+              </a:defRPr>
+            </a:lvl9pPr>
+          </a:lstStyle>
+          <a:p>
+            <a:fld id="{7475F232-FFFE-5E6C-5554-2F165DAD28C0}" type="slidenum">
+              <a:rPr lang="en-JP" smtClean="0"/>
+              <a:pPr/>
+              <a:t>10</a:t>
+            </a:fld>
+            <a:endParaRPr lang="en-JP" dirty="0"/>
           </a:p>
         </p:txBody>
       </p:sp>
@@ -3082,40 +3459,6 @@
       </p:grpSpPr>
       <p:sp>
         <p:nvSpPr>
-          <p:cNvPr id="3" name="Slide Number Placeholder 2">
-            <a:extLst>
-              <a:ext uri="{FF2B5EF4-FFF2-40B4-BE49-F238E27FC236}">
-                <a16:creationId xmlns:a16="http://schemas.microsoft.com/office/drawing/2014/main" id="{C230DFBB-19A4-2282-034A-6CE91DBC205C}"/>
-              </a:ext>
-            </a:extLst>
-          </p:cNvPr>
-          <p:cNvSpPr>
-            <a:spLocks noGrp="1"/>
-          </p:cNvSpPr>
-          <p:nvPr>
-            <p:ph type="sldNum" idx="1"/>
-          </p:nvPr>
-        </p:nvSpPr>
-        <p:spPr>
-          <a:xfrm>
-            <a:off x="9093107" y="4704588"/>
-            <a:ext cx="480060" cy="273844"/>
-          </a:xfrm>
-        </p:spPr>
-        <p:txBody>
-          <a:bodyPr/>
-          <a:lstStyle/>
-          <a:p>
-            <a:fld id="{7475F232-FFFE-5E6C-5554-2F165DAD28C0}" type="slidenum">
-              <a:rPr lang="en-JP" smtClean="0"/>
-              <a:t>2</a:t>
-            </a:fld>
-            <a:endParaRPr lang="en-JP" dirty="0"/>
-          </a:p>
-        </p:txBody>
-      </p:sp>
-      <p:sp>
-        <p:nvSpPr>
           <p:cNvPr id="4" name="Title 3">
             <a:extLst>
               <a:ext uri="{FF2B5EF4-FFF2-40B4-BE49-F238E27FC236}">
@@ -3557,7 +3900,7 @@
           <p:nvPr/>
         </p:nvPicPr>
         <p:blipFill>
-          <a:blip r:embed="rId2" cstate="print">
+          <a:blip r:embed="rId3" cstate="print">
             <a:extLst>
               <a:ext uri="{28A0092B-C50C-407E-A947-70E740481C1C}">
                 <a14:useLocalDpi xmlns:a14="http://schemas.microsoft.com/office/drawing/2010/main" val="0"/>
@@ -3604,7 +3947,7 @@
           <p:nvPr/>
         </p:nvPicPr>
         <p:blipFill>
-          <a:blip r:embed="rId3" cstate="print">
+          <a:blip r:embed="rId4" cstate="print">
             <a:extLst>
               <a:ext uri="{28A0092B-C50C-407E-A947-70E740481C1C}">
                 <a14:useLocalDpi xmlns:a14="http://schemas.microsoft.com/office/drawing/2010/main" val="0"/>
@@ -3975,7 +4318,7 @@
           <p:nvPr/>
         </p:nvPicPr>
         <p:blipFill>
-          <a:blip r:embed="rId4" cstate="print">
+          <a:blip r:embed="rId5" cstate="print">
             <a:extLst>
               <a:ext uri="{28A0092B-C50C-407E-A947-70E740481C1C}">
                 <a14:useLocalDpi xmlns:a14="http://schemas.microsoft.com/office/drawing/2010/main" val="0"/>
@@ -6817,6 +7160,139 @@
           </a:fontRef>
         </p:style>
       </p:cxnSp>
+      <p:sp>
+        <p:nvSpPr>
+          <p:cNvPr id="27" name="Slide Number Placeholder 2">
+            <a:extLst>
+              <a:ext uri="{FF2B5EF4-FFF2-40B4-BE49-F238E27FC236}">
+                <a16:creationId xmlns:a16="http://schemas.microsoft.com/office/drawing/2014/main" id="{7286690D-E53A-A173-DEA4-C46DB10A77E2}"/>
+              </a:ext>
+            </a:extLst>
+          </p:cNvPr>
+          <p:cNvSpPr txBox="1">
+            <a:spLocks/>
+          </p:cNvSpPr>
+          <p:nvPr/>
+        </p:nvSpPr>
+        <p:spPr>
+          <a:xfrm>
+            <a:off x="8483346" y="4704588"/>
+            <a:ext cx="480060" cy="273844"/>
+          </a:xfrm>
+          <a:prstGeom prst="rect">
+            <a:avLst/>
+          </a:prstGeom>
+          <a:noFill/>
+        </p:spPr>
+        <p:txBody>
+          <a:bodyPr vert="horz" lIns="91440" tIns="45720" rIns="91440" bIns="45720" rtlCol="0" anchor="ctr">
+            <a:normAutofit/>
+          </a:bodyPr>
+          <a:lstStyle>
+            <a:defPPr>
+              <a:defRPr lang="en-US"/>
+            </a:defPPr>
+            <a:lvl1pPr marL="0" algn="ctr" defTabSz="457200" rtl="0" eaLnBrk="1" latinLnBrk="0" hangingPunct="1">
+              <a:defRPr sz="1050" b="1" kern="1200">
+                <a:solidFill>
+                  <a:srgbClr val="FFFFFF"/>
+                </a:solidFill>
+                <a:latin typeface="+mj-lt"/>
+                <a:ea typeface="+mn-ea"/>
+                <a:cs typeface="+mn-cs"/>
+              </a:defRPr>
+            </a:lvl1pPr>
+            <a:lvl2pPr marL="457200" algn="l" defTabSz="457200" rtl="0" eaLnBrk="1" latinLnBrk="0" hangingPunct="1">
+              <a:defRPr sz="1800" kern="1200">
+                <a:solidFill>
+                  <a:schemeClr val="tx1"/>
+                </a:solidFill>
+                <a:latin typeface="+mn-lt"/>
+                <a:ea typeface="+mn-ea"/>
+                <a:cs typeface="+mn-cs"/>
+              </a:defRPr>
+            </a:lvl2pPr>
+            <a:lvl3pPr marL="914400" algn="l" defTabSz="457200" rtl="0" eaLnBrk="1" latinLnBrk="0" hangingPunct="1">
+              <a:defRPr sz="1800" kern="1200">
+                <a:solidFill>
+                  <a:schemeClr val="tx1"/>
+                </a:solidFill>
+                <a:latin typeface="+mn-lt"/>
+                <a:ea typeface="+mn-ea"/>
+                <a:cs typeface="+mn-cs"/>
+              </a:defRPr>
+            </a:lvl3pPr>
+            <a:lvl4pPr marL="1371600" algn="l" defTabSz="457200" rtl="0" eaLnBrk="1" latinLnBrk="0" hangingPunct="1">
+              <a:defRPr sz="1800" kern="1200">
+                <a:solidFill>
+                  <a:schemeClr val="tx1"/>
+                </a:solidFill>
+                <a:latin typeface="+mn-lt"/>
+                <a:ea typeface="+mn-ea"/>
+                <a:cs typeface="+mn-cs"/>
+              </a:defRPr>
+            </a:lvl4pPr>
+            <a:lvl5pPr marL="1828800" algn="l" defTabSz="457200" rtl="0" eaLnBrk="1" latinLnBrk="0" hangingPunct="1">
+              <a:defRPr sz="1800" kern="1200">
+                <a:solidFill>
+                  <a:schemeClr val="tx1"/>
+                </a:solidFill>
+                <a:latin typeface="+mn-lt"/>
+                <a:ea typeface="+mn-ea"/>
+                <a:cs typeface="+mn-cs"/>
+              </a:defRPr>
+            </a:lvl5pPr>
+            <a:lvl6pPr marL="2286000" algn="l" defTabSz="457200" rtl="0" eaLnBrk="1" latinLnBrk="0" hangingPunct="1">
+              <a:defRPr sz="1800" kern="1200">
+                <a:solidFill>
+                  <a:schemeClr val="tx1"/>
+                </a:solidFill>
+                <a:latin typeface="+mn-lt"/>
+                <a:ea typeface="+mn-ea"/>
+                <a:cs typeface="+mn-cs"/>
+              </a:defRPr>
+            </a:lvl6pPr>
+            <a:lvl7pPr marL="2743200" algn="l" defTabSz="457200" rtl="0" eaLnBrk="1" latinLnBrk="0" hangingPunct="1">
+              <a:defRPr sz="1800" kern="1200">
+                <a:solidFill>
+                  <a:schemeClr val="tx1"/>
+                </a:solidFill>
+                <a:latin typeface="+mn-lt"/>
+                <a:ea typeface="+mn-ea"/>
+                <a:cs typeface="+mn-cs"/>
+              </a:defRPr>
+            </a:lvl7pPr>
+            <a:lvl8pPr marL="3200400" algn="l" defTabSz="457200" rtl="0" eaLnBrk="1" latinLnBrk="0" hangingPunct="1">
+              <a:defRPr sz="1800" kern="1200">
+                <a:solidFill>
+                  <a:schemeClr val="tx1"/>
+                </a:solidFill>
+                <a:latin typeface="+mn-lt"/>
+                <a:ea typeface="+mn-ea"/>
+                <a:cs typeface="+mn-cs"/>
+              </a:defRPr>
+            </a:lvl8pPr>
+            <a:lvl9pPr marL="3657600" algn="l" defTabSz="457200" rtl="0" eaLnBrk="1" latinLnBrk="0" hangingPunct="1">
+              <a:defRPr sz="1800" kern="1200">
+                <a:solidFill>
+                  <a:schemeClr val="tx1"/>
+                </a:solidFill>
+                <a:latin typeface="+mn-lt"/>
+                <a:ea typeface="+mn-ea"/>
+                <a:cs typeface="+mn-cs"/>
+              </a:defRPr>
+            </a:lvl9pPr>
+          </a:lstStyle>
+          <a:p>
+            <a:fld id="{7475F232-FFFE-5E6C-5554-2F165DAD28C0}" type="slidenum">
+              <a:rPr lang="en-JP" smtClean="0"/>
+              <a:pPr/>
+              <a:t>2</a:t>
+            </a:fld>
+            <a:endParaRPr lang="en-JP" dirty="0"/>
+          </a:p>
+        </p:txBody>
+      </p:sp>
     </p:spTree>
     <p:extLst>
       <p:ext uri="{BB962C8B-B14F-4D97-AF65-F5344CB8AC3E}">
@@ -6855,40 +7331,6 @@
       </p:grpSpPr>
       <p:sp>
         <p:nvSpPr>
-          <p:cNvPr id="3" name="Slide Number Placeholder 2">
-            <a:extLst>
-              <a:ext uri="{FF2B5EF4-FFF2-40B4-BE49-F238E27FC236}">
-                <a16:creationId xmlns:a16="http://schemas.microsoft.com/office/drawing/2014/main" id="{A5AC1740-F43A-8CCC-C433-33416806F131}"/>
-              </a:ext>
-            </a:extLst>
-          </p:cNvPr>
-          <p:cNvSpPr>
-            <a:spLocks noGrp="1"/>
-          </p:cNvSpPr>
-          <p:nvPr>
-            <p:ph type="sldNum" idx="1"/>
-          </p:nvPr>
-        </p:nvSpPr>
-        <p:spPr>
-          <a:xfrm>
-            <a:off x="9093107" y="4704588"/>
-            <a:ext cx="480060" cy="273844"/>
-          </a:xfrm>
-        </p:spPr>
-        <p:txBody>
-          <a:bodyPr/>
-          <a:lstStyle/>
-          <a:p>
-            <a:fld id="{7475F232-FFFE-5E6C-5554-2F165DAD28C0}" type="slidenum">
-              <a:rPr lang="en-JP" smtClean="0"/>
-              <a:t>3</a:t>
-            </a:fld>
-            <a:endParaRPr lang="en-JP" dirty="0"/>
-          </a:p>
-        </p:txBody>
-      </p:sp>
-      <p:sp>
-        <p:nvSpPr>
           <p:cNvPr id="4" name="Title 3">
             <a:extLst>
               <a:ext uri="{FF2B5EF4-FFF2-40B4-BE49-F238E27FC236}">
@@ -6966,7 +7408,7 @@
             </a:r>
             <a:r>
               <a:rPr lang="en-US" sz="2000" b="0" dirty="0"/>
-              <a:t> code</a:t>
+              <a:t> code (+PGO) using GTSAM library</a:t>
             </a:r>
           </a:p>
           <a:p>
@@ -7036,6 +7478,139 @@
               <a:rPr lang="en-US" sz="2000" b="0" dirty="0"/>
               <a:t>Writing Master Thesis</a:t>
             </a:r>
+          </a:p>
+        </p:txBody>
+      </p:sp>
+      <p:sp>
+        <p:nvSpPr>
+          <p:cNvPr id="2" name="Slide Number Placeholder 2">
+            <a:extLst>
+              <a:ext uri="{FF2B5EF4-FFF2-40B4-BE49-F238E27FC236}">
+                <a16:creationId xmlns:a16="http://schemas.microsoft.com/office/drawing/2014/main" id="{463EE220-6A3A-B3F0-3A80-F744F7697689}"/>
+              </a:ext>
+            </a:extLst>
+          </p:cNvPr>
+          <p:cNvSpPr txBox="1">
+            <a:spLocks/>
+          </p:cNvSpPr>
+          <p:nvPr/>
+        </p:nvSpPr>
+        <p:spPr>
+          <a:xfrm>
+            <a:off x="8483346" y="4704588"/>
+            <a:ext cx="480060" cy="273844"/>
+          </a:xfrm>
+          <a:prstGeom prst="rect">
+            <a:avLst/>
+          </a:prstGeom>
+          <a:noFill/>
+        </p:spPr>
+        <p:txBody>
+          <a:bodyPr vert="horz" lIns="91440" tIns="45720" rIns="91440" bIns="45720" rtlCol="0" anchor="ctr">
+            <a:normAutofit/>
+          </a:bodyPr>
+          <a:lstStyle>
+            <a:defPPr>
+              <a:defRPr lang="en-US"/>
+            </a:defPPr>
+            <a:lvl1pPr marL="0" algn="ctr" defTabSz="457200" rtl="0" eaLnBrk="1" latinLnBrk="0" hangingPunct="1">
+              <a:defRPr sz="1050" b="1" kern="1200">
+                <a:solidFill>
+                  <a:srgbClr val="FFFFFF"/>
+                </a:solidFill>
+                <a:latin typeface="+mj-lt"/>
+                <a:ea typeface="+mn-ea"/>
+                <a:cs typeface="+mn-cs"/>
+              </a:defRPr>
+            </a:lvl1pPr>
+            <a:lvl2pPr marL="457200" algn="l" defTabSz="457200" rtl="0" eaLnBrk="1" latinLnBrk="0" hangingPunct="1">
+              <a:defRPr sz="1800" kern="1200">
+                <a:solidFill>
+                  <a:schemeClr val="tx1"/>
+                </a:solidFill>
+                <a:latin typeface="+mn-lt"/>
+                <a:ea typeface="+mn-ea"/>
+                <a:cs typeface="+mn-cs"/>
+              </a:defRPr>
+            </a:lvl2pPr>
+            <a:lvl3pPr marL="914400" algn="l" defTabSz="457200" rtl="0" eaLnBrk="1" latinLnBrk="0" hangingPunct="1">
+              <a:defRPr sz="1800" kern="1200">
+                <a:solidFill>
+                  <a:schemeClr val="tx1"/>
+                </a:solidFill>
+                <a:latin typeface="+mn-lt"/>
+                <a:ea typeface="+mn-ea"/>
+                <a:cs typeface="+mn-cs"/>
+              </a:defRPr>
+            </a:lvl3pPr>
+            <a:lvl4pPr marL="1371600" algn="l" defTabSz="457200" rtl="0" eaLnBrk="1" latinLnBrk="0" hangingPunct="1">
+              <a:defRPr sz="1800" kern="1200">
+                <a:solidFill>
+                  <a:schemeClr val="tx1"/>
+                </a:solidFill>
+                <a:latin typeface="+mn-lt"/>
+                <a:ea typeface="+mn-ea"/>
+                <a:cs typeface="+mn-cs"/>
+              </a:defRPr>
+            </a:lvl4pPr>
+            <a:lvl5pPr marL="1828800" algn="l" defTabSz="457200" rtl="0" eaLnBrk="1" latinLnBrk="0" hangingPunct="1">
+              <a:defRPr sz="1800" kern="1200">
+                <a:solidFill>
+                  <a:schemeClr val="tx1"/>
+                </a:solidFill>
+                <a:latin typeface="+mn-lt"/>
+                <a:ea typeface="+mn-ea"/>
+                <a:cs typeface="+mn-cs"/>
+              </a:defRPr>
+            </a:lvl5pPr>
+            <a:lvl6pPr marL="2286000" algn="l" defTabSz="457200" rtl="0" eaLnBrk="1" latinLnBrk="0" hangingPunct="1">
+              <a:defRPr sz="1800" kern="1200">
+                <a:solidFill>
+                  <a:schemeClr val="tx1"/>
+                </a:solidFill>
+                <a:latin typeface="+mn-lt"/>
+                <a:ea typeface="+mn-ea"/>
+                <a:cs typeface="+mn-cs"/>
+              </a:defRPr>
+            </a:lvl6pPr>
+            <a:lvl7pPr marL="2743200" algn="l" defTabSz="457200" rtl="0" eaLnBrk="1" latinLnBrk="0" hangingPunct="1">
+              <a:defRPr sz="1800" kern="1200">
+                <a:solidFill>
+                  <a:schemeClr val="tx1"/>
+                </a:solidFill>
+                <a:latin typeface="+mn-lt"/>
+                <a:ea typeface="+mn-ea"/>
+                <a:cs typeface="+mn-cs"/>
+              </a:defRPr>
+            </a:lvl7pPr>
+            <a:lvl8pPr marL="3200400" algn="l" defTabSz="457200" rtl="0" eaLnBrk="1" latinLnBrk="0" hangingPunct="1">
+              <a:defRPr sz="1800" kern="1200">
+                <a:solidFill>
+                  <a:schemeClr val="tx1"/>
+                </a:solidFill>
+                <a:latin typeface="+mn-lt"/>
+                <a:ea typeface="+mn-ea"/>
+                <a:cs typeface="+mn-cs"/>
+              </a:defRPr>
+            </a:lvl8pPr>
+            <a:lvl9pPr marL="3657600" algn="l" defTabSz="457200" rtl="0" eaLnBrk="1" latinLnBrk="0" hangingPunct="1">
+              <a:defRPr sz="1800" kern="1200">
+                <a:solidFill>
+                  <a:schemeClr val="tx1"/>
+                </a:solidFill>
+                <a:latin typeface="+mn-lt"/>
+                <a:ea typeface="+mn-ea"/>
+                <a:cs typeface="+mn-cs"/>
+              </a:defRPr>
+            </a:lvl9pPr>
+          </a:lstStyle>
+          <a:p>
+            <a:fld id="{7475F232-FFFE-5E6C-5554-2F165DAD28C0}" type="slidenum">
+              <a:rPr lang="en-JP" smtClean="0"/>
+              <a:pPr/>
+              <a:t>3</a:t>
+            </a:fld>
+            <a:endParaRPr lang="en-JP" dirty="0"/>
           </a:p>
         </p:txBody>
       </p:sp>
@@ -7060,7 +7635,7 @@
         <p:cNvPr id="1" name="">
           <a:extLst>
             <a:ext uri="{FF2B5EF4-FFF2-40B4-BE49-F238E27FC236}">
-              <a16:creationId xmlns:a16="http://schemas.microsoft.com/office/drawing/2014/main" id="{94FEE898-3847-5199-A981-96EB4793232B}"/>
+              <a16:creationId xmlns:a16="http://schemas.microsoft.com/office/drawing/2014/main" id="{D407B051-0EF6-8F7B-56A4-C014AFF651F2}"/>
             </a:ext>
           </a:extLst>
         </p:cNvPr>
@@ -7077,10 +7652,10 @@
       </p:grpSpPr>
       <p:sp>
         <p:nvSpPr>
-          <p:cNvPr id="3" name="Slide Number Placeholder 2">
+          <p:cNvPr id="4" name="Title 3">
             <a:extLst>
               <a:ext uri="{FF2B5EF4-FFF2-40B4-BE49-F238E27FC236}">
-                <a16:creationId xmlns:a16="http://schemas.microsoft.com/office/drawing/2014/main" id="{EAD1E657-A4ED-8F0C-5AAF-219B01A8DD0B}"/>
+                <a16:creationId xmlns:a16="http://schemas.microsoft.com/office/drawing/2014/main" id="{33B2CB50-C8A5-0856-D78D-E98286EBC0A2}"/>
               </a:ext>
             </a:extLst>
           </p:cNvPr>
@@ -7088,27 +7663,2445 @@
             <a:spLocks noGrp="1"/>
           </p:cNvSpPr>
           <p:nvPr>
-            <p:ph type="sldNum" idx="1"/>
+            <p:ph type="title" idx="2"/>
+          </p:nvPr>
+        </p:nvSpPr>
+        <p:spPr/>
+        <p:txBody>
+          <a:bodyPr/>
+          <a:lstStyle/>
+          <a:p>
+            <a:pPr marL="0">
+              <a:buClr>
+                <a:srgbClr val="9E3611"/>
+              </a:buClr>
+            </a:pPr>
+            <a:r>
+              <a:rPr lang="en-US" sz="2400" dirty="0">
+                <a:ea typeface="游ゴシック Medium"/>
+                <a:cs typeface="Times New Roman"/>
+              </a:rPr>
+              <a:t>   Pose Graph Optimization</a:t>
+            </a:r>
+          </a:p>
+        </p:txBody>
+      </p:sp>
+      <p:sp>
+        <p:nvSpPr>
+          <p:cNvPr id="16" name="Text Placeholder 1">
+            <a:extLst>
+              <a:ext uri="{FF2B5EF4-FFF2-40B4-BE49-F238E27FC236}">
+                <a16:creationId xmlns:a16="http://schemas.microsoft.com/office/drawing/2014/main" id="{00107EA1-420E-69FE-51CB-AEE3F5273065}"/>
+              </a:ext>
+            </a:extLst>
+          </p:cNvPr>
+          <p:cNvSpPr>
+            <a:spLocks noGrp="1"/>
+          </p:cNvSpPr>
+          <p:nvPr>
+            <p:ph type="body"/>
           </p:nvPr>
         </p:nvSpPr>
         <p:spPr>
           <a:xfrm>
-            <a:off x="9093107" y="4704588"/>
-            <a:ext cx="480060" cy="273844"/>
+            <a:off x="170325" y="707816"/>
+            <a:ext cx="8218099" cy="3986866"/>
           </a:xfrm>
         </p:spPr>
         <p:txBody>
-          <a:bodyPr/>
+          <a:bodyPr vert="horz" lIns="91440" tIns="45720" rIns="91440" bIns="45720" rtlCol="0" anchor="t">
+            <a:normAutofit/>
+          </a:bodyPr>
           <a:lstStyle/>
+          <a:p>
+            <a:pPr marL="0" indent="0">
+              <a:buClr>
+                <a:srgbClr val="9E3611"/>
+              </a:buClr>
+              <a:buNone/>
+            </a:pPr>
+            <a:endParaRPr lang="en-US" sz="2000" b="0" dirty="0"/>
+          </a:p>
+          <a:p>
+            <a:pPr marL="0" indent="0">
+              <a:buClr>
+                <a:srgbClr val="9E3611"/>
+              </a:buClr>
+              <a:buNone/>
+            </a:pPr>
+            <a:endParaRPr lang="en-US" sz="2000" b="0" dirty="0"/>
+          </a:p>
+        </p:txBody>
+      </p:sp>
+      <mc:AlternateContent xmlns:mc="http://schemas.openxmlformats.org/markup-compatibility/2006">
+        <mc:Choice xmlns:a14="http://schemas.microsoft.com/office/drawing/2010/main" Requires="a14">
+          <p:sp>
+            <p:nvSpPr>
+              <p:cNvPr id="5" name="Text Placeholder 1">
+                <a:extLst>
+                  <a:ext uri="{FF2B5EF4-FFF2-40B4-BE49-F238E27FC236}">
+                    <a16:creationId xmlns:a16="http://schemas.microsoft.com/office/drawing/2014/main" id="{8E78D97E-74FD-2C66-7EBF-94EB233ED3EB}"/>
+                  </a:ext>
+                </a:extLst>
+              </p:cNvPr>
+              <p:cNvSpPr txBox="1">
+                <a:spLocks/>
+              </p:cNvSpPr>
+              <p:nvPr/>
+            </p:nvSpPr>
+            <p:spPr>
+              <a:xfrm>
+                <a:off x="323528" y="707816"/>
+                <a:ext cx="8218099" cy="4305013"/>
+              </a:xfrm>
+              <a:prstGeom prst="rect">
+                <a:avLst/>
+              </a:prstGeom>
+              <a:noFill/>
+            </p:spPr>
+            <p:txBody>
+              <a:bodyPr vert="horz" lIns="91440" tIns="45720" rIns="91440" bIns="45720" rtlCol="0" anchor="t">
+                <a:noAutofit/>
+              </a:bodyPr>
+              <a:lstStyle>
+                <a:lvl1pPr marL="137160" indent="-137160" algn="l" defTabSz="685800" rtl="0" eaLnBrk="1" latinLnBrk="0" hangingPunct="1">
+                  <a:lnSpc>
+                    <a:spcPct val="90000"/>
+                  </a:lnSpc>
+                  <a:spcBef>
+                    <a:spcPts val="900"/>
+                  </a:spcBef>
+                  <a:buClr>
+                    <a:schemeClr val="accent1">
+                      <a:lumMod val="75000"/>
+                    </a:schemeClr>
+                  </a:buClr>
+                  <a:buSzPct val="100000"/>
+                  <a:buFont typeface="Arial" panose="020B0604020202020204" pitchFamily="34" charset="0"/>
+                  <a:buChar char="•"/>
+                  <a:defRPr kumimoji="1" sz="1500" b="1" kern="1200">
+                    <a:solidFill>
+                      <a:schemeClr val="tx1"/>
+                    </a:solidFill>
+                    <a:latin typeface="游ゴシック Medium" panose="020B0500000000000000" pitchFamily="50" charset="-128"/>
+                    <a:ea typeface="游ゴシック Medium" panose="020B0500000000000000" pitchFamily="50" charset="-128"/>
+                    <a:cs typeface="+mn-cs"/>
+                  </a:defRPr>
+                </a:lvl1pPr>
+                <a:lvl2pPr marL="342900" indent="-137160" algn="l" defTabSz="685800" rtl="0" eaLnBrk="1" latinLnBrk="0" hangingPunct="1">
+                  <a:lnSpc>
+                    <a:spcPct val="90000"/>
+                  </a:lnSpc>
+                  <a:spcBef>
+                    <a:spcPts val="300"/>
+                  </a:spcBef>
+                  <a:spcAft>
+                    <a:spcPts val="150"/>
+                  </a:spcAft>
+                  <a:buClr>
+                    <a:schemeClr val="accent1">
+                      <a:lumMod val="75000"/>
+                    </a:schemeClr>
+                  </a:buClr>
+                  <a:buSzPct val="100000"/>
+                  <a:buFont typeface="Arial" panose="020B0604020202020204" pitchFamily="34" charset="0"/>
+                  <a:buChar char="•"/>
+                  <a:defRPr kumimoji="1" sz="1350" b="1" kern="1200">
+                    <a:solidFill>
+                      <a:schemeClr val="tx1"/>
+                    </a:solidFill>
+                    <a:latin typeface="游ゴシック Medium" panose="020B0500000000000000" pitchFamily="50" charset="-128"/>
+                    <a:ea typeface="游ゴシック Medium" panose="020B0500000000000000" pitchFamily="50" charset="-128"/>
+                    <a:cs typeface="+mn-cs"/>
+                  </a:defRPr>
+                </a:lvl2pPr>
+                <a:lvl3pPr marL="548640" indent="-137160" algn="l" defTabSz="685800" rtl="0" eaLnBrk="1" latinLnBrk="0" hangingPunct="1">
+                  <a:lnSpc>
+                    <a:spcPct val="90000"/>
+                  </a:lnSpc>
+                  <a:spcBef>
+                    <a:spcPts val="300"/>
+                  </a:spcBef>
+                  <a:spcAft>
+                    <a:spcPts val="150"/>
+                  </a:spcAft>
+                  <a:buClr>
+                    <a:schemeClr val="accent1">
+                      <a:lumMod val="75000"/>
+                    </a:schemeClr>
+                  </a:buClr>
+                  <a:buSzPct val="100000"/>
+                  <a:buFont typeface="Arial" panose="020B0604020202020204" pitchFamily="34" charset="0"/>
+                  <a:buChar char="•"/>
+                  <a:defRPr kumimoji="1" sz="1200" b="1" kern="1200">
+                    <a:solidFill>
+                      <a:schemeClr val="tx1"/>
+                    </a:solidFill>
+                    <a:latin typeface="游ゴシック Medium" panose="020B0500000000000000" pitchFamily="50" charset="-128"/>
+                    <a:ea typeface="游ゴシック Medium" panose="020B0500000000000000" pitchFamily="50" charset="-128"/>
+                    <a:cs typeface="+mn-cs"/>
+                  </a:defRPr>
+                </a:lvl3pPr>
+                <a:lvl4pPr marL="754380" indent="-137160" algn="l" defTabSz="685800" rtl="0" eaLnBrk="1" latinLnBrk="0" hangingPunct="1">
+                  <a:lnSpc>
+                    <a:spcPct val="90000"/>
+                  </a:lnSpc>
+                  <a:spcBef>
+                    <a:spcPts val="300"/>
+                  </a:spcBef>
+                  <a:spcAft>
+                    <a:spcPts val="150"/>
+                  </a:spcAft>
+                  <a:buClr>
+                    <a:schemeClr val="accent1">
+                      <a:lumMod val="75000"/>
+                    </a:schemeClr>
+                  </a:buClr>
+                  <a:buSzPct val="100000"/>
+                  <a:buFont typeface="Arial" panose="020B0604020202020204" pitchFamily="34" charset="0"/>
+                  <a:buChar char="•"/>
+                  <a:defRPr kumimoji="1" sz="1200" b="1" kern="1200">
+                    <a:solidFill>
+                      <a:schemeClr val="tx1"/>
+                    </a:solidFill>
+                    <a:latin typeface="游ゴシック Medium" panose="020B0500000000000000" pitchFamily="50" charset="-128"/>
+                    <a:ea typeface="游ゴシック Medium" panose="020B0500000000000000" pitchFamily="50" charset="-128"/>
+                    <a:cs typeface="+mn-cs"/>
+                  </a:defRPr>
+                </a:lvl4pPr>
+                <a:lvl5pPr marL="960120" indent="-137160" algn="l" defTabSz="685800" rtl="0" eaLnBrk="1" latinLnBrk="0" hangingPunct="1">
+                  <a:lnSpc>
+                    <a:spcPct val="90000"/>
+                  </a:lnSpc>
+                  <a:spcBef>
+                    <a:spcPts val="300"/>
+                  </a:spcBef>
+                  <a:spcAft>
+                    <a:spcPts val="150"/>
+                  </a:spcAft>
+                  <a:buClr>
+                    <a:schemeClr val="accent1">
+                      <a:lumMod val="75000"/>
+                    </a:schemeClr>
+                  </a:buClr>
+                  <a:buSzPct val="100000"/>
+                  <a:buFont typeface="Arial" panose="020B0604020202020204" pitchFamily="34" charset="0"/>
+                  <a:buChar char="•"/>
+                  <a:defRPr kumimoji="1" sz="1200" b="1" kern="1200">
+                    <a:solidFill>
+                      <a:schemeClr val="tx1"/>
+                    </a:solidFill>
+                    <a:latin typeface="游ゴシック Medium" panose="020B0500000000000000" pitchFamily="50" charset="-128"/>
+                    <a:ea typeface="游ゴシック Medium" panose="020B0500000000000000" pitchFamily="50" charset="-128"/>
+                    <a:cs typeface="+mn-cs"/>
+                  </a:defRPr>
+                </a:lvl5pPr>
+                <a:lvl6pPr marL="1200000" indent="-171450" algn="l" defTabSz="685800" rtl="0" eaLnBrk="1" latinLnBrk="0" hangingPunct="1">
+                  <a:lnSpc>
+                    <a:spcPct val="90000"/>
+                  </a:lnSpc>
+                  <a:spcBef>
+                    <a:spcPts val="300"/>
+                  </a:spcBef>
+                  <a:spcAft>
+                    <a:spcPts val="150"/>
+                  </a:spcAft>
+                  <a:buClr>
+                    <a:schemeClr val="accent1">
+                      <a:lumMod val="75000"/>
+                    </a:schemeClr>
+                  </a:buClr>
+                  <a:buSzPct val="100000"/>
+                  <a:buFont typeface="Arial" panose="020B0604020202020204" pitchFamily="34" charset="0"/>
+                  <a:buChar char="•"/>
+                  <a:defRPr kumimoji="1" sz="1200" kern="1200">
+                    <a:solidFill>
+                      <a:schemeClr val="tx1"/>
+                    </a:solidFill>
+                    <a:latin typeface="+mn-lt"/>
+                    <a:ea typeface="+mn-ea"/>
+                    <a:cs typeface="+mn-cs"/>
+                  </a:defRPr>
+                </a:lvl6pPr>
+                <a:lvl7pPr marL="1425000" indent="-171450" algn="l" defTabSz="685800" rtl="0" eaLnBrk="1" latinLnBrk="0" hangingPunct="1">
+                  <a:lnSpc>
+                    <a:spcPct val="90000"/>
+                  </a:lnSpc>
+                  <a:spcBef>
+                    <a:spcPts val="300"/>
+                  </a:spcBef>
+                  <a:spcAft>
+                    <a:spcPts val="150"/>
+                  </a:spcAft>
+                  <a:buClr>
+                    <a:schemeClr val="accent1">
+                      <a:lumMod val="75000"/>
+                    </a:schemeClr>
+                  </a:buClr>
+                  <a:buSzPct val="100000"/>
+                  <a:buFont typeface="Arial" panose="020B0604020202020204" pitchFamily="34" charset="0"/>
+                  <a:buChar char="•"/>
+                  <a:defRPr kumimoji="1" sz="1200" kern="1200">
+                    <a:solidFill>
+                      <a:schemeClr val="tx1"/>
+                    </a:solidFill>
+                    <a:latin typeface="+mn-lt"/>
+                    <a:ea typeface="+mn-ea"/>
+                    <a:cs typeface="+mn-cs"/>
+                  </a:defRPr>
+                </a:lvl7pPr>
+                <a:lvl8pPr marL="1650000" indent="-171450" algn="l" defTabSz="685800" rtl="0" eaLnBrk="1" latinLnBrk="0" hangingPunct="1">
+                  <a:lnSpc>
+                    <a:spcPct val="90000"/>
+                  </a:lnSpc>
+                  <a:spcBef>
+                    <a:spcPts val="300"/>
+                  </a:spcBef>
+                  <a:spcAft>
+                    <a:spcPts val="150"/>
+                  </a:spcAft>
+                  <a:buClr>
+                    <a:schemeClr val="accent1">
+                      <a:lumMod val="75000"/>
+                    </a:schemeClr>
+                  </a:buClr>
+                  <a:buSzPct val="100000"/>
+                  <a:buFont typeface="Arial" panose="020B0604020202020204" pitchFamily="34" charset="0"/>
+                  <a:buChar char="•"/>
+                  <a:defRPr kumimoji="1" sz="1200" kern="1200">
+                    <a:solidFill>
+                      <a:schemeClr val="tx1"/>
+                    </a:solidFill>
+                    <a:latin typeface="+mn-lt"/>
+                    <a:ea typeface="+mn-ea"/>
+                    <a:cs typeface="+mn-cs"/>
+                  </a:defRPr>
+                </a:lvl8pPr>
+                <a:lvl9pPr marL="1875000" indent="-171450" algn="l" defTabSz="685800" rtl="0" eaLnBrk="1" latinLnBrk="0" hangingPunct="1">
+                  <a:lnSpc>
+                    <a:spcPct val="90000"/>
+                  </a:lnSpc>
+                  <a:spcBef>
+                    <a:spcPts val="300"/>
+                  </a:spcBef>
+                  <a:spcAft>
+                    <a:spcPts val="150"/>
+                  </a:spcAft>
+                  <a:buClr>
+                    <a:schemeClr val="accent1">
+                      <a:lumMod val="75000"/>
+                    </a:schemeClr>
+                  </a:buClr>
+                  <a:buSzPct val="100000"/>
+                  <a:buFont typeface="Arial" panose="020B0604020202020204" pitchFamily="34" charset="0"/>
+                  <a:buChar char="•"/>
+                  <a:defRPr kumimoji="1" sz="1200" kern="1200">
+                    <a:solidFill>
+                      <a:schemeClr val="tx1"/>
+                    </a:solidFill>
+                    <a:latin typeface="+mn-lt"/>
+                    <a:ea typeface="+mn-ea"/>
+                    <a:cs typeface="+mn-cs"/>
+                  </a:defRPr>
+                </a:lvl9pPr>
+              </a:lstStyle>
+              <a:p>
+                <a:pPr marL="0" indent="0">
+                  <a:buClr>
+                    <a:srgbClr val="9E3611"/>
+                  </a:buClr>
+                  <a:buNone/>
+                </a:pPr>
+                <a:r>
+                  <a:rPr lang="pt-BR" sz="2000" dirty="0">
+                    <a:ea typeface="游ゴシック Medium"/>
+                    <a:cs typeface="Times New Roman"/>
+                  </a:rPr>
+                  <a:t>Optimization formula:</a:t>
+                </a:r>
+              </a:p>
+              <a:p>
+                <a:pPr marL="0" indent="0">
+                  <a:buClr>
+                    <a:srgbClr val="9E3611"/>
+                  </a:buClr>
+                  <a:buNone/>
+                </a:pPr>
+                <a14:m>
+                  <m:oMath xmlns:m="http://schemas.openxmlformats.org/officeDocument/2006/math">
+                    <m:r>
+                      <a:rPr lang="pt-BR" sz="2000" b="0" i="1" dirty="0" smtClean="0">
+                        <a:latin typeface="Cambria Math" panose="02040503050406030204" pitchFamily="18" charset="0"/>
+                        <a:ea typeface="游ゴシック Medium"/>
+                        <a:cs typeface="Times New Roman"/>
+                      </a:rPr>
+                      <m:t>𝑒</m:t>
+                    </m:r>
+                    <m:r>
+                      <a:rPr lang="en-US" sz="2000" b="0" i="0" smtClean="0">
+                        <a:latin typeface="Cambria Math" panose="02040503050406030204" pitchFamily="18" charset="0"/>
+                        <a:ea typeface="游ゴシック Medium"/>
+                        <a:cs typeface="Times New Roman"/>
+                      </a:rPr>
+                      <m:t> </m:t>
+                    </m:r>
+                    <m:r>
+                      <a:rPr lang="pt-BR" sz="2000" b="0" i="1">
+                        <a:latin typeface="Cambria Math" panose="02040503050406030204" pitchFamily="18" charset="0"/>
+                        <a:ea typeface="游ゴシック Medium"/>
+                        <a:cs typeface="Times New Roman"/>
+                      </a:rPr>
+                      <m:t>=</m:t>
+                    </m:r>
+                    <m:nary>
+                      <m:naryPr>
+                        <m:chr m:val="∑"/>
+                        <m:ctrlPr>
+                          <a:rPr lang="pt-BR" sz="2000" b="0" i="1">
+                            <a:latin typeface="Cambria Math" panose="02040503050406030204" pitchFamily="18" charset="0"/>
+                            <a:ea typeface="游ゴシック Medium"/>
+                            <a:cs typeface="Times New Roman"/>
+                          </a:rPr>
+                        </m:ctrlPr>
+                      </m:naryPr>
+                      <m:sub>
+                        <m:r>
+                          <a:rPr lang="en-US" sz="2000" b="0" i="1" smtClean="0">
+                            <a:latin typeface="Cambria Math" panose="02040503050406030204" pitchFamily="18" charset="0"/>
+                            <a:ea typeface="游ゴシック Medium"/>
+                            <a:cs typeface="Times New Roman"/>
+                          </a:rPr>
+                          <m:t>𝑖</m:t>
+                        </m:r>
+                        <m:r>
+                          <a:rPr lang="en-US" sz="2000" b="0" i="1" smtClean="0">
+                            <a:latin typeface="Cambria Math" panose="02040503050406030204" pitchFamily="18" charset="0"/>
+                            <a:ea typeface="游ゴシック Medium"/>
+                            <a:cs typeface="Times New Roman"/>
+                          </a:rPr>
+                          <m:t>,</m:t>
+                        </m:r>
+                        <m:r>
+                          <a:rPr lang="en-US" sz="2000" b="0" i="1" smtClean="0">
+                            <a:latin typeface="Cambria Math" panose="02040503050406030204" pitchFamily="18" charset="0"/>
+                            <a:ea typeface="游ゴシック Medium"/>
+                            <a:cs typeface="Times New Roman"/>
+                          </a:rPr>
+                          <m:t>𝑗</m:t>
+                        </m:r>
+                        <m:r>
+                          <a:rPr lang="en-US" sz="2000" b="0" i="1" smtClean="0">
+                            <a:latin typeface="Cambria Math" panose="02040503050406030204" pitchFamily="18" charset="0"/>
+                            <a:ea typeface="游ゴシック Medium"/>
+                            <a:cs typeface="Times New Roman"/>
+                          </a:rPr>
+                          <m:t>=0</m:t>
+                        </m:r>
+                      </m:sub>
+                      <m:sup>
+                        <m:r>
+                          <a:rPr lang="pt-BR" sz="2000" b="0" i="1">
+                            <a:latin typeface="Cambria Math" panose="02040503050406030204" pitchFamily="18" charset="0"/>
+                            <a:ea typeface="游ゴシック Medium"/>
+                            <a:cs typeface="Times New Roman"/>
+                          </a:rPr>
+                          <m:t>𝑛</m:t>
+                        </m:r>
+                      </m:sup>
+                      <m:e>
+                        <m:r>
+                          <a:rPr lang="en-US" sz="2000" b="0" i="1">
+                            <a:latin typeface="Cambria Math" panose="02040503050406030204" pitchFamily="18" charset="0"/>
+                            <a:ea typeface="游ゴシック Medium"/>
+                            <a:cs typeface="Times New Roman"/>
+                          </a:rPr>
+                          <m:t>𝑙𝑜𝑔</m:t>
+                        </m:r>
+                        <m:d>
+                          <m:dPr>
+                            <m:ctrlPr>
+                              <a:rPr lang="en-US" sz="2000" b="0" i="1" smtClean="0">
+                                <a:latin typeface="Cambria Math" panose="02040503050406030204" pitchFamily="18" charset="0"/>
+                                <a:ea typeface="游ゴシック Medium"/>
+                                <a:cs typeface="Times New Roman"/>
+                              </a:rPr>
+                            </m:ctrlPr>
+                          </m:dPr>
+                          <m:e>
+                            <m:sSup>
+                              <m:sSupPr>
+                                <m:ctrlPr>
+                                  <a:rPr lang="en-US" sz="2000" b="0" i="1">
+                                    <a:latin typeface="Cambria Math" panose="02040503050406030204" pitchFamily="18" charset="0"/>
+                                    <a:ea typeface="游ゴシック Medium"/>
+                                    <a:cs typeface="Times New Roman"/>
+                                  </a:rPr>
+                                </m:ctrlPr>
+                              </m:sSupPr>
+                              <m:e>
+                                <m:r>
+                                  <a:rPr lang="en-US" sz="2000" b="0" i="1">
+                                    <a:latin typeface="Cambria Math" panose="02040503050406030204" pitchFamily="18" charset="0"/>
+                                    <a:ea typeface="游ゴシック Medium"/>
+                                    <a:cs typeface="Times New Roman"/>
+                                  </a:rPr>
+                                  <m:t>𝑇</m:t>
+                                </m:r>
+                                <m:r>
+                                  <a:rPr lang="en-US" sz="2000" b="0" i="1" baseline="-25000">
+                                    <a:latin typeface="Cambria Math" panose="02040503050406030204" pitchFamily="18" charset="0"/>
+                                    <a:ea typeface="游ゴシック Medium"/>
+                                    <a:cs typeface="Times New Roman"/>
+                                  </a:rPr>
+                                  <m:t>𝑖𝑗</m:t>
+                                </m:r>
+                              </m:e>
+                              <m:sup>
+                                <m:r>
+                                  <a:rPr lang="en-US" sz="2000" b="0" i="1">
+                                    <a:latin typeface="Cambria Math" panose="02040503050406030204" pitchFamily="18" charset="0"/>
+                                    <a:ea typeface="游ゴシック Medium"/>
+                                    <a:cs typeface="Times New Roman"/>
+                                  </a:rPr>
+                                  <m:t>−1</m:t>
+                                </m:r>
+                              </m:sup>
+                            </m:sSup>
+                            <m:r>
+                              <a:rPr lang="en-US" sz="2000" b="0" i="1">
+                                <a:latin typeface="Cambria Math" panose="02040503050406030204" pitchFamily="18" charset="0"/>
+                                <a:ea typeface="Cambria Math" panose="02040503050406030204" pitchFamily="18" charset="0"/>
+                                <a:cs typeface="Times New Roman"/>
+                              </a:rPr>
+                              <m:t>∙</m:t>
+                            </m:r>
+                            <m:d>
+                              <m:dPr>
+                                <m:ctrlPr>
+                                  <a:rPr lang="en-US" sz="2000" b="0" i="1" smtClean="0">
+                                    <a:latin typeface="Cambria Math" panose="02040503050406030204" pitchFamily="18" charset="0"/>
+                                    <a:ea typeface="Cambria Math" panose="02040503050406030204" pitchFamily="18" charset="0"/>
+                                    <a:cs typeface="Times New Roman"/>
+                                  </a:rPr>
+                                </m:ctrlPr>
+                              </m:dPr>
+                              <m:e>
+                                <m:sSup>
+                                  <m:sSupPr>
+                                    <m:ctrlPr>
+                                      <a:rPr lang="en-US" sz="2000" b="0" i="1">
+                                        <a:latin typeface="Cambria Math" panose="02040503050406030204" pitchFamily="18" charset="0"/>
+                                        <a:ea typeface="游ゴシック Medium"/>
+                                        <a:cs typeface="Times New Roman"/>
+                                      </a:rPr>
+                                    </m:ctrlPr>
+                                  </m:sSupPr>
+                                  <m:e>
+                                    <m:r>
+                                      <a:rPr lang="en-US" sz="2000" b="0" i="1">
+                                        <a:latin typeface="Cambria Math" panose="02040503050406030204" pitchFamily="18" charset="0"/>
+                                        <a:ea typeface="游ゴシック Medium"/>
+                                        <a:cs typeface="Times New Roman"/>
+                                      </a:rPr>
+                                      <m:t>𝑇</m:t>
+                                    </m:r>
+                                    <m:r>
+                                      <a:rPr lang="en-US" sz="2000" b="0" i="1" baseline="-25000">
+                                        <a:latin typeface="Cambria Math" panose="02040503050406030204" pitchFamily="18" charset="0"/>
+                                        <a:ea typeface="游ゴシック Medium"/>
+                                        <a:cs typeface="Times New Roman"/>
+                                      </a:rPr>
+                                      <m:t>𝑖</m:t>
+                                    </m:r>
+                                  </m:e>
+                                  <m:sup>
+                                    <m:r>
+                                      <a:rPr lang="en-US" sz="2000" b="0" i="1">
+                                        <a:latin typeface="Cambria Math" panose="02040503050406030204" pitchFamily="18" charset="0"/>
+                                        <a:ea typeface="游ゴシック Medium"/>
+                                        <a:cs typeface="Times New Roman"/>
+                                      </a:rPr>
+                                      <m:t>−1</m:t>
+                                    </m:r>
+                                  </m:sup>
+                                </m:sSup>
+                                <m:r>
+                                  <a:rPr lang="en-US" sz="2000" b="0" i="1">
+                                    <a:latin typeface="Cambria Math" panose="02040503050406030204" pitchFamily="18" charset="0"/>
+                                    <a:ea typeface="Cambria Math" panose="02040503050406030204" pitchFamily="18" charset="0"/>
+                                    <a:cs typeface="Times New Roman"/>
+                                  </a:rPr>
+                                  <m:t>∙</m:t>
+                                </m:r>
+                                <m:sSub>
+                                  <m:sSubPr>
+                                    <m:ctrlPr>
+                                      <a:rPr lang="en-US" sz="2000" b="0" i="1" smtClean="0">
+                                        <a:latin typeface="Cambria Math" panose="02040503050406030204" pitchFamily="18" charset="0"/>
+                                        <a:ea typeface="Cambria Math" panose="02040503050406030204" pitchFamily="18" charset="0"/>
+                                        <a:cs typeface="Times New Roman"/>
+                                      </a:rPr>
+                                    </m:ctrlPr>
+                                  </m:sSubPr>
+                                  <m:e>
+                                    <m:r>
+                                      <a:rPr lang="en-US" sz="2000" b="0" i="1" smtClean="0">
+                                        <a:latin typeface="Cambria Math" panose="02040503050406030204" pitchFamily="18" charset="0"/>
+                                        <a:ea typeface="Cambria Math" panose="02040503050406030204" pitchFamily="18" charset="0"/>
+                                        <a:cs typeface="Times New Roman"/>
+                                      </a:rPr>
+                                      <m:t>𝑇</m:t>
+                                    </m:r>
+                                  </m:e>
+                                  <m:sub>
+                                    <m:r>
+                                      <a:rPr lang="en-US" sz="2000" b="0" i="1" smtClean="0">
+                                        <a:latin typeface="Cambria Math" panose="02040503050406030204" pitchFamily="18" charset="0"/>
+                                        <a:ea typeface="Cambria Math" panose="02040503050406030204" pitchFamily="18" charset="0"/>
+                                        <a:cs typeface="Times New Roman"/>
+                                      </a:rPr>
+                                      <m:t>𝑗</m:t>
+                                    </m:r>
+                                  </m:sub>
+                                </m:sSub>
+                              </m:e>
+                            </m:d>
+                          </m:e>
+                        </m:d>
+                      </m:e>
+                    </m:nary>
+                  </m:oMath>
+                </a14:m>
+                <a:r>
+                  <a:rPr lang="en-US" sz="2000" b="0" dirty="0"/>
+                  <a:t> (no weights for simplicity)</a:t>
+                </a:r>
+              </a:p>
+              <a:p>
+                <a:pPr marL="0" indent="0">
+                  <a:buClr>
+                    <a:srgbClr val="9E3611"/>
+                  </a:buClr>
+                  <a:buNone/>
+                </a:pPr>
+                <a:endParaRPr lang="en-US" sz="2000" b="0" dirty="0"/>
+              </a:p>
+              <a:p>
+                <a:pPr marL="0" indent="0">
+                  <a:buClr>
+                    <a:srgbClr val="9E3611"/>
+                  </a:buClr>
+                  <a:buNone/>
+                </a:pPr>
+                <a:r>
+                  <a:rPr lang="en-US" sz="2000" dirty="0">
+                    <a:solidFill>
+                      <a:schemeClr val="accent1"/>
+                    </a:solidFill>
+                  </a:rPr>
+                  <a:t>➔ </a:t>
+                </a:r>
+                <a14:m>
+                  <m:oMath xmlns:m="http://schemas.openxmlformats.org/officeDocument/2006/math">
+                    <m:r>
+                      <a:rPr lang="pt-BR" sz="2000" b="0" i="1" dirty="0">
+                        <a:latin typeface="Cambria Math" panose="02040503050406030204" pitchFamily="18" charset="0"/>
+                        <a:ea typeface="游ゴシック Medium"/>
+                        <a:cs typeface="Times New Roman"/>
+                      </a:rPr>
+                      <m:t>𝑒</m:t>
+                    </m:r>
+                    <m:r>
+                      <a:rPr lang="pt-BR" sz="2000" b="0" i="1" dirty="0">
+                        <a:latin typeface="Cambria Math" panose="02040503050406030204" pitchFamily="18" charset="0"/>
+                        <a:ea typeface="游ゴシック Medium"/>
+                        <a:cs typeface="Times New Roman"/>
+                      </a:rPr>
+                      <m:t>(</m:t>
+                    </m:r>
+                    <m:r>
+                      <a:rPr lang="pt-BR" sz="2000" b="0" i="1" dirty="0">
+                        <a:latin typeface="Cambria Math" panose="02040503050406030204" pitchFamily="18" charset="0"/>
+                        <a:ea typeface="游ゴシック Medium"/>
+                        <a:cs typeface="Times New Roman"/>
+                      </a:rPr>
+                      <m:t>𝑥</m:t>
+                    </m:r>
+                    <m:r>
+                      <a:rPr lang="pt-BR" sz="2000" b="0" i="1" dirty="0">
+                        <a:latin typeface="Cambria Math" panose="02040503050406030204" pitchFamily="18" charset="0"/>
+                        <a:ea typeface="游ゴシック Medium"/>
+                        <a:cs typeface="Times New Roman"/>
+                      </a:rPr>
+                      <m:t>)</m:t>
+                    </m:r>
+                    <m:r>
+                      <a:rPr lang="en-US" sz="2000" b="0">
+                        <a:latin typeface="Cambria Math" panose="02040503050406030204" pitchFamily="18" charset="0"/>
+                        <a:ea typeface="游ゴシック Medium"/>
+                        <a:cs typeface="Times New Roman"/>
+                      </a:rPr>
+                      <m:t> </m:t>
+                    </m:r>
+                    <m:r>
+                      <a:rPr lang="pt-BR" sz="2000" b="0" i="1">
+                        <a:latin typeface="Cambria Math" panose="02040503050406030204" pitchFamily="18" charset="0"/>
+                        <a:ea typeface="游ゴシック Medium"/>
+                        <a:cs typeface="Times New Roman"/>
+                      </a:rPr>
+                      <m:t>=</m:t>
+                    </m:r>
+                  </m:oMath>
+                </a14:m>
+                <a:r>
+                  <a:rPr lang="en-US" sz="2000" b="0" dirty="0"/>
+                  <a:t> </a:t>
+                </a:r>
+                <a14:m>
+                  <m:oMath xmlns:m="http://schemas.openxmlformats.org/officeDocument/2006/math">
+                    <m:d>
+                      <m:dPr>
+                        <m:begChr m:val="‖"/>
+                        <m:endChr m:val="‖"/>
+                        <m:ctrlPr>
+                          <a:rPr lang="en-US" sz="2000" b="0" i="1" dirty="0" smtClean="0">
+                            <a:latin typeface="Cambria Math" panose="02040503050406030204" pitchFamily="18" charset="0"/>
+                          </a:rPr>
+                        </m:ctrlPr>
+                      </m:dPr>
+                      <m:e>
+                        <m:r>
+                          <a:rPr lang="en-US" sz="2000" b="0" i="1" dirty="0" smtClean="0">
+                            <a:latin typeface="Cambria Math" panose="02040503050406030204" pitchFamily="18" charset="0"/>
+                          </a:rPr>
+                          <m:t>𝑟</m:t>
+                        </m:r>
+                        <m:r>
+                          <a:rPr lang="en-US" sz="2000" b="0" i="1" dirty="0" smtClean="0">
+                            <a:latin typeface="Cambria Math" panose="02040503050406030204" pitchFamily="18" charset="0"/>
+                          </a:rPr>
+                          <m:t>(</m:t>
+                        </m:r>
+                        <m:r>
+                          <a:rPr lang="en-US" sz="2000" b="0" i="1" dirty="0" smtClean="0">
+                            <a:latin typeface="Cambria Math" panose="02040503050406030204" pitchFamily="18" charset="0"/>
+                          </a:rPr>
+                          <m:t>𝑥</m:t>
+                        </m:r>
+                        <m:r>
+                          <a:rPr lang="en-US" sz="2000" b="0" i="1" dirty="0" smtClean="0">
+                            <a:latin typeface="Cambria Math" panose="02040503050406030204" pitchFamily="18" charset="0"/>
+                          </a:rPr>
+                          <m:t>)</m:t>
+                        </m:r>
+                      </m:e>
+                    </m:d>
+                    <m:r>
+                      <a:rPr lang="en-US" sz="2000" b="0" i="1" baseline="30000" dirty="0" smtClean="0">
+                        <a:latin typeface="Cambria Math" panose="02040503050406030204" pitchFamily="18" charset="0"/>
+                      </a:rPr>
+                      <m:t>2</m:t>
+                    </m:r>
+                  </m:oMath>
+                </a14:m>
+                <a:r>
+                  <a:rPr lang="en-US" sz="2000" b="0" dirty="0"/>
+                  <a:t>, </a:t>
+                </a:r>
+                <a14:m>
+                  <m:oMath xmlns:m="http://schemas.openxmlformats.org/officeDocument/2006/math">
+                    <m:r>
+                      <a:rPr lang="en-US" sz="2000" b="0" i="1" dirty="0">
+                        <a:latin typeface="Cambria Math" panose="02040503050406030204" pitchFamily="18" charset="0"/>
+                      </a:rPr>
+                      <m:t>𝑥</m:t>
+                    </m:r>
+                  </m:oMath>
+                </a14:m>
+                <a:r>
+                  <a:rPr lang="en-US" sz="2000" b="0" dirty="0"/>
+                  <a:t> </a:t>
+                </a:r>
+                <a14:m>
+                  <m:oMath xmlns:m="http://schemas.openxmlformats.org/officeDocument/2006/math">
+                    <m:r>
+                      <a:rPr lang="en-US" sz="2000" b="0" i="1" dirty="0">
+                        <a:latin typeface="Cambria Math" panose="02040503050406030204" pitchFamily="18" charset="0"/>
+                      </a:rPr>
+                      <m:t>≙</m:t>
+                    </m:r>
+                  </m:oMath>
+                </a14:m>
+                <a:r>
+                  <a:rPr lang="en-US" sz="2000" b="0" dirty="0"/>
+                  <a:t> set of variables </a:t>
+                </a:r>
+                <a:r>
+                  <a:rPr lang="en-US" sz="2000" b="0"/>
+                  <a:t>to optimize</a:t>
+                </a:r>
+                <a:endParaRPr lang="en-US" sz="2000" b="0" dirty="0"/>
+              </a:p>
+              <a:p>
+                <a:pPr marL="0" indent="0">
+                  <a:buClr>
+                    <a:srgbClr val="9E3611"/>
+                  </a:buClr>
+                  <a:buNone/>
+                </a:pPr>
+                <a:r>
+                  <a:rPr lang="en-US" sz="2000" dirty="0">
+                    <a:solidFill>
+                      <a:schemeClr val="accent1"/>
+                    </a:solidFill>
+                  </a:rPr>
+                  <a:t>➔ </a:t>
+                </a:r>
+                <a14:m>
+                  <m:oMath xmlns:m="http://schemas.openxmlformats.org/officeDocument/2006/math">
+                    <m:r>
+                      <a:rPr lang="en-US" sz="2000" b="0" i="1" smtClean="0">
+                        <a:solidFill>
+                          <a:schemeClr val="tx1"/>
+                        </a:solidFill>
+                        <a:latin typeface="Cambria Math" panose="02040503050406030204" pitchFamily="18" charset="0"/>
+                      </a:rPr>
+                      <m:t>𝑟</m:t>
+                    </m:r>
+                    <m:d>
+                      <m:dPr>
+                        <m:ctrlPr>
+                          <a:rPr lang="en-US" sz="2000" b="0" i="1">
+                            <a:latin typeface="Cambria Math" panose="02040503050406030204" pitchFamily="18" charset="0"/>
+                          </a:rPr>
+                        </m:ctrlPr>
+                      </m:dPr>
+                      <m:e>
+                        <m:r>
+                          <a:rPr lang="en-US" sz="2000" b="0" i="1">
+                            <a:latin typeface="Cambria Math" panose="02040503050406030204" pitchFamily="18" charset="0"/>
+                          </a:rPr>
+                          <m:t>𝑥</m:t>
+                        </m:r>
+                        <m:r>
+                          <a:rPr lang="en-US" sz="2000" b="0" i="1">
+                            <a:latin typeface="Cambria Math" panose="02040503050406030204" pitchFamily="18" charset="0"/>
+                          </a:rPr>
+                          <m:t>+∆</m:t>
+                        </m:r>
+                        <m:r>
+                          <a:rPr lang="en-US" sz="2000" b="0" i="1">
+                            <a:latin typeface="Cambria Math" panose="02040503050406030204" pitchFamily="18" charset="0"/>
+                            <a:ea typeface="Cambria Math" panose="02040503050406030204" pitchFamily="18" charset="0"/>
+                          </a:rPr>
+                          <m:t>𝑥</m:t>
+                        </m:r>
+                      </m:e>
+                    </m:d>
+                    <m:r>
+                      <a:rPr lang="en-US" sz="2000" b="0" i="1" smtClean="0">
+                        <a:latin typeface="Cambria Math" panose="02040503050406030204" pitchFamily="18" charset="0"/>
+                        <a:ea typeface="Cambria Math" panose="02040503050406030204" pitchFamily="18" charset="0"/>
+                      </a:rPr>
+                      <m:t>≈</m:t>
+                    </m:r>
+                    <m:r>
+                      <a:rPr lang="en-US" sz="2000" b="0" i="1" smtClean="0">
+                        <a:solidFill>
+                          <a:schemeClr val="tx1"/>
+                        </a:solidFill>
+                        <a:latin typeface="Cambria Math" panose="02040503050406030204" pitchFamily="18" charset="0"/>
+                        <a:ea typeface="Cambria Math" panose="02040503050406030204" pitchFamily="18" charset="0"/>
+                      </a:rPr>
+                      <m:t>𝑟</m:t>
+                    </m:r>
+                    <m:d>
+                      <m:dPr>
+                        <m:ctrlPr>
+                          <a:rPr lang="en-US" sz="2000" b="0" i="1" smtClean="0">
+                            <a:solidFill>
+                              <a:schemeClr val="tx1"/>
+                            </a:solidFill>
+                            <a:latin typeface="Cambria Math" panose="02040503050406030204" pitchFamily="18" charset="0"/>
+                            <a:ea typeface="Cambria Math" panose="02040503050406030204" pitchFamily="18" charset="0"/>
+                          </a:rPr>
+                        </m:ctrlPr>
+                      </m:dPr>
+                      <m:e>
+                        <m:r>
+                          <a:rPr lang="en-US" sz="2000" b="0" i="1" smtClean="0">
+                            <a:solidFill>
+                              <a:schemeClr val="tx1"/>
+                            </a:solidFill>
+                            <a:latin typeface="Cambria Math" panose="02040503050406030204" pitchFamily="18" charset="0"/>
+                            <a:ea typeface="Cambria Math" panose="02040503050406030204" pitchFamily="18" charset="0"/>
+                          </a:rPr>
+                          <m:t>𝑥</m:t>
+                        </m:r>
+                      </m:e>
+                    </m:d>
+                    <m:r>
+                      <a:rPr lang="en-US" sz="2000" b="0" i="1" smtClean="0">
+                        <a:solidFill>
+                          <a:schemeClr val="tx1"/>
+                        </a:solidFill>
+                        <a:latin typeface="Cambria Math" panose="02040503050406030204" pitchFamily="18" charset="0"/>
+                        <a:ea typeface="Cambria Math" panose="02040503050406030204" pitchFamily="18" charset="0"/>
+                      </a:rPr>
+                      <m:t>+</m:t>
+                    </m:r>
+                    <m:r>
+                      <a:rPr lang="en-US" sz="2000" b="0" i="1" smtClean="0">
+                        <a:solidFill>
+                          <a:schemeClr val="tx1"/>
+                        </a:solidFill>
+                        <a:latin typeface="Cambria Math" panose="02040503050406030204" pitchFamily="18" charset="0"/>
+                        <a:ea typeface="Cambria Math" panose="02040503050406030204" pitchFamily="18" charset="0"/>
+                      </a:rPr>
+                      <m:t>𝐽</m:t>
+                    </m:r>
+                    <m:r>
+                      <a:rPr lang="en-US" sz="2000" b="0" i="1" smtClean="0">
+                        <a:solidFill>
+                          <a:schemeClr val="tx1"/>
+                        </a:solidFill>
+                        <a:latin typeface="Cambria Math" panose="02040503050406030204" pitchFamily="18" charset="0"/>
+                        <a:ea typeface="Cambria Math" panose="02040503050406030204" pitchFamily="18" charset="0"/>
+                      </a:rPr>
+                      <m:t>∆</m:t>
+                    </m:r>
+                    <m:r>
+                      <a:rPr lang="en-US" sz="2000" b="0" i="1" smtClean="0">
+                        <a:solidFill>
+                          <a:schemeClr val="tx1"/>
+                        </a:solidFill>
+                        <a:latin typeface="Cambria Math" panose="02040503050406030204" pitchFamily="18" charset="0"/>
+                        <a:ea typeface="Cambria Math" panose="02040503050406030204" pitchFamily="18" charset="0"/>
+                      </a:rPr>
+                      <m:t>𝑥</m:t>
+                    </m:r>
+                  </m:oMath>
+                </a14:m>
+                <a:r>
+                  <a:rPr lang="en-US" sz="2000" b="0" i="1" dirty="0"/>
+                  <a:t>  </a:t>
+                </a:r>
+                <a:r>
+                  <a:rPr lang="en-US" sz="2000" b="0" dirty="0"/>
+                  <a:t>, Jacobi matrix </a:t>
+                </a:r>
+                <a14:m>
+                  <m:oMath xmlns:m="http://schemas.openxmlformats.org/officeDocument/2006/math">
+                    <m:r>
+                      <a:rPr lang="en-US" sz="2000" b="0" i="1" smtClean="0">
+                        <a:latin typeface="Cambria Math" panose="02040503050406030204" pitchFamily="18" charset="0"/>
+                      </a:rPr>
+                      <m:t>𝐽</m:t>
+                    </m:r>
+                    <m:r>
+                      <a:rPr lang="en-US" sz="2000" b="0" i="1" smtClean="0">
+                        <a:latin typeface="Cambria Math" panose="02040503050406030204" pitchFamily="18" charset="0"/>
+                        <a:ea typeface="Cambria Math" panose="02040503050406030204" pitchFamily="18" charset="0"/>
+                      </a:rPr>
+                      <m:t>=</m:t>
+                    </m:r>
+                    <m:f>
+                      <m:fPr>
+                        <m:ctrlPr>
+                          <a:rPr lang="en-US" sz="2000" b="0" i="1" smtClean="0">
+                            <a:latin typeface="Cambria Math" panose="02040503050406030204" pitchFamily="18" charset="0"/>
+                            <a:ea typeface="Cambria Math" panose="02040503050406030204" pitchFamily="18" charset="0"/>
+                          </a:rPr>
+                        </m:ctrlPr>
+                      </m:fPr>
+                      <m:num>
+                        <m:r>
+                          <a:rPr lang="en-US" sz="2000" b="0" i="1" smtClean="0">
+                            <a:latin typeface="Cambria Math" panose="02040503050406030204" pitchFamily="18" charset="0"/>
+                            <a:ea typeface="Cambria Math" panose="02040503050406030204" pitchFamily="18" charset="0"/>
+                          </a:rPr>
+                          <m:t>𝜕</m:t>
+                        </m:r>
+                        <m:r>
+                          <a:rPr lang="en-US" sz="2000" b="0" i="1" smtClean="0">
+                            <a:latin typeface="Cambria Math" panose="02040503050406030204" pitchFamily="18" charset="0"/>
+                            <a:ea typeface="Cambria Math" panose="02040503050406030204" pitchFamily="18" charset="0"/>
+                          </a:rPr>
+                          <m:t>𝑟</m:t>
+                        </m:r>
+                      </m:num>
+                      <m:den>
+                        <m:r>
+                          <a:rPr lang="en-US" sz="2000" b="0" i="1" smtClean="0">
+                            <a:latin typeface="Cambria Math" panose="02040503050406030204" pitchFamily="18" charset="0"/>
+                            <a:ea typeface="Cambria Math" panose="02040503050406030204" pitchFamily="18" charset="0"/>
+                          </a:rPr>
+                          <m:t>𝜕</m:t>
+                        </m:r>
+                        <m:r>
+                          <a:rPr lang="en-US" sz="2000" b="0" i="1" smtClean="0">
+                            <a:latin typeface="Cambria Math" panose="02040503050406030204" pitchFamily="18" charset="0"/>
+                            <a:ea typeface="Cambria Math" panose="02040503050406030204" pitchFamily="18" charset="0"/>
+                          </a:rPr>
+                          <m:t>𝑥</m:t>
+                        </m:r>
+                      </m:den>
+                    </m:f>
+                  </m:oMath>
+                </a14:m>
+                <a:r>
+                  <a:rPr lang="en-US" sz="2000" b="0" i="1" dirty="0"/>
+                  <a:t>, </a:t>
+                </a:r>
+                <a14:m>
+                  <m:oMath xmlns:m="http://schemas.openxmlformats.org/officeDocument/2006/math">
+                    <m:r>
+                      <a:rPr lang="en-US" sz="2000" b="0" i="1" smtClean="0">
+                        <a:latin typeface="Cambria Math" panose="02040503050406030204" pitchFamily="18" charset="0"/>
+                      </a:rPr>
+                      <m:t>𝑟</m:t>
+                    </m:r>
+                    <m:r>
+                      <a:rPr lang="en-US" sz="2000" b="0" i="1" smtClean="0">
+                        <a:latin typeface="Cambria Math" panose="02040503050406030204" pitchFamily="18" charset="0"/>
+                        <a:ea typeface="Cambria Math" panose="02040503050406030204" pitchFamily="18" charset="0"/>
+                      </a:rPr>
+                      <m:t>= </m:t>
+                    </m:r>
+                    <m:d>
+                      <m:dPr>
+                        <m:ctrlPr>
+                          <a:rPr lang="en-US" sz="2000" b="0" i="1" smtClean="0">
+                            <a:latin typeface="Cambria Math" panose="02040503050406030204" pitchFamily="18" charset="0"/>
+                            <a:ea typeface="Cambria Math" panose="02040503050406030204" pitchFamily="18" charset="0"/>
+                          </a:rPr>
+                        </m:ctrlPr>
+                      </m:dPr>
+                      <m:e>
+                        <m:m>
+                          <m:mPr>
+                            <m:mcs>
+                              <m:mc>
+                                <m:mcPr>
+                                  <m:count m:val="1"/>
+                                  <m:mcJc m:val="center"/>
+                                </m:mcPr>
+                              </m:mc>
+                            </m:mcs>
+                            <m:ctrlPr>
+                              <a:rPr lang="en-US" sz="2000" b="0" i="1" smtClean="0">
+                                <a:latin typeface="Cambria Math" panose="02040503050406030204" pitchFamily="18" charset="0"/>
+                                <a:ea typeface="Cambria Math" panose="02040503050406030204" pitchFamily="18" charset="0"/>
+                              </a:rPr>
+                            </m:ctrlPr>
+                          </m:mPr>
+                          <m:mr>
+                            <m:e>
+                              <m:sSub>
+                                <m:sSubPr>
+                                  <m:ctrlPr>
+                                    <a:rPr lang="en-US" sz="2000" b="0" i="1" smtClean="0">
+                                      <a:latin typeface="Cambria Math" panose="02040503050406030204" pitchFamily="18" charset="0"/>
+                                      <a:ea typeface="Cambria Math" panose="02040503050406030204" pitchFamily="18" charset="0"/>
+                                    </a:rPr>
+                                  </m:ctrlPr>
+                                </m:sSubPr>
+                                <m:e>
+                                  <m:r>
+                                    <a:rPr lang="en-US" sz="2000" b="0" i="1" smtClean="0">
+                                      <a:latin typeface="Cambria Math" panose="02040503050406030204" pitchFamily="18" charset="0"/>
+                                      <a:ea typeface="Cambria Math" panose="02040503050406030204" pitchFamily="18" charset="0"/>
+                                    </a:rPr>
+                                    <m:t>𝑟</m:t>
+                                  </m:r>
+                                </m:e>
+                                <m:sub>
+                                  <m:r>
+                                    <a:rPr lang="en-US" sz="2000" b="0" i="1" smtClean="0">
+                                      <a:latin typeface="Cambria Math" panose="02040503050406030204" pitchFamily="18" charset="0"/>
+                                      <a:ea typeface="Cambria Math" panose="02040503050406030204" pitchFamily="18" charset="0"/>
+                                    </a:rPr>
+                                    <m:t>0</m:t>
+                                  </m:r>
+                                </m:sub>
+                              </m:sSub>
+                            </m:e>
+                          </m:mr>
+                          <m:mr>
+                            <m:e>
+                              <m:r>
+                                <a:rPr lang="en-US" sz="2000" b="0" i="1" smtClean="0">
+                                  <a:latin typeface="Cambria Math" panose="02040503050406030204" pitchFamily="18" charset="0"/>
+                                  <a:ea typeface="Cambria Math" panose="02040503050406030204" pitchFamily="18" charset="0"/>
+                                </a:rPr>
+                                <m:t>⋮</m:t>
+                              </m:r>
+                            </m:e>
+                          </m:mr>
+                          <m:mr>
+                            <m:e>
+                              <m:sSub>
+                                <m:sSubPr>
+                                  <m:ctrlPr>
+                                    <a:rPr lang="en-US" sz="2000" b="0" i="1" smtClean="0">
+                                      <a:latin typeface="Cambria Math" panose="02040503050406030204" pitchFamily="18" charset="0"/>
+                                      <a:ea typeface="Cambria Math" panose="02040503050406030204" pitchFamily="18" charset="0"/>
+                                    </a:rPr>
+                                  </m:ctrlPr>
+                                </m:sSubPr>
+                                <m:e>
+                                  <m:r>
+                                    <a:rPr lang="en-US" sz="2000" b="0" i="1" smtClean="0">
+                                      <a:latin typeface="Cambria Math" panose="02040503050406030204" pitchFamily="18" charset="0"/>
+                                      <a:ea typeface="Cambria Math" panose="02040503050406030204" pitchFamily="18" charset="0"/>
+                                    </a:rPr>
+                                    <m:t>𝑟</m:t>
+                                  </m:r>
+                                </m:e>
+                                <m:sub>
+                                  <m:r>
+                                    <a:rPr lang="en-US" sz="2000" b="0" i="1" smtClean="0">
+                                      <a:latin typeface="Cambria Math" panose="02040503050406030204" pitchFamily="18" charset="0"/>
+                                      <a:ea typeface="Cambria Math" panose="02040503050406030204" pitchFamily="18" charset="0"/>
+                                    </a:rPr>
+                                    <m:t>𝑘</m:t>
+                                  </m:r>
+                                </m:sub>
+                              </m:sSub>
+                            </m:e>
+                          </m:mr>
+                        </m:m>
+                      </m:e>
+                    </m:d>
+                  </m:oMath>
+                </a14:m>
+                <a:endParaRPr lang="en-US" sz="2000" b="0" i="1" dirty="0"/>
+              </a:p>
+              <a:p>
+                <a:pPr marL="0" indent="0">
+                  <a:buClr>
+                    <a:srgbClr val="9E3611"/>
+                  </a:buClr>
+                  <a:buNone/>
+                </a:pPr>
+                <a:r>
+                  <a:rPr lang="en-US" sz="2000" dirty="0">
+                    <a:solidFill>
+                      <a:schemeClr val="accent1"/>
+                    </a:solidFill>
+                  </a:rPr>
+                  <a:t>➔ </a:t>
+                </a:r>
+                <a:r>
+                  <a:rPr lang="en-US" sz="2000" b="0" dirty="0"/>
+                  <a:t>Linear optimization problem</a:t>
+                </a:r>
+                <a:endParaRPr lang="en-US" sz="2000" b="0" i="1" dirty="0"/>
+              </a:p>
+              <a:p>
+                <a:pPr marL="0" indent="0">
+                  <a:buClr>
+                    <a:srgbClr val="9E3611"/>
+                  </a:buClr>
+                  <a:buNone/>
+                </a:pPr>
+                <a:r>
+                  <a:rPr lang="en-US" sz="2000" dirty="0">
+                    <a:solidFill>
+                      <a:schemeClr val="accent1"/>
+                    </a:solidFill>
+                  </a:rPr>
+                  <a:t>➔ </a:t>
+                </a:r>
+                <a14:m>
+                  <m:oMath xmlns:m="http://schemas.openxmlformats.org/officeDocument/2006/math">
+                    <m:sSup>
+                      <m:sSupPr>
+                        <m:ctrlPr>
+                          <a:rPr lang="en-US" sz="2000" b="0" i="1" smtClean="0">
+                            <a:solidFill>
+                              <a:schemeClr val="tx1"/>
+                            </a:solidFill>
+                            <a:latin typeface="Cambria Math" panose="02040503050406030204" pitchFamily="18" charset="0"/>
+                          </a:rPr>
+                        </m:ctrlPr>
+                      </m:sSupPr>
+                      <m:e>
+                        <m:r>
+                          <a:rPr lang="en-US" sz="2000" b="0" i="1" smtClean="0">
+                            <a:solidFill>
+                              <a:schemeClr val="tx1"/>
+                            </a:solidFill>
+                            <a:latin typeface="Cambria Math" panose="02040503050406030204" pitchFamily="18" charset="0"/>
+                          </a:rPr>
+                          <m:t>𝐽</m:t>
+                        </m:r>
+                      </m:e>
+                      <m:sup>
+                        <m:r>
+                          <a:rPr lang="en-US" sz="2000" b="0" i="1" smtClean="0">
+                            <a:solidFill>
+                              <a:schemeClr val="tx1"/>
+                            </a:solidFill>
+                            <a:latin typeface="Cambria Math" panose="02040503050406030204" pitchFamily="18" charset="0"/>
+                          </a:rPr>
+                          <m:t>𝑇</m:t>
+                        </m:r>
+                      </m:sup>
+                    </m:sSup>
+                    <m:r>
+                      <a:rPr lang="en-US" sz="2000" b="0" i="1" smtClean="0">
+                        <a:solidFill>
+                          <a:schemeClr val="tx1"/>
+                        </a:solidFill>
+                        <a:latin typeface="Cambria Math" panose="02040503050406030204" pitchFamily="18" charset="0"/>
+                      </a:rPr>
+                      <m:t>𝐽</m:t>
+                    </m:r>
+                    <m:r>
+                      <a:rPr lang="en-US" sz="2000" b="0" i="1" smtClean="0">
+                        <a:solidFill>
+                          <a:schemeClr val="tx1"/>
+                        </a:solidFill>
+                        <a:latin typeface="Cambria Math" panose="02040503050406030204" pitchFamily="18" charset="0"/>
+                        <a:ea typeface="Cambria Math" panose="02040503050406030204" pitchFamily="18" charset="0"/>
+                      </a:rPr>
+                      <m:t>∆</m:t>
+                    </m:r>
+                    <m:r>
+                      <a:rPr lang="en-US" sz="2000" b="0" i="1" smtClean="0">
+                        <a:solidFill>
+                          <a:schemeClr val="tx1"/>
+                        </a:solidFill>
+                        <a:latin typeface="Cambria Math" panose="02040503050406030204" pitchFamily="18" charset="0"/>
+                        <a:ea typeface="Cambria Math" panose="02040503050406030204" pitchFamily="18" charset="0"/>
+                      </a:rPr>
+                      <m:t>𝑥</m:t>
+                    </m:r>
+                    <m:r>
+                      <a:rPr lang="en-US" sz="2000" b="0" i="1" smtClean="0">
+                        <a:solidFill>
+                          <a:schemeClr val="tx1"/>
+                        </a:solidFill>
+                        <a:latin typeface="Cambria Math" panose="02040503050406030204" pitchFamily="18" charset="0"/>
+                        <a:ea typeface="Cambria Math" panose="02040503050406030204" pitchFamily="18" charset="0"/>
+                      </a:rPr>
+                      <m:t>=−</m:t>
+                    </m:r>
+                    <m:sSup>
+                      <m:sSupPr>
+                        <m:ctrlPr>
+                          <a:rPr lang="en-US" sz="2000" b="0" i="1" smtClean="0">
+                            <a:solidFill>
+                              <a:schemeClr val="tx1"/>
+                            </a:solidFill>
+                            <a:latin typeface="Cambria Math" panose="02040503050406030204" pitchFamily="18" charset="0"/>
+                            <a:ea typeface="Cambria Math" panose="02040503050406030204" pitchFamily="18" charset="0"/>
+                          </a:rPr>
+                        </m:ctrlPr>
+                      </m:sSupPr>
+                      <m:e>
+                        <m:r>
+                          <a:rPr lang="en-US" sz="2000" b="0" i="1" smtClean="0">
+                            <a:solidFill>
+                              <a:schemeClr val="tx1"/>
+                            </a:solidFill>
+                            <a:latin typeface="Cambria Math" panose="02040503050406030204" pitchFamily="18" charset="0"/>
+                            <a:ea typeface="Cambria Math" panose="02040503050406030204" pitchFamily="18" charset="0"/>
+                          </a:rPr>
+                          <m:t>𝐽</m:t>
+                        </m:r>
+                      </m:e>
+                      <m:sup>
+                        <m:r>
+                          <a:rPr lang="en-US" sz="2000" b="0" i="1" smtClean="0">
+                            <a:solidFill>
+                              <a:schemeClr val="tx1"/>
+                            </a:solidFill>
+                            <a:latin typeface="Cambria Math" panose="02040503050406030204" pitchFamily="18" charset="0"/>
+                            <a:ea typeface="Cambria Math" panose="02040503050406030204" pitchFamily="18" charset="0"/>
+                          </a:rPr>
+                          <m:t>𝑇</m:t>
+                        </m:r>
+                      </m:sup>
+                    </m:sSup>
+                    <m:r>
+                      <a:rPr lang="en-US" sz="2000" b="0" i="1" smtClean="0">
+                        <a:solidFill>
+                          <a:schemeClr val="tx1"/>
+                        </a:solidFill>
+                        <a:latin typeface="Cambria Math" panose="02040503050406030204" pitchFamily="18" charset="0"/>
+                        <a:ea typeface="Cambria Math" panose="02040503050406030204" pitchFamily="18" charset="0"/>
+                      </a:rPr>
+                      <m:t>𝑟</m:t>
+                    </m:r>
+                  </m:oMath>
+                </a14:m>
+                <a:r>
+                  <a:rPr lang="en-US" sz="2000" b="0" dirty="0">
+                    <a:solidFill>
+                      <a:schemeClr val="tx1"/>
+                    </a:solidFill>
+                    <a:ea typeface="Cambria Math" panose="02040503050406030204" pitchFamily="18" charset="0"/>
+                  </a:rPr>
+                  <a:t>  , compute </a:t>
+                </a:r>
+                <a14:m>
+                  <m:oMath xmlns:m="http://schemas.openxmlformats.org/officeDocument/2006/math">
+                    <m:r>
+                      <a:rPr lang="en-US" sz="2000" b="0" i="1" smtClean="0">
+                        <a:solidFill>
+                          <a:schemeClr val="tx1"/>
+                        </a:solidFill>
+                        <a:latin typeface="Cambria Math" panose="02040503050406030204" pitchFamily="18" charset="0"/>
+                        <a:ea typeface="Cambria Math" panose="02040503050406030204" pitchFamily="18" charset="0"/>
+                      </a:rPr>
+                      <m:t>∆</m:t>
+                    </m:r>
+                    <m:r>
+                      <a:rPr lang="en-US" sz="2000" b="0" i="1" smtClean="0">
+                        <a:solidFill>
+                          <a:schemeClr val="tx1"/>
+                        </a:solidFill>
+                        <a:latin typeface="Cambria Math" panose="02040503050406030204" pitchFamily="18" charset="0"/>
+                        <a:ea typeface="Cambria Math" panose="02040503050406030204" pitchFamily="18" charset="0"/>
+                      </a:rPr>
+                      <m:t>𝑥</m:t>
+                    </m:r>
+                  </m:oMath>
+                </a14:m>
+                <a:r>
+                  <a:rPr lang="en-US" sz="2000" b="0" dirty="0">
+                    <a:solidFill>
+                      <a:schemeClr val="tx1"/>
+                    </a:solidFill>
+                    <a:ea typeface="Cambria Math" panose="02040503050406030204" pitchFamily="18" charset="0"/>
+                  </a:rPr>
+                  <a:t> for minimum </a:t>
+                </a:r>
+                <a14:m>
+                  <m:oMath xmlns:m="http://schemas.openxmlformats.org/officeDocument/2006/math">
+                    <m:r>
+                      <a:rPr lang="en-US" sz="2000" b="0" i="1" smtClean="0">
+                        <a:solidFill>
+                          <a:schemeClr val="tx1"/>
+                        </a:solidFill>
+                        <a:latin typeface="Cambria Math" panose="02040503050406030204" pitchFamily="18" charset="0"/>
+                        <a:ea typeface="Cambria Math" panose="02040503050406030204" pitchFamily="18" charset="0"/>
+                      </a:rPr>
+                      <m:t>𝑟</m:t>
+                    </m:r>
+                  </m:oMath>
+                </a14:m>
+                <a:r>
+                  <a:rPr lang="en-US" sz="2000" b="0" dirty="0">
+                    <a:solidFill>
+                      <a:schemeClr val="tx1"/>
+                    </a:solidFill>
+                    <a:ea typeface="Cambria Math" panose="02040503050406030204" pitchFamily="18" charset="0"/>
+                  </a:rPr>
+                  <a:t>, update </a:t>
+                </a:r>
+                <a14:m>
+                  <m:oMath xmlns:m="http://schemas.openxmlformats.org/officeDocument/2006/math">
+                    <m:r>
+                      <a:rPr lang="en-US" sz="2000" b="0" i="1" smtClean="0">
+                        <a:solidFill>
+                          <a:schemeClr val="tx1"/>
+                        </a:solidFill>
+                        <a:latin typeface="Cambria Math" panose="02040503050406030204" pitchFamily="18" charset="0"/>
+                        <a:ea typeface="Cambria Math" panose="02040503050406030204" pitchFamily="18" charset="0"/>
+                      </a:rPr>
+                      <m:t>𝑥</m:t>
+                    </m:r>
+                  </m:oMath>
+                </a14:m>
+                <a:r>
+                  <a:rPr lang="en-US" sz="2000" b="0" dirty="0">
+                    <a:solidFill>
+                      <a:schemeClr val="tx1"/>
+                    </a:solidFill>
+                    <a:ea typeface="Cambria Math" panose="02040503050406030204" pitchFamily="18" charset="0"/>
+                  </a:rPr>
+                  <a:t>, redo until </a:t>
+                </a:r>
+                <a14:m>
+                  <m:oMath xmlns:m="http://schemas.openxmlformats.org/officeDocument/2006/math">
+                    <m:r>
+                      <a:rPr lang="en-US" sz="2000" b="0" i="1" dirty="0" smtClean="0">
+                        <a:solidFill>
+                          <a:schemeClr val="tx1"/>
+                        </a:solidFill>
+                        <a:latin typeface="Cambria Math" panose="02040503050406030204" pitchFamily="18" charset="0"/>
+                        <a:ea typeface="Cambria Math" panose="02040503050406030204" pitchFamily="18" charset="0"/>
+                      </a:rPr>
+                      <m:t>𝑒</m:t>
+                    </m:r>
+                  </m:oMath>
+                </a14:m>
+                <a:r>
+                  <a:rPr lang="en-US" sz="2000" b="0" dirty="0">
+                    <a:solidFill>
+                      <a:schemeClr val="tx1"/>
+                    </a:solidFill>
+                    <a:ea typeface="Cambria Math" panose="02040503050406030204" pitchFamily="18" charset="0"/>
+                  </a:rPr>
+                  <a:t>      converges</a:t>
+                </a:r>
+              </a:p>
+            </p:txBody>
+          </p:sp>
+        </mc:Choice>
+        <mc:Fallback>
+          <p:sp>
+            <p:nvSpPr>
+              <p:cNvPr id="5" name="Text Placeholder 1">
+                <a:extLst>
+                  <a:ext uri="{FF2B5EF4-FFF2-40B4-BE49-F238E27FC236}">
+                    <a16:creationId xmlns:a16="http://schemas.microsoft.com/office/drawing/2014/main" id="{8E78D97E-74FD-2C66-7EBF-94EB233ED3EB}"/>
+                  </a:ext>
+                </a:extLst>
+              </p:cNvPr>
+              <p:cNvSpPr txBox="1">
+                <a:spLocks noRot="1" noChangeAspect="1" noMove="1" noResize="1" noEditPoints="1" noAdjustHandles="1" noChangeArrowheads="1" noChangeShapeType="1" noTextEdit="1"/>
+              </p:cNvSpPr>
+              <p:nvPr/>
+            </p:nvSpPr>
+            <p:spPr>
+              <a:xfrm>
+                <a:off x="323528" y="707816"/>
+                <a:ext cx="8218099" cy="4305013"/>
+              </a:xfrm>
+              <a:prstGeom prst="rect">
+                <a:avLst/>
+              </a:prstGeom>
+              <a:blipFill>
+                <a:blip r:embed="rId3"/>
+                <a:stretch>
+                  <a:fillRect l="-742" t="-1416"/>
+                </a:stretch>
+              </a:blipFill>
+            </p:spPr>
+            <p:txBody>
+              <a:bodyPr/>
+              <a:lstStyle/>
+              <a:p>
+                <a:r>
+                  <a:rPr lang="en-US">
+                    <a:noFill/>
+                  </a:rPr>
+                  <a:t> </a:t>
+                </a:r>
+              </a:p>
+            </p:txBody>
+          </p:sp>
+        </mc:Fallback>
+      </mc:AlternateContent>
+      <p:sp>
+        <p:nvSpPr>
+          <p:cNvPr id="6" name="Slide Number Placeholder 2">
+            <a:extLst>
+              <a:ext uri="{FF2B5EF4-FFF2-40B4-BE49-F238E27FC236}">
+                <a16:creationId xmlns:a16="http://schemas.microsoft.com/office/drawing/2014/main" id="{0AB01D8D-8608-E5C2-BC25-E92EDC8B4C75}"/>
+              </a:ext>
+            </a:extLst>
+          </p:cNvPr>
+          <p:cNvSpPr txBox="1">
+            <a:spLocks/>
+          </p:cNvSpPr>
+          <p:nvPr/>
+        </p:nvSpPr>
+        <p:spPr>
+          <a:xfrm>
+            <a:off x="8483346" y="4704588"/>
+            <a:ext cx="480060" cy="273844"/>
+          </a:xfrm>
+          <a:prstGeom prst="rect">
+            <a:avLst/>
+          </a:prstGeom>
+          <a:noFill/>
+        </p:spPr>
+        <p:txBody>
+          <a:bodyPr vert="horz" lIns="91440" tIns="45720" rIns="91440" bIns="45720" rtlCol="0" anchor="ctr">
+            <a:normAutofit/>
+          </a:bodyPr>
+          <a:lstStyle>
+            <a:defPPr>
+              <a:defRPr lang="en-US"/>
+            </a:defPPr>
+            <a:lvl1pPr marL="0" algn="ctr" defTabSz="457200" rtl="0" eaLnBrk="1" latinLnBrk="0" hangingPunct="1">
+              <a:defRPr sz="1050" b="1" kern="1200">
+                <a:solidFill>
+                  <a:srgbClr val="FFFFFF"/>
+                </a:solidFill>
+                <a:latin typeface="+mj-lt"/>
+                <a:ea typeface="+mn-ea"/>
+                <a:cs typeface="+mn-cs"/>
+              </a:defRPr>
+            </a:lvl1pPr>
+            <a:lvl2pPr marL="457200" algn="l" defTabSz="457200" rtl="0" eaLnBrk="1" latinLnBrk="0" hangingPunct="1">
+              <a:defRPr sz="1800" kern="1200">
+                <a:solidFill>
+                  <a:schemeClr val="tx1"/>
+                </a:solidFill>
+                <a:latin typeface="+mn-lt"/>
+                <a:ea typeface="+mn-ea"/>
+                <a:cs typeface="+mn-cs"/>
+              </a:defRPr>
+            </a:lvl2pPr>
+            <a:lvl3pPr marL="914400" algn="l" defTabSz="457200" rtl="0" eaLnBrk="1" latinLnBrk="0" hangingPunct="1">
+              <a:defRPr sz="1800" kern="1200">
+                <a:solidFill>
+                  <a:schemeClr val="tx1"/>
+                </a:solidFill>
+                <a:latin typeface="+mn-lt"/>
+                <a:ea typeface="+mn-ea"/>
+                <a:cs typeface="+mn-cs"/>
+              </a:defRPr>
+            </a:lvl3pPr>
+            <a:lvl4pPr marL="1371600" algn="l" defTabSz="457200" rtl="0" eaLnBrk="1" latinLnBrk="0" hangingPunct="1">
+              <a:defRPr sz="1800" kern="1200">
+                <a:solidFill>
+                  <a:schemeClr val="tx1"/>
+                </a:solidFill>
+                <a:latin typeface="+mn-lt"/>
+                <a:ea typeface="+mn-ea"/>
+                <a:cs typeface="+mn-cs"/>
+              </a:defRPr>
+            </a:lvl4pPr>
+            <a:lvl5pPr marL="1828800" algn="l" defTabSz="457200" rtl="0" eaLnBrk="1" latinLnBrk="0" hangingPunct="1">
+              <a:defRPr sz="1800" kern="1200">
+                <a:solidFill>
+                  <a:schemeClr val="tx1"/>
+                </a:solidFill>
+                <a:latin typeface="+mn-lt"/>
+                <a:ea typeface="+mn-ea"/>
+                <a:cs typeface="+mn-cs"/>
+              </a:defRPr>
+            </a:lvl5pPr>
+            <a:lvl6pPr marL="2286000" algn="l" defTabSz="457200" rtl="0" eaLnBrk="1" latinLnBrk="0" hangingPunct="1">
+              <a:defRPr sz="1800" kern="1200">
+                <a:solidFill>
+                  <a:schemeClr val="tx1"/>
+                </a:solidFill>
+                <a:latin typeface="+mn-lt"/>
+                <a:ea typeface="+mn-ea"/>
+                <a:cs typeface="+mn-cs"/>
+              </a:defRPr>
+            </a:lvl6pPr>
+            <a:lvl7pPr marL="2743200" algn="l" defTabSz="457200" rtl="0" eaLnBrk="1" latinLnBrk="0" hangingPunct="1">
+              <a:defRPr sz="1800" kern="1200">
+                <a:solidFill>
+                  <a:schemeClr val="tx1"/>
+                </a:solidFill>
+                <a:latin typeface="+mn-lt"/>
+                <a:ea typeface="+mn-ea"/>
+                <a:cs typeface="+mn-cs"/>
+              </a:defRPr>
+            </a:lvl7pPr>
+            <a:lvl8pPr marL="3200400" algn="l" defTabSz="457200" rtl="0" eaLnBrk="1" latinLnBrk="0" hangingPunct="1">
+              <a:defRPr sz="1800" kern="1200">
+                <a:solidFill>
+                  <a:schemeClr val="tx1"/>
+                </a:solidFill>
+                <a:latin typeface="+mn-lt"/>
+                <a:ea typeface="+mn-ea"/>
+                <a:cs typeface="+mn-cs"/>
+              </a:defRPr>
+            </a:lvl8pPr>
+            <a:lvl9pPr marL="3657600" algn="l" defTabSz="457200" rtl="0" eaLnBrk="1" latinLnBrk="0" hangingPunct="1">
+              <a:defRPr sz="1800" kern="1200">
+                <a:solidFill>
+                  <a:schemeClr val="tx1"/>
+                </a:solidFill>
+                <a:latin typeface="+mn-lt"/>
+                <a:ea typeface="+mn-ea"/>
+                <a:cs typeface="+mn-cs"/>
+              </a:defRPr>
+            </a:lvl9pPr>
+          </a:lstStyle>
           <a:p>
             <a:fld id="{7475F232-FFFE-5E6C-5554-2F165DAD28C0}" type="slidenum">
               <a:rPr lang="en-JP" smtClean="0"/>
+              <a:pPr/>
               <a:t>4</a:t>
             </a:fld>
             <a:endParaRPr lang="en-JP" dirty="0"/>
           </a:p>
         </p:txBody>
       </p:sp>
+    </p:spTree>
+    <p:extLst>
+      <p:ext uri="{BB962C8B-B14F-4D97-AF65-F5344CB8AC3E}">
+        <p14:creationId xmlns:p14="http://schemas.microsoft.com/office/powerpoint/2010/main" val="1411381841"/>
+      </p:ext>
+    </p:extLst>
+  </p:cSld>
+  <p:clrMapOvr>
+    <a:masterClrMapping/>
+  </p:clrMapOvr>
+</p:sld>
+</file>
+
+<file path=ppt/slides/slide5.xml><?xml version="1.0" encoding="utf-8"?>
+<p:sld xmlns:a="http://schemas.openxmlformats.org/drawingml/2006/main" xmlns:r="http://schemas.openxmlformats.org/officeDocument/2006/relationships" xmlns:p="http://schemas.openxmlformats.org/presentationml/2006/main">
+  <p:cSld>
+    <p:spTree>
+      <p:nvGrpSpPr>
+        <p:cNvPr id="1" name="">
+          <a:extLst>
+            <a:ext uri="{FF2B5EF4-FFF2-40B4-BE49-F238E27FC236}">
+              <a16:creationId xmlns:a16="http://schemas.microsoft.com/office/drawing/2014/main" id="{C8D15188-AC12-5131-F7FF-6D49FBFEFBDF}"/>
+            </a:ext>
+          </a:extLst>
+        </p:cNvPr>
+        <p:cNvGrpSpPr/>
+        <p:nvPr/>
+      </p:nvGrpSpPr>
+      <p:grpSpPr>
+        <a:xfrm>
+          <a:off x="0" y="0"/>
+          <a:ext cx="0" cy="0"/>
+          <a:chOff x="0" y="0"/>
+          <a:chExt cx="0" cy="0"/>
+        </a:xfrm>
+      </p:grpSpPr>
+      <p:sp>
+        <p:nvSpPr>
+          <p:cNvPr id="4" name="Title 3">
+            <a:extLst>
+              <a:ext uri="{FF2B5EF4-FFF2-40B4-BE49-F238E27FC236}">
+                <a16:creationId xmlns:a16="http://schemas.microsoft.com/office/drawing/2014/main" id="{78BCAAD9-795A-2AD0-C5D9-51F3F5B1A173}"/>
+              </a:ext>
+            </a:extLst>
+          </p:cNvPr>
+          <p:cNvSpPr>
+            <a:spLocks noGrp="1"/>
+          </p:cNvSpPr>
+          <p:nvPr>
+            <p:ph type="title" idx="2"/>
+          </p:nvPr>
+        </p:nvSpPr>
+        <p:spPr/>
+        <p:txBody>
+          <a:bodyPr/>
+          <a:lstStyle/>
+          <a:p>
+            <a:pPr marL="0">
+              <a:buClr>
+                <a:srgbClr val="9E3611"/>
+              </a:buClr>
+            </a:pPr>
+            <a:r>
+              <a:rPr lang="en-US" sz="2400" dirty="0">
+                <a:ea typeface="游ゴシック Medium"/>
+                <a:cs typeface="Times New Roman"/>
+              </a:rPr>
+              <a:t>   Pose Graph Optimization</a:t>
+            </a:r>
+          </a:p>
+        </p:txBody>
+      </p:sp>
+      <p:sp>
+        <p:nvSpPr>
+          <p:cNvPr id="16" name="Text Placeholder 1">
+            <a:extLst>
+              <a:ext uri="{FF2B5EF4-FFF2-40B4-BE49-F238E27FC236}">
+                <a16:creationId xmlns:a16="http://schemas.microsoft.com/office/drawing/2014/main" id="{0F75490B-E251-B322-BF97-C648B701DD8B}"/>
+              </a:ext>
+            </a:extLst>
+          </p:cNvPr>
+          <p:cNvSpPr>
+            <a:spLocks noGrp="1"/>
+          </p:cNvSpPr>
+          <p:nvPr>
+            <p:ph type="body"/>
+          </p:nvPr>
+        </p:nvSpPr>
+        <p:spPr>
+          <a:xfrm>
+            <a:off x="170325" y="707816"/>
+            <a:ext cx="8218099" cy="3986866"/>
+          </a:xfrm>
+        </p:spPr>
+        <p:txBody>
+          <a:bodyPr vert="horz" lIns="91440" tIns="45720" rIns="91440" bIns="45720" rtlCol="0" anchor="t">
+            <a:normAutofit/>
+          </a:bodyPr>
+          <a:lstStyle/>
+          <a:p>
+            <a:pPr marL="0" indent="0">
+              <a:buClr>
+                <a:srgbClr val="9E3611"/>
+              </a:buClr>
+              <a:buNone/>
+            </a:pPr>
+            <a:endParaRPr lang="en-US" sz="2000" b="0" dirty="0"/>
+          </a:p>
+          <a:p>
+            <a:pPr marL="0" indent="0">
+              <a:buClr>
+                <a:srgbClr val="9E3611"/>
+              </a:buClr>
+              <a:buNone/>
+            </a:pPr>
+            <a:endParaRPr lang="en-US" sz="2000" b="0" dirty="0"/>
+          </a:p>
+        </p:txBody>
+      </p:sp>
+      <mc:AlternateContent xmlns:mc="http://schemas.openxmlformats.org/markup-compatibility/2006" xmlns:a14="http://schemas.microsoft.com/office/drawing/2010/main">
+        <mc:Choice Requires="a14">
+          <p:sp>
+            <p:nvSpPr>
+              <p:cNvPr id="5" name="Text Placeholder 1">
+                <a:extLst>
+                  <a:ext uri="{FF2B5EF4-FFF2-40B4-BE49-F238E27FC236}">
+                    <a16:creationId xmlns:a16="http://schemas.microsoft.com/office/drawing/2014/main" id="{B9B934E0-2433-E3F5-7163-424CA4ADB1F4}"/>
+                  </a:ext>
+                </a:extLst>
+              </p:cNvPr>
+              <p:cNvSpPr txBox="1">
+                <a:spLocks/>
+              </p:cNvSpPr>
+              <p:nvPr/>
+            </p:nvSpPr>
+            <p:spPr>
+              <a:xfrm>
+                <a:off x="322725" y="860216"/>
+                <a:ext cx="8218099" cy="3986866"/>
+              </a:xfrm>
+              <a:prstGeom prst="rect">
+                <a:avLst/>
+              </a:prstGeom>
+              <a:noFill/>
+            </p:spPr>
+            <p:txBody>
+              <a:bodyPr vert="horz" lIns="91440" tIns="45720" rIns="91440" bIns="45720" rtlCol="0" anchor="t">
+                <a:normAutofit/>
+              </a:bodyPr>
+              <a:lstStyle>
+                <a:lvl1pPr marL="137160" indent="-137160" algn="l" defTabSz="685800" rtl="0" eaLnBrk="1" latinLnBrk="0" hangingPunct="1">
+                  <a:lnSpc>
+                    <a:spcPct val="90000"/>
+                  </a:lnSpc>
+                  <a:spcBef>
+                    <a:spcPts val="900"/>
+                  </a:spcBef>
+                  <a:buClr>
+                    <a:schemeClr val="accent1">
+                      <a:lumMod val="75000"/>
+                    </a:schemeClr>
+                  </a:buClr>
+                  <a:buSzPct val="100000"/>
+                  <a:buFont typeface="Arial" panose="020B0604020202020204" pitchFamily="34" charset="0"/>
+                  <a:buChar char="•"/>
+                  <a:defRPr kumimoji="1" sz="1500" b="1" kern="1200">
+                    <a:solidFill>
+                      <a:schemeClr val="tx1"/>
+                    </a:solidFill>
+                    <a:latin typeface="游ゴシック Medium" panose="020B0500000000000000" pitchFamily="50" charset="-128"/>
+                    <a:ea typeface="游ゴシック Medium" panose="020B0500000000000000" pitchFamily="50" charset="-128"/>
+                    <a:cs typeface="+mn-cs"/>
+                  </a:defRPr>
+                </a:lvl1pPr>
+                <a:lvl2pPr marL="342900" indent="-137160" algn="l" defTabSz="685800" rtl="0" eaLnBrk="1" latinLnBrk="0" hangingPunct="1">
+                  <a:lnSpc>
+                    <a:spcPct val="90000"/>
+                  </a:lnSpc>
+                  <a:spcBef>
+                    <a:spcPts val="300"/>
+                  </a:spcBef>
+                  <a:spcAft>
+                    <a:spcPts val="150"/>
+                  </a:spcAft>
+                  <a:buClr>
+                    <a:schemeClr val="accent1">
+                      <a:lumMod val="75000"/>
+                    </a:schemeClr>
+                  </a:buClr>
+                  <a:buSzPct val="100000"/>
+                  <a:buFont typeface="Arial" panose="020B0604020202020204" pitchFamily="34" charset="0"/>
+                  <a:buChar char="•"/>
+                  <a:defRPr kumimoji="1" sz="1350" b="1" kern="1200">
+                    <a:solidFill>
+                      <a:schemeClr val="tx1"/>
+                    </a:solidFill>
+                    <a:latin typeface="游ゴシック Medium" panose="020B0500000000000000" pitchFamily="50" charset="-128"/>
+                    <a:ea typeface="游ゴシック Medium" panose="020B0500000000000000" pitchFamily="50" charset="-128"/>
+                    <a:cs typeface="+mn-cs"/>
+                  </a:defRPr>
+                </a:lvl2pPr>
+                <a:lvl3pPr marL="548640" indent="-137160" algn="l" defTabSz="685800" rtl="0" eaLnBrk="1" latinLnBrk="0" hangingPunct="1">
+                  <a:lnSpc>
+                    <a:spcPct val="90000"/>
+                  </a:lnSpc>
+                  <a:spcBef>
+                    <a:spcPts val="300"/>
+                  </a:spcBef>
+                  <a:spcAft>
+                    <a:spcPts val="150"/>
+                  </a:spcAft>
+                  <a:buClr>
+                    <a:schemeClr val="accent1">
+                      <a:lumMod val="75000"/>
+                    </a:schemeClr>
+                  </a:buClr>
+                  <a:buSzPct val="100000"/>
+                  <a:buFont typeface="Arial" panose="020B0604020202020204" pitchFamily="34" charset="0"/>
+                  <a:buChar char="•"/>
+                  <a:defRPr kumimoji="1" sz="1200" b="1" kern="1200">
+                    <a:solidFill>
+                      <a:schemeClr val="tx1"/>
+                    </a:solidFill>
+                    <a:latin typeface="游ゴシック Medium" panose="020B0500000000000000" pitchFamily="50" charset="-128"/>
+                    <a:ea typeface="游ゴシック Medium" panose="020B0500000000000000" pitchFamily="50" charset="-128"/>
+                    <a:cs typeface="+mn-cs"/>
+                  </a:defRPr>
+                </a:lvl3pPr>
+                <a:lvl4pPr marL="754380" indent="-137160" algn="l" defTabSz="685800" rtl="0" eaLnBrk="1" latinLnBrk="0" hangingPunct="1">
+                  <a:lnSpc>
+                    <a:spcPct val="90000"/>
+                  </a:lnSpc>
+                  <a:spcBef>
+                    <a:spcPts val="300"/>
+                  </a:spcBef>
+                  <a:spcAft>
+                    <a:spcPts val="150"/>
+                  </a:spcAft>
+                  <a:buClr>
+                    <a:schemeClr val="accent1">
+                      <a:lumMod val="75000"/>
+                    </a:schemeClr>
+                  </a:buClr>
+                  <a:buSzPct val="100000"/>
+                  <a:buFont typeface="Arial" panose="020B0604020202020204" pitchFamily="34" charset="0"/>
+                  <a:buChar char="•"/>
+                  <a:defRPr kumimoji="1" sz="1200" b="1" kern="1200">
+                    <a:solidFill>
+                      <a:schemeClr val="tx1"/>
+                    </a:solidFill>
+                    <a:latin typeface="游ゴシック Medium" panose="020B0500000000000000" pitchFamily="50" charset="-128"/>
+                    <a:ea typeface="游ゴシック Medium" panose="020B0500000000000000" pitchFamily="50" charset="-128"/>
+                    <a:cs typeface="+mn-cs"/>
+                  </a:defRPr>
+                </a:lvl4pPr>
+                <a:lvl5pPr marL="960120" indent="-137160" algn="l" defTabSz="685800" rtl="0" eaLnBrk="1" latinLnBrk="0" hangingPunct="1">
+                  <a:lnSpc>
+                    <a:spcPct val="90000"/>
+                  </a:lnSpc>
+                  <a:spcBef>
+                    <a:spcPts val="300"/>
+                  </a:spcBef>
+                  <a:spcAft>
+                    <a:spcPts val="150"/>
+                  </a:spcAft>
+                  <a:buClr>
+                    <a:schemeClr val="accent1">
+                      <a:lumMod val="75000"/>
+                    </a:schemeClr>
+                  </a:buClr>
+                  <a:buSzPct val="100000"/>
+                  <a:buFont typeface="Arial" panose="020B0604020202020204" pitchFamily="34" charset="0"/>
+                  <a:buChar char="•"/>
+                  <a:defRPr kumimoji="1" sz="1200" b="1" kern="1200">
+                    <a:solidFill>
+                      <a:schemeClr val="tx1"/>
+                    </a:solidFill>
+                    <a:latin typeface="游ゴシック Medium" panose="020B0500000000000000" pitchFamily="50" charset="-128"/>
+                    <a:ea typeface="游ゴシック Medium" panose="020B0500000000000000" pitchFamily="50" charset="-128"/>
+                    <a:cs typeface="+mn-cs"/>
+                  </a:defRPr>
+                </a:lvl5pPr>
+                <a:lvl6pPr marL="1200000" indent="-171450" algn="l" defTabSz="685800" rtl="0" eaLnBrk="1" latinLnBrk="0" hangingPunct="1">
+                  <a:lnSpc>
+                    <a:spcPct val="90000"/>
+                  </a:lnSpc>
+                  <a:spcBef>
+                    <a:spcPts val="300"/>
+                  </a:spcBef>
+                  <a:spcAft>
+                    <a:spcPts val="150"/>
+                  </a:spcAft>
+                  <a:buClr>
+                    <a:schemeClr val="accent1">
+                      <a:lumMod val="75000"/>
+                    </a:schemeClr>
+                  </a:buClr>
+                  <a:buSzPct val="100000"/>
+                  <a:buFont typeface="Arial" panose="020B0604020202020204" pitchFamily="34" charset="0"/>
+                  <a:buChar char="•"/>
+                  <a:defRPr kumimoji="1" sz="1200" kern="1200">
+                    <a:solidFill>
+                      <a:schemeClr val="tx1"/>
+                    </a:solidFill>
+                    <a:latin typeface="+mn-lt"/>
+                    <a:ea typeface="+mn-ea"/>
+                    <a:cs typeface="+mn-cs"/>
+                  </a:defRPr>
+                </a:lvl6pPr>
+                <a:lvl7pPr marL="1425000" indent="-171450" algn="l" defTabSz="685800" rtl="0" eaLnBrk="1" latinLnBrk="0" hangingPunct="1">
+                  <a:lnSpc>
+                    <a:spcPct val="90000"/>
+                  </a:lnSpc>
+                  <a:spcBef>
+                    <a:spcPts val="300"/>
+                  </a:spcBef>
+                  <a:spcAft>
+                    <a:spcPts val="150"/>
+                  </a:spcAft>
+                  <a:buClr>
+                    <a:schemeClr val="accent1">
+                      <a:lumMod val="75000"/>
+                    </a:schemeClr>
+                  </a:buClr>
+                  <a:buSzPct val="100000"/>
+                  <a:buFont typeface="Arial" panose="020B0604020202020204" pitchFamily="34" charset="0"/>
+                  <a:buChar char="•"/>
+                  <a:defRPr kumimoji="1" sz="1200" kern="1200">
+                    <a:solidFill>
+                      <a:schemeClr val="tx1"/>
+                    </a:solidFill>
+                    <a:latin typeface="+mn-lt"/>
+                    <a:ea typeface="+mn-ea"/>
+                    <a:cs typeface="+mn-cs"/>
+                  </a:defRPr>
+                </a:lvl7pPr>
+                <a:lvl8pPr marL="1650000" indent="-171450" algn="l" defTabSz="685800" rtl="0" eaLnBrk="1" latinLnBrk="0" hangingPunct="1">
+                  <a:lnSpc>
+                    <a:spcPct val="90000"/>
+                  </a:lnSpc>
+                  <a:spcBef>
+                    <a:spcPts val="300"/>
+                  </a:spcBef>
+                  <a:spcAft>
+                    <a:spcPts val="150"/>
+                  </a:spcAft>
+                  <a:buClr>
+                    <a:schemeClr val="accent1">
+                      <a:lumMod val="75000"/>
+                    </a:schemeClr>
+                  </a:buClr>
+                  <a:buSzPct val="100000"/>
+                  <a:buFont typeface="Arial" panose="020B0604020202020204" pitchFamily="34" charset="0"/>
+                  <a:buChar char="•"/>
+                  <a:defRPr kumimoji="1" sz="1200" kern="1200">
+                    <a:solidFill>
+                      <a:schemeClr val="tx1"/>
+                    </a:solidFill>
+                    <a:latin typeface="+mn-lt"/>
+                    <a:ea typeface="+mn-ea"/>
+                    <a:cs typeface="+mn-cs"/>
+                  </a:defRPr>
+                </a:lvl8pPr>
+                <a:lvl9pPr marL="1875000" indent="-171450" algn="l" defTabSz="685800" rtl="0" eaLnBrk="1" latinLnBrk="0" hangingPunct="1">
+                  <a:lnSpc>
+                    <a:spcPct val="90000"/>
+                  </a:lnSpc>
+                  <a:spcBef>
+                    <a:spcPts val="300"/>
+                  </a:spcBef>
+                  <a:spcAft>
+                    <a:spcPts val="150"/>
+                  </a:spcAft>
+                  <a:buClr>
+                    <a:schemeClr val="accent1">
+                      <a:lumMod val="75000"/>
+                    </a:schemeClr>
+                  </a:buClr>
+                  <a:buSzPct val="100000"/>
+                  <a:buFont typeface="Arial" panose="020B0604020202020204" pitchFamily="34" charset="0"/>
+                  <a:buChar char="•"/>
+                  <a:defRPr kumimoji="1" sz="1200" kern="1200">
+                    <a:solidFill>
+                      <a:schemeClr val="tx1"/>
+                    </a:solidFill>
+                    <a:latin typeface="+mn-lt"/>
+                    <a:ea typeface="+mn-ea"/>
+                    <a:cs typeface="+mn-cs"/>
+                  </a:defRPr>
+                </a:lvl9pPr>
+              </a:lstStyle>
+              <a:p>
+                <a:pPr marL="0" indent="0">
+                  <a:buClr>
+                    <a:srgbClr val="9E3611"/>
+                  </a:buClr>
+                  <a:buFont typeface="Arial" panose="020B0604020202020204" pitchFamily="34" charset="0"/>
+                  <a:buNone/>
+                </a:pPr>
+                <a:r>
+                  <a:rPr lang="en-US" sz="2000" dirty="0"/>
+                  <a:t>Optimizer:</a:t>
+                </a:r>
+              </a:p>
+              <a:p>
+                <a:pPr>
+                  <a:buClr>
+                    <a:srgbClr val="9E3611"/>
+                  </a:buClr>
+                </a:pPr>
+                <a:r>
+                  <a:rPr lang="en-US" sz="2000" b="0" dirty="0"/>
+                  <a:t>Levenberg-Marquardt: Additional factor to Jacobi-matrices for more control of optimization</a:t>
+                </a:r>
+              </a:p>
+              <a:p>
+                <a:pPr>
+                  <a:buClr>
+                    <a:srgbClr val="9E3611"/>
+                  </a:buClr>
+                </a:pPr>
+                <a14:m>
+                  <m:oMath xmlns:m="http://schemas.openxmlformats.org/officeDocument/2006/math">
+                    <m:sSup>
+                      <m:sSupPr>
+                        <m:ctrlPr>
+                          <a:rPr lang="en-US" sz="2000" b="0" i="1">
+                            <a:latin typeface="Cambria Math" panose="02040503050406030204" pitchFamily="18" charset="0"/>
+                          </a:rPr>
+                        </m:ctrlPr>
+                      </m:sSupPr>
+                      <m:e>
+                        <m:r>
+                          <a:rPr lang="en-US" sz="2000" b="0" i="1" smtClean="0">
+                            <a:latin typeface="Cambria Math" panose="02040503050406030204" pitchFamily="18" charset="0"/>
+                          </a:rPr>
+                          <m:t>(</m:t>
+                        </m:r>
+                        <m:r>
+                          <a:rPr lang="en-US" sz="2000" b="0" i="1">
+                            <a:latin typeface="Cambria Math" panose="02040503050406030204" pitchFamily="18" charset="0"/>
+                          </a:rPr>
+                          <m:t>𝐽</m:t>
+                        </m:r>
+                      </m:e>
+                      <m:sup>
+                        <m:r>
+                          <a:rPr lang="en-US" sz="2000" b="0" i="1">
+                            <a:latin typeface="Cambria Math" panose="02040503050406030204" pitchFamily="18" charset="0"/>
+                          </a:rPr>
+                          <m:t>𝑇</m:t>
+                        </m:r>
+                      </m:sup>
+                    </m:sSup>
+                    <m:r>
+                      <a:rPr lang="en-US" sz="2000" b="0" i="1">
+                        <a:latin typeface="Cambria Math" panose="02040503050406030204" pitchFamily="18" charset="0"/>
+                      </a:rPr>
+                      <m:t>𝐽</m:t>
+                    </m:r>
+                    <m:r>
+                      <a:rPr lang="en-US" sz="2000" b="0" i="1" smtClean="0">
+                        <a:latin typeface="Cambria Math" panose="02040503050406030204" pitchFamily="18" charset="0"/>
+                        <a:ea typeface="Cambria Math" panose="02040503050406030204" pitchFamily="18" charset="0"/>
+                      </a:rPr>
+                      <m:t>+</m:t>
+                    </m:r>
+                  </m:oMath>
+                </a14:m>
+                <a:r>
+                  <a:rPr lang="el-GR" sz="2000" b="0" dirty="0"/>
+                  <a:t>λ</a:t>
+                </a:r>
+                <a14:m>
+                  <m:oMath xmlns:m="http://schemas.openxmlformats.org/officeDocument/2006/math">
+                    <m:r>
+                      <a:rPr lang="en-US" sz="2000" b="0" i="1" smtClean="0">
+                        <a:latin typeface="Cambria Math" panose="02040503050406030204" pitchFamily="18" charset="0"/>
+                        <a:ea typeface="Cambria Math" panose="02040503050406030204" pitchFamily="18" charset="0"/>
+                      </a:rPr>
+                      <m:t>𝐽</m:t>
+                    </m:r>
+                    <m:r>
+                      <a:rPr lang="en-US" sz="2000" b="0" i="1" smtClean="0">
+                        <a:latin typeface="Cambria Math" panose="02040503050406030204" pitchFamily="18" charset="0"/>
+                      </a:rPr>
+                      <m:t>)</m:t>
+                    </m:r>
+                    <m:r>
+                      <a:rPr lang="en-US" sz="2000" b="0" i="1" smtClean="0">
+                        <a:latin typeface="Cambria Math" panose="02040503050406030204" pitchFamily="18" charset="0"/>
+                        <a:ea typeface="Cambria Math" panose="02040503050406030204" pitchFamily="18" charset="0"/>
+                      </a:rPr>
+                      <m:t>∆</m:t>
+                    </m:r>
+                    <m:r>
+                      <a:rPr lang="en-US" sz="2000" b="0" i="1" smtClean="0">
+                        <a:latin typeface="Cambria Math" panose="02040503050406030204" pitchFamily="18" charset="0"/>
+                        <a:ea typeface="Cambria Math" panose="02040503050406030204" pitchFamily="18" charset="0"/>
+                      </a:rPr>
+                      <m:t>𝑥</m:t>
+                    </m:r>
+                    <m:r>
+                      <a:rPr lang="en-US" sz="2000" b="0" i="1">
+                        <a:latin typeface="Cambria Math" panose="02040503050406030204" pitchFamily="18" charset="0"/>
+                        <a:ea typeface="Cambria Math" panose="02040503050406030204" pitchFamily="18" charset="0"/>
+                      </a:rPr>
+                      <m:t>=−</m:t>
+                    </m:r>
+                    <m:sSup>
+                      <m:sSupPr>
+                        <m:ctrlPr>
+                          <a:rPr lang="en-US" sz="2000" b="0" i="1">
+                            <a:latin typeface="Cambria Math" panose="02040503050406030204" pitchFamily="18" charset="0"/>
+                            <a:ea typeface="Cambria Math" panose="02040503050406030204" pitchFamily="18" charset="0"/>
+                          </a:rPr>
+                        </m:ctrlPr>
+                      </m:sSupPr>
+                      <m:e>
+                        <m:r>
+                          <a:rPr lang="en-US" sz="2000" b="0" i="1">
+                            <a:latin typeface="Cambria Math" panose="02040503050406030204" pitchFamily="18" charset="0"/>
+                            <a:ea typeface="Cambria Math" panose="02040503050406030204" pitchFamily="18" charset="0"/>
+                          </a:rPr>
+                          <m:t>𝐽</m:t>
+                        </m:r>
+                      </m:e>
+                      <m:sup>
+                        <m:r>
+                          <a:rPr lang="en-US" sz="2000" b="0" i="1">
+                            <a:latin typeface="Cambria Math" panose="02040503050406030204" pitchFamily="18" charset="0"/>
+                            <a:ea typeface="Cambria Math" panose="02040503050406030204" pitchFamily="18" charset="0"/>
+                          </a:rPr>
+                          <m:t>𝑇</m:t>
+                        </m:r>
+                      </m:sup>
+                    </m:sSup>
+                    <m:r>
+                      <a:rPr lang="en-US" sz="2000" b="0" i="1">
+                        <a:latin typeface="Cambria Math" panose="02040503050406030204" pitchFamily="18" charset="0"/>
+                        <a:ea typeface="Cambria Math" panose="02040503050406030204" pitchFamily="18" charset="0"/>
+                      </a:rPr>
+                      <m:t>𝑟</m:t>
+                    </m:r>
+                  </m:oMath>
+                </a14:m>
+                <a:endParaRPr lang="en-US" sz="2000" b="0" i="1" dirty="0">
+                  <a:latin typeface="Cambria Math" panose="02040503050406030204" pitchFamily="18" charset="0"/>
+                  <a:ea typeface="Cambria Math" panose="02040503050406030204" pitchFamily="18" charset="0"/>
+                </a:endParaRPr>
+              </a:p>
+              <a:p>
+                <a:pPr marL="0" indent="0">
+                  <a:buClr>
+                    <a:srgbClr val="9E3611"/>
+                  </a:buClr>
+                  <a:buNone/>
+                </a:pPr>
+                <a:endParaRPr lang="en-US" sz="2000" b="0" i="1" dirty="0">
+                  <a:latin typeface="Cambria Math" panose="02040503050406030204" pitchFamily="18" charset="0"/>
+                  <a:ea typeface="Cambria Math" panose="02040503050406030204" pitchFamily="18" charset="0"/>
+                </a:endParaRPr>
+              </a:p>
+              <a:p>
+                <a:pPr marL="0" indent="0">
+                  <a:buClr>
+                    <a:srgbClr val="9E3611"/>
+                  </a:buClr>
+                  <a:buNone/>
+                </a:pPr>
+                <a:r>
+                  <a:rPr lang="en-US" sz="2000" dirty="0"/>
+                  <a:t>Weights:</a:t>
+                </a:r>
+              </a:p>
+              <a:p>
+                <a:pPr>
+                  <a:buClr>
+                    <a:srgbClr val="9E3611"/>
+                  </a:buClr>
+                </a:pPr>
+                <a:r>
+                  <a:rPr lang="en-US" sz="2000" b="0" dirty="0"/>
+                  <a:t>Prior (first node): 6*10</a:t>
+                </a:r>
+                <a:r>
+                  <a:rPr lang="en-US" sz="2000" b="0" baseline="30000" dirty="0"/>
+                  <a:t>5</a:t>
+                </a:r>
+                <a:endParaRPr lang="en-US" sz="2000" b="0" dirty="0"/>
+              </a:p>
+              <a:p>
+                <a:pPr>
+                  <a:buClr>
+                    <a:srgbClr val="9E3611"/>
+                  </a:buClr>
+                </a:pPr>
+                <a:r>
+                  <a:rPr lang="en-US" sz="2000" b="0" dirty="0"/>
+                  <a:t>Rest: 6*10</a:t>
+                </a:r>
+                <a:r>
+                  <a:rPr lang="en-US" sz="2000" b="0" baseline="30000" dirty="0"/>
+                  <a:t>2</a:t>
+                </a:r>
+              </a:p>
+              <a:p>
+                <a:pPr marL="0" indent="0">
+                  <a:buClr>
+                    <a:srgbClr val="9E3611"/>
+                  </a:buClr>
+                  <a:buNone/>
+                </a:pPr>
+                <a:endParaRPr lang="en-US" sz="2000" b="0" baseline="30000" dirty="0"/>
+              </a:p>
+              <a:p>
+                <a:pPr marL="0" indent="0">
+                  <a:buClr>
+                    <a:srgbClr val="9E3611"/>
+                  </a:buClr>
+                  <a:buNone/>
+                </a:pPr>
+                <a:r>
+                  <a:rPr lang="en-US" sz="2000" dirty="0">
+                    <a:solidFill>
+                      <a:schemeClr val="accent1"/>
+                    </a:solidFill>
+                  </a:rPr>
+                  <a:t>➔ </a:t>
+                </a:r>
+                <a:r>
+                  <a:rPr lang="en-US" sz="2000" b="0" dirty="0"/>
+                  <a:t>Base line PGO, no individual weighting nor additional edges yet</a:t>
+                </a:r>
+              </a:p>
+              <a:p>
+                <a:pPr marL="0" indent="0">
+                  <a:buClr>
+                    <a:srgbClr val="9E3611"/>
+                  </a:buClr>
+                  <a:buFont typeface="Arial" panose="020B0604020202020204" pitchFamily="34" charset="0"/>
+                  <a:buNone/>
+                </a:pPr>
+                <a:endParaRPr lang="en-US" sz="2000" b="0" dirty="0"/>
+              </a:p>
+              <a:p>
+                <a:pPr marL="0" indent="0">
+                  <a:buClr>
+                    <a:srgbClr val="9E3611"/>
+                  </a:buClr>
+                  <a:buFont typeface="Arial" panose="020B0604020202020204" pitchFamily="34" charset="0"/>
+                  <a:buNone/>
+                </a:pPr>
+                <a:endParaRPr lang="en-US" sz="2000" b="0" dirty="0"/>
+              </a:p>
+            </p:txBody>
+          </p:sp>
+        </mc:Choice>
+        <mc:Fallback xmlns="">
+          <p:sp>
+            <p:nvSpPr>
+              <p:cNvPr id="5" name="Text Placeholder 1">
+                <a:extLst>
+                  <a:ext uri="{FF2B5EF4-FFF2-40B4-BE49-F238E27FC236}">
+                    <a16:creationId xmlns:a16="http://schemas.microsoft.com/office/drawing/2014/main" id="{B9B934E0-2433-E3F5-7163-424CA4ADB1F4}"/>
+                  </a:ext>
+                </a:extLst>
+              </p:cNvPr>
+              <p:cNvSpPr txBox="1">
+                <a:spLocks noRot="1" noChangeAspect="1" noMove="1" noResize="1" noEditPoints="1" noAdjustHandles="1" noChangeArrowheads="1" noChangeShapeType="1" noTextEdit="1"/>
+              </p:cNvSpPr>
+              <p:nvPr/>
+            </p:nvSpPr>
+            <p:spPr>
+              <a:xfrm>
+                <a:off x="322725" y="860216"/>
+                <a:ext cx="8218099" cy="3986866"/>
+              </a:xfrm>
+              <a:prstGeom prst="rect">
+                <a:avLst/>
+              </a:prstGeom>
+              <a:blipFill>
+                <a:blip r:embed="rId3"/>
+                <a:stretch>
+                  <a:fillRect l="-816" t="-1529"/>
+                </a:stretch>
+              </a:blipFill>
+            </p:spPr>
+            <p:txBody>
+              <a:bodyPr/>
+              <a:lstStyle/>
+              <a:p>
+                <a:r>
+                  <a:rPr lang="en-US">
+                    <a:noFill/>
+                  </a:rPr>
+                  <a:t> </a:t>
+                </a:r>
+              </a:p>
+            </p:txBody>
+          </p:sp>
+        </mc:Fallback>
+      </mc:AlternateContent>
+      <p:sp>
+        <p:nvSpPr>
+          <p:cNvPr id="2" name="Slide Number Placeholder 2">
+            <a:extLst>
+              <a:ext uri="{FF2B5EF4-FFF2-40B4-BE49-F238E27FC236}">
+                <a16:creationId xmlns:a16="http://schemas.microsoft.com/office/drawing/2014/main" id="{15B8A643-C935-B6B1-E575-4A607094E999}"/>
+              </a:ext>
+            </a:extLst>
+          </p:cNvPr>
+          <p:cNvSpPr txBox="1">
+            <a:spLocks/>
+          </p:cNvSpPr>
+          <p:nvPr/>
+        </p:nvSpPr>
+        <p:spPr>
+          <a:xfrm>
+            <a:off x="8483346" y="4704588"/>
+            <a:ext cx="480060" cy="273844"/>
+          </a:xfrm>
+          <a:prstGeom prst="rect">
+            <a:avLst/>
+          </a:prstGeom>
+          <a:noFill/>
+        </p:spPr>
+        <p:txBody>
+          <a:bodyPr vert="horz" lIns="91440" tIns="45720" rIns="91440" bIns="45720" rtlCol="0" anchor="ctr">
+            <a:normAutofit/>
+          </a:bodyPr>
+          <a:lstStyle>
+            <a:defPPr>
+              <a:defRPr lang="en-US"/>
+            </a:defPPr>
+            <a:lvl1pPr marL="0" algn="ctr" defTabSz="457200" rtl="0" eaLnBrk="1" latinLnBrk="0" hangingPunct="1">
+              <a:defRPr sz="1050" b="1" kern="1200">
+                <a:solidFill>
+                  <a:srgbClr val="FFFFFF"/>
+                </a:solidFill>
+                <a:latin typeface="+mj-lt"/>
+                <a:ea typeface="+mn-ea"/>
+                <a:cs typeface="+mn-cs"/>
+              </a:defRPr>
+            </a:lvl1pPr>
+            <a:lvl2pPr marL="457200" algn="l" defTabSz="457200" rtl="0" eaLnBrk="1" latinLnBrk="0" hangingPunct="1">
+              <a:defRPr sz="1800" kern="1200">
+                <a:solidFill>
+                  <a:schemeClr val="tx1"/>
+                </a:solidFill>
+                <a:latin typeface="+mn-lt"/>
+                <a:ea typeface="+mn-ea"/>
+                <a:cs typeface="+mn-cs"/>
+              </a:defRPr>
+            </a:lvl2pPr>
+            <a:lvl3pPr marL="914400" algn="l" defTabSz="457200" rtl="0" eaLnBrk="1" latinLnBrk="0" hangingPunct="1">
+              <a:defRPr sz="1800" kern="1200">
+                <a:solidFill>
+                  <a:schemeClr val="tx1"/>
+                </a:solidFill>
+                <a:latin typeface="+mn-lt"/>
+                <a:ea typeface="+mn-ea"/>
+                <a:cs typeface="+mn-cs"/>
+              </a:defRPr>
+            </a:lvl3pPr>
+            <a:lvl4pPr marL="1371600" algn="l" defTabSz="457200" rtl="0" eaLnBrk="1" latinLnBrk="0" hangingPunct="1">
+              <a:defRPr sz="1800" kern="1200">
+                <a:solidFill>
+                  <a:schemeClr val="tx1"/>
+                </a:solidFill>
+                <a:latin typeface="+mn-lt"/>
+                <a:ea typeface="+mn-ea"/>
+                <a:cs typeface="+mn-cs"/>
+              </a:defRPr>
+            </a:lvl4pPr>
+            <a:lvl5pPr marL="1828800" algn="l" defTabSz="457200" rtl="0" eaLnBrk="1" latinLnBrk="0" hangingPunct="1">
+              <a:defRPr sz="1800" kern="1200">
+                <a:solidFill>
+                  <a:schemeClr val="tx1"/>
+                </a:solidFill>
+                <a:latin typeface="+mn-lt"/>
+                <a:ea typeface="+mn-ea"/>
+                <a:cs typeface="+mn-cs"/>
+              </a:defRPr>
+            </a:lvl5pPr>
+            <a:lvl6pPr marL="2286000" algn="l" defTabSz="457200" rtl="0" eaLnBrk="1" latinLnBrk="0" hangingPunct="1">
+              <a:defRPr sz="1800" kern="1200">
+                <a:solidFill>
+                  <a:schemeClr val="tx1"/>
+                </a:solidFill>
+                <a:latin typeface="+mn-lt"/>
+                <a:ea typeface="+mn-ea"/>
+                <a:cs typeface="+mn-cs"/>
+              </a:defRPr>
+            </a:lvl6pPr>
+            <a:lvl7pPr marL="2743200" algn="l" defTabSz="457200" rtl="0" eaLnBrk="1" latinLnBrk="0" hangingPunct="1">
+              <a:defRPr sz="1800" kern="1200">
+                <a:solidFill>
+                  <a:schemeClr val="tx1"/>
+                </a:solidFill>
+                <a:latin typeface="+mn-lt"/>
+                <a:ea typeface="+mn-ea"/>
+                <a:cs typeface="+mn-cs"/>
+              </a:defRPr>
+            </a:lvl7pPr>
+            <a:lvl8pPr marL="3200400" algn="l" defTabSz="457200" rtl="0" eaLnBrk="1" latinLnBrk="0" hangingPunct="1">
+              <a:defRPr sz="1800" kern="1200">
+                <a:solidFill>
+                  <a:schemeClr val="tx1"/>
+                </a:solidFill>
+                <a:latin typeface="+mn-lt"/>
+                <a:ea typeface="+mn-ea"/>
+                <a:cs typeface="+mn-cs"/>
+              </a:defRPr>
+            </a:lvl8pPr>
+            <a:lvl9pPr marL="3657600" algn="l" defTabSz="457200" rtl="0" eaLnBrk="1" latinLnBrk="0" hangingPunct="1">
+              <a:defRPr sz="1800" kern="1200">
+                <a:solidFill>
+                  <a:schemeClr val="tx1"/>
+                </a:solidFill>
+                <a:latin typeface="+mn-lt"/>
+                <a:ea typeface="+mn-ea"/>
+                <a:cs typeface="+mn-cs"/>
+              </a:defRPr>
+            </a:lvl9pPr>
+          </a:lstStyle>
+          <a:p>
+            <a:fld id="{7475F232-FFFE-5E6C-5554-2F165DAD28C0}" type="slidenum">
+              <a:rPr lang="en-JP" smtClean="0"/>
+              <a:pPr/>
+              <a:t>5</a:t>
+            </a:fld>
+            <a:endParaRPr lang="en-JP" dirty="0"/>
+          </a:p>
+        </p:txBody>
+      </p:sp>
+    </p:spTree>
+    <p:extLst>
+      <p:ext uri="{BB962C8B-B14F-4D97-AF65-F5344CB8AC3E}">
+        <p14:creationId xmlns:p14="http://schemas.microsoft.com/office/powerpoint/2010/main" val="838674181"/>
+      </p:ext>
+    </p:extLst>
+  </p:cSld>
+  <p:clrMapOvr>
+    <a:masterClrMapping/>
+  </p:clrMapOvr>
+</p:sld>
+</file>
+
+<file path=ppt/slides/slide6.xml><?xml version="1.0" encoding="utf-8"?>
+<p:sld xmlns:a="http://schemas.openxmlformats.org/drawingml/2006/main" xmlns:r="http://schemas.openxmlformats.org/officeDocument/2006/relationships" xmlns:p="http://schemas.openxmlformats.org/presentationml/2006/main">
+  <p:cSld>
+    <p:spTree>
+      <p:nvGrpSpPr>
+        <p:cNvPr id="1" name="">
+          <a:extLst>
+            <a:ext uri="{FF2B5EF4-FFF2-40B4-BE49-F238E27FC236}">
+              <a16:creationId xmlns:a16="http://schemas.microsoft.com/office/drawing/2014/main" id="{94FEE898-3847-5199-A981-96EB4793232B}"/>
+            </a:ext>
+          </a:extLst>
+        </p:cNvPr>
+        <p:cNvGrpSpPr/>
+        <p:nvPr/>
+      </p:nvGrpSpPr>
+      <p:grpSpPr>
+        <a:xfrm>
+          <a:off x="0" y="0"/>
+          <a:ext cx="0" cy="0"/>
+          <a:chOff x="0" y="0"/>
+          <a:chExt cx="0" cy="0"/>
+        </a:xfrm>
+      </p:grpSpPr>
       <p:sp>
         <p:nvSpPr>
           <p:cNvPr id="4" name="Title 3">
@@ -7323,6 +10316,139 @@
           </a:p>
         </p:txBody>
       </p:sp>
+      <p:sp>
+        <p:nvSpPr>
+          <p:cNvPr id="2" name="Slide Number Placeholder 2">
+            <a:extLst>
+              <a:ext uri="{FF2B5EF4-FFF2-40B4-BE49-F238E27FC236}">
+                <a16:creationId xmlns:a16="http://schemas.microsoft.com/office/drawing/2014/main" id="{7C86DD8B-6BC7-7005-07B2-F5897B1374DC}"/>
+              </a:ext>
+            </a:extLst>
+          </p:cNvPr>
+          <p:cNvSpPr txBox="1">
+            <a:spLocks/>
+          </p:cNvSpPr>
+          <p:nvPr/>
+        </p:nvSpPr>
+        <p:spPr>
+          <a:xfrm>
+            <a:off x="8483346" y="4704588"/>
+            <a:ext cx="480060" cy="273844"/>
+          </a:xfrm>
+          <a:prstGeom prst="rect">
+            <a:avLst/>
+          </a:prstGeom>
+          <a:noFill/>
+        </p:spPr>
+        <p:txBody>
+          <a:bodyPr vert="horz" lIns="91440" tIns="45720" rIns="91440" bIns="45720" rtlCol="0" anchor="ctr">
+            <a:normAutofit/>
+          </a:bodyPr>
+          <a:lstStyle>
+            <a:defPPr>
+              <a:defRPr lang="en-US"/>
+            </a:defPPr>
+            <a:lvl1pPr marL="0" algn="ctr" defTabSz="457200" rtl="0" eaLnBrk="1" latinLnBrk="0" hangingPunct="1">
+              <a:defRPr sz="1050" b="1" kern="1200">
+                <a:solidFill>
+                  <a:srgbClr val="FFFFFF"/>
+                </a:solidFill>
+                <a:latin typeface="+mj-lt"/>
+                <a:ea typeface="+mn-ea"/>
+                <a:cs typeface="+mn-cs"/>
+              </a:defRPr>
+            </a:lvl1pPr>
+            <a:lvl2pPr marL="457200" algn="l" defTabSz="457200" rtl="0" eaLnBrk="1" latinLnBrk="0" hangingPunct="1">
+              <a:defRPr sz="1800" kern="1200">
+                <a:solidFill>
+                  <a:schemeClr val="tx1"/>
+                </a:solidFill>
+                <a:latin typeface="+mn-lt"/>
+                <a:ea typeface="+mn-ea"/>
+                <a:cs typeface="+mn-cs"/>
+              </a:defRPr>
+            </a:lvl2pPr>
+            <a:lvl3pPr marL="914400" algn="l" defTabSz="457200" rtl="0" eaLnBrk="1" latinLnBrk="0" hangingPunct="1">
+              <a:defRPr sz="1800" kern="1200">
+                <a:solidFill>
+                  <a:schemeClr val="tx1"/>
+                </a:solidFill>
+                <a:latin typeface="+mn-lt"/>
+                <a:ea typeface="+mn-ea"/>
+                <a:cs typeface="+mn-cs"/>
+              </a:defRPr>
+            </a:lvl3pPr>
+            <a:lvl4pPr marL="1371600" algn="l" defTabSz="457200" rtl="0" eaLnBrk="1" latinLnBrk="0" hangingPunct="1">
+              <a:defRPr sz="1800" kern="1200">
+                <a:solidFill>
+                  <a:schemeClr val="tx1"/>
+                </a:solidFill>
+                <a:latin typeface="+mn-lt"/>
+                <a:ea typeface="+mn-ea"/>
+                <a:cs typeface="+mn-cs"/>
+              </a:defRPr>
+            </a:lvl4pPr>
+            <a:lvl5pPr marL="1828800" algn="l" defTabSz="457200" rtl="0" eaLnBrk="1" latinLnBrk="0" hangingPunct="1">
+              <a:defRPr sz="1800" kern="1200">
+                <a:solidFill>
+                  <a:schemeClr val="tx1"/>
+                </a:solidFill>
+                <a:latin typeface="+mn-lt"/>
+                <a:ea typeface="+mn-ea"/>
+                <a:cs typeface="+mn-cs"/>
+              </a:defRPr>
+            </a:lvl5pPr>
+            <a:lvl6pPr marL="2286000" algn="l" defTabSz="457200" rtl="0" eaLnBrk="1" latinLnBrk="0" hangingPunct="1">
+              <a:defRPr sz="1800" kern="1200">
+                <a:solidFill>
+                  <a:schemeClr val="tx1"/>
+                </a:solidFill>
+                <a:latin typeface="+mn-lt"/>
+                <a:ea typeface="+mn-ea"/>
+                <a:cs typeface="+mn-cs"/>
+              </a:defRPr>
+            </a:lvl6pPr>
+            <a:lvl7pPr marL="2743200" algn="l" defTabSz="457200" rtl="0" eaLnBrk="1" latinLnBrk="0" hangingPunct="1">
+              <a:defRPr sz="1800" kern="1200">
+                <a:solidFill>
+                  <a:schemeClr val="tx1"/>
+                </a:solidFill>
+                <a:latin typeface="+mn-lt"/>
+                <a:ea typeface="+mn-ea"/>
+                <a:cs typeface="+mn-cs"/>
+              </a:defRPr>
+            </a:lvl7pPr>
+            <a:lvl8pPr marL="3200400" algn="l" defTabSz="457200" rtl="0" eaLnBrk="1" latinLnBrk="0" hangingPunct="1">
+              <a:defRPr sz="1800" kern="1200">
+                <a:solidFill>
+                  <a:schemeClr val="tx1"/>
+                </a:solidFill>
+                <a:latin typeface="+mn-lt"/>
+                <a:ea typeface="+mn-ea"/>
+                <a:cs typeface="+mn-cs"/>
+              </a:defRPr>
+            </a:lvl8pPr>
+            <a:lvl9pPr marL="3657600" algn="l" defTabSz="457200" rtl="0" eaLnBrk="1" latinLnBrk="0" hangingPunct="1">
+              <a:defRPr sz="1800" kern="1200">
+                <a:solidFill>
+                  <a:schemeClr val="tx1"/>
+                </a:solidFill>
+                <a:latin typeface="+mn-lt"/>
+                <a:ea typeface="+mn-ea"/>
+                <a:cs typeface="+mn-cs"/>
+              </a:defRPr>
+            </a:lvl9pPr>
+          </a:lstStyle>
+          <a:p>
+            <a:fld id="{7475F232-FFFE-5E6C-5554-2F165DAD28C0}" type="slidenum">
+              <a:rPr lang="en-JP" smtClean="0"/>
+              <a:pPr/>
+              <a:t>6</a:t>
+            </a:fld>
+            <a:endParaRPr lang="en-JP" dirty="0"/>
+          </a:p>
+        </p:txBody>
+      </p:sp>
     </p:spTree>
     <p:extLst>
       <p:ext uri="{BB962C8B-B14F-4D97-AF65-F5344CB8AC3E}">
@@ -7336,557 +10462,7 @@
 </p:sld>
 </file>
 
-<file path=ppt/slides/slide5.xml><?xml version="1.0" encoding="utf-8"?>
-<p:sld xmlns:a="http://schemas.openxmlformats.org/drawingml/2006/main" xmlns:r="http://schemas.openxmlformats.org/officeDocument/2006/relationships" xmlns:p="http://schemas.openxmlformats.org/presentationml/2006/main">
-  <p:cSld>
-    <p:spTree>
-      <p:nvGrpSpPr>
-        <p:cNvPr id="1" name="">
-          <a:extLst>
-            <a:ext uri="{FF2B5EF4-FFF2-40B4-BE49-F238E27FC236}">
-              <a16:creationId xmlns:a16="http://schemas.microsoft.com/office/drawing/2014/main" id="{D407B051-0EF6-8F7B-56A4-C014AFF651F2}"/>
-            </a:ext>
-          </a:extLst>
-        </p:cNvPr>
-        <p:cNvGrpSpPr/>
-        <p:nvPr/>
-      </p:nvGrpSpPr>
-      <p:grpSpPr>
-        <a:xfrm>
-          <a:off x="0" y="0"/>
-          <a:ext cx="0" cy="0"/>
-          <a:chOff x="0" y="0"/>
-          <a:chExt cx="0" cy="0"/>
-        </a:xfrm>
-      </p:grpSpPr>
-      <p:sp>
-        <p:nvSpPr>
-          <p:cNvPr id="3" name="Slide Number Placeholder 2">
-            <a:extLst>
-              <a:ext uri="{FF2B5EF4-FFF2-40B4-BE49-F238E27FC236}">
-                <a16:creationId xmlns:a16="http://schemas.microsoft.com/office/drawing/2014/main" id="{A78766EF-93D2-0D43-4288-D3C14DFB3187}"/>
-              </a:ext>
-            </a:extLst>
-          </p:cNvPr>
-          <p:cNvSpPr>
-            <a:spLocks noGrp="1"/>
-          </p:cNvSpPr>
-          <p:nvPr>
-            <p:ph type="sldNum" idx="1"/>
-          </p:nvPr>
-        </p:nvSpPr>
-        <p:spPr>
-          <a:xfrm>
-            <a:off x="9093107" y="4704588"/>
-            <a:ext cx="480060" cy="273844"/>
-          </a:xfrm>
-        </p:spPr>
-        <p:txBody>
-          <a:bodyPr/>
-          <a:lstStyle/>
-          <a:p>
-            <a:fld id="{7475F232-FFFE-5E6C-5554-2F165DAD28C0}" type="slidenum">
-              <a:rPr lang="en-JP" smtClean="0"/>
-              <a:t>5</a:t>
-            </a:fld>
-            <a:endParaRPr lang="en-JP" dirty="0"/>
-          </a:p>
-        </p:txBody>
-      </p:sp>
-      <p:sp>
-        <p:nvSpPr>
-          <p:cNvPr id="4" name="Title 3">
-            <a:extLst>
-              <a:ext uri="{FF2B5EF4-FFF2-40B4-BE49-F238E27FC236}">
-                <a16:creationId xmlns:a16="http://schemas.microsoft.com/office/drawing/2014/main" id="{33B2CB50-C8A5-0856-D78D-E98286EBC0A2}"/>
-              </a:ext>
-            </a:extLst>
-          </p:cNvPr>
-          <p:cNvSpPr>
-            <a:spLocks noGrp="1"/>
-          </p:cNvSpPr>
-          <p:nvPr>
-            <p:ph type="title" idx="2"/>
-          </p:nvPr>
-        </p:nvSpPr>
-        <p:spPr/>
-        <p:txBody>
-          <a:bodyPr/>
-          <a:lstStyle/>
-          <a:p>
-            <a:pPr marL="0">
-              <a:buClr>
-                <a:srgbClr val="9E3611"/>
-              </a:buClr>
-            </a:pPr>
-            <a:r>
-              <a:rPr lang="en-US" sz="2400" dirty="0">
-                <a:ea typeface="游ゴシック Medium"/>
-                <a:cs typeface="Times New Roman"/>
-              </a:rPr>
-              <a:t>   Pose Graph Optimization</a:t>
-            </a:r>
-          </a:p>
-        </p:txBody>
-      </p:sp>
-      <p:sp>
-        <p:nvSpPr>
-          <p:cNvPr id="16" name="Text Placeholder 1">
-            <a:extLst>
-              <a:ext uri="{FF2B5EF4-FFF2-40B4-BE49-F238E27FC236}">
-                <a16:creationId xmlns:a16="http://schemas.microsoft.com/office/drawing/2014/main" id="{00107EA1-420E-69FE-51CB-AEE3F5273065}"/>
-              </a:ext>
-            </a:extLst>
-          </p:cNvPr>
-          <p:cNvSpPr>
-            <a:spLocks noGrp="1"/>
-          </p:cNvSpPr>
-          <p:nvPr>
-            <p:ph type="body"/>
-          </p:nvPr>
-        </p:nvSpPr>
-        <p:spPr>
-          <a:xfrm>
-            <a:off x="170325" y="707816"/>
-            <a:ext cx="8218099" cy="3986866"/>
-          </a:xfrm>
-        </p:spPr>
-        <p:txBody>
-          <a:bodyPr vert="horz" lIns="91440" tIns="45720" rIns="91440" bIns="45720" rtlCol="0" anchor="t">
-            <a:normAutofit/>
-          </a:bodyPr>
-          <a:lstStyle/>
-          <a:p>
-            <a:pPr marL="0" indent="0">
-              <a:buClr>
-                <a:srgbClr val="9E3611"/>
-              </a:buClr>
-              <a:buNone/>
-            </a:pPr>
-            <a:endParaRPr lang="en-US" sz="2000" b="0" dirty="0"/>
-          </a:p>
-          <a:p>
-            <a:pPr marL="0" indent="0">
-              <a:buClr>
-                <a:srgbClr val="9E3611"/>
-              </a:buClr>
-              <a:buNone/>
-            </a:pPr>
-            <a:endParaRPr lang="en-US" sz="2000" b="0" dirty="0"/>
-          </a:p>
-        </p:txBody>
-      </p:sp>
-      <p:sp>
-        <p:nvSpPr>
-          <p:cNvPr id="5" name="Text Placeholder 1">
-            <a:extLst>
-              <a:ext uri="{FF2B5EF4-FFF2-40B4-BE49-F238E27FC236}">
-                <a16:creationId xmlns:a16="http://schemas.microsoft.com/office/drawing/2014/main" id="{8E78D97E-74FD-2C66-7EBF-94EB233ED3EB}"/>
-              </a:ext>
-            </a:extLst>
-          </p:cNvPr>
-          <p:cNvSpPr txBox="1">
-            <a:spLocks/>
-          </p:cNvSpPr>
-          <p:nvPr/>
-        </p:nvSpPr>
-        <p:spPr>
-          <a:xfrm>
-            <a:off x="322725" y="860216"/>
-            <a:ext cx="8218099" cy="3986866"/>
-          </a:xfrm>
-          <a:prstGeom prst="rect">
-            <a:avLst/>
-          </a:prstGeom>
-          <a:noFill/>
-        </p:spPr>
-        <p:txBody>
-          <a:bodyPr vert="horz" lIns="91440" tIns="45720" rIns="91440" bIns="45720" rtlCol="0" anchor="t">
-            <a:normAutofit/>
-          </a:bodyPr>
-          <a:lstStyle>
-            <a:lvl1pPr marL="137160" indent="-137160" algn="l" defTabSz="685800" rtl="0" eaLnBrk="1" latinLnBrk="0" hangingPunct="1">
-              <a:lnSpc>
-                <a:spcPct val="90000"/>
-              </a:lnSpc>
-              <a:spcBef>
-                <a:spcPts val="900"/>
-              </a:spcBef>
-              <a:buClr>
-                <a:schemeClr val="accent1">
-                  <a:lumMod val="75000"/>
-                </a:schemeClr>
-              </a:buClr>
-              <a:buSzPct val="100000"/>
-              <a:buFont typeface="Arial" panose="020B0604020202020204" pitchFamily="34" charset="0"/>
-              <a:buChar char="•"/>
-              <a:defRPr kumimoji="1" sz="1500" b="1" kern="1200">
-                <a:solidFill>
-                  <a:schemeClr val="tx1"/>
-                </a:solidFill>
-                <a:latin typeface="游ゴシック Medium" panose="020B0500000000000000" pitchFamily="50" charset="-128"/>
-                <a:ea typeface="游ゴシック Medium" panose="020B0500000000000000" pitchFamily="50" charset="-128"/>
-                <a:cs typeface="+mn-cs"/>
-              </a:defRPr>
-            </a:lvl1pPr>
-            <a:lvl2pPr marL="342900" indent="-137160" algn="l" defTabSz="685800" rtl="0" eaLnBrk="1" latinLnBrk="0" hangingPunct="1">
-              <a:lnSpc>
-                <a:spcPct val="90000"/>
-              </a:lnSpc>
-              <a:spcBef>
-                <a:spcPts val="300"/>
-              </a:spcBef>
-              <a:spcAft>
-                <a:spcPts val="150"/>
-              </a:spcAft>
-              <a:buClr>
-                <a:schemeClr val="accent1">
-                  <a:lumMod val="75000"/>
-                </a:schemeClr>
-              </a:buClr>
-              <a:buSzPct val="100000"/>
-              <a:buFont typeface="Arial" panose="020B0604020202020204" pitchFamily="34" charset="0"/>
-              <a:buChar char="•"/>
-              <a:defRPr kumimoji="1" sz="1350" b="1" kern="1200">
-                <a:solidFill>
-                  <a:schemeClr val="tx1"/>
-                </a:solidFill>
-                <a:latin typeface="游ゴシック Medium" panose="020B0500000000000000" pitchFamily="50" charset="-128"/>
-                <a:ea typeface="游ゴシック Medium" panose="020B0500000000000000" pitchFamily="50" charset="-128"/>
-                <a:cs typeface="+mn-cs"/>
-              </a:defRPr>
-            </a:lvl2pPr>
-            <a:lvl3pPr marL="548640" indent="-137160" algn="l" defTabSz="685800" rtl="0" eaLnBrk="1" latinLnBrk="0" hangingPunct="1">
-              <a:lnSpc>
-                <a:spcPct val="90000"/>
-              </a:lnSpc>
-              <a:spcBef>
-                <a:spcPts val="300"/>
-              </a:spcBef>
-              <a:spcAft>
-                <a:spcPts val="150"/>
-              </a:spcAft>
-              <a:buClr>
-                <a:schemeClr val="accent1">
-                  <a:lumMod val="75000"/>
-                </a:schemeClr>
-              </a:buClr>
-              <a:buSzPct val="100000"/>
-              <a:buFont typeface="Arial" panose="020B0604020202020204" pitchFamily="34" charset="0"/>
-              <a:buChar char="•"/>
-              <a:defRPr kumimoji="1" sz="1200" b="1" kern="1200">
-                <a:solidFill>
-                  <a:schemeClr val="tx1"/>
-                </a:solidFill>
-                <a:latin typeface="游ゴシック Medium" panose="020B0500000000000000" pitchFamily="50" charset="-128"/>
-                <a:ea typeface="游ゴシック Medium" panose="020B0500000000000000" pitchFamily="50" charset="-128"/>
-                <a:cs typeface="+mn-cs"/>
-              </a:defRPr>
-            </a:lvl3pPr>
-            <a:lvl4pPr marL="754380" indent="-137160" algn="l" defTabSz="685800" rtl="0" eaLnBrk="1" latinLnBrk="0" hangingPunct="1">
-              <a:lnSpc>
-                <a:spcPct val="90000"/>
-              </a:lnSpc>
-              <a:spcBef>
-                <a:spcPts val="300"/>
-              </a:spcBef>
-              <a:spcAft>
-                <a:spcPts val="150"/>
-              </a:spcAft>
-              <a:buClr>
-                <a:schemeClr val="accent1">
-                  <a:lumMod val="75000"/>
-                </a:schemeClr>
-              </a:buClr>
-              <a:buSzPct val="100000"/>
-              <a:buFont typeface="Arial" panose="020B0604020202020204" pitchFamily="34" charset="0"/>
-              <a:buChar char="•"/>
-              <a:defRPr kumimoji="1" sz="1200" b="1" kern="1200">
-                <a:solidFill>
-                  <a:schemeClr val="tx1"/>
-                </a:solidFill>
-                <a:latin typeface="游ゴシック Medium" panose="020B0500000000000000" pitchFamily="50" charset="-128"/>
-                <a:ea typeface="游ゴシック Medium" panose="020B0500000000000000" pitchFamily="50" charset="-128"/>
-                <a:cs typeface="+mn-cs"/>
-              </a:defRPr>
-            </a:lvl4pPr>
-            <a:lvl5pPr marL="960120" indent="-137160" algn="l" defTabSz="685800" rtl="0" eaLnBrk="1" latinLnBrk="0" hangingPunct="1">
-              <a:lnSpc>
-                <a:spcPct val="90000"/>
-              </a:lnSpc>
-              <a:spcBef>
-                <a:spcPts val="300"/>
-              </a:spcBef>
-              <a:spcAft>
-                <a:spcPts val="150"/>
-              </a:spcAft>
-              <a:buClr>
-                <a:schemeClr val="accent1">
-                  <a:lumMod val="75000"/>
-                </a:schemeClr>
-              </a:buClr>
-              <a:buSzPct val="100000"/>
-              <a:buFont typeface="Arial" panose="020B0604020202020204" pitchFamily="34" charset="0"/>
-              <a:buChar char="•"/>
-              <a:defRPr kumimoji="1" sz="1200" b="1" kern="1200">
-                <a:solidFill>
-                  <a:schemeClr val="tx1"/>
-                </a:solidFill>
-                <a:latin typeface="游ゴシック Medium" panose="020B0500000000000000" pitchFamily="50" charset="-128"/>
-                <a:ea typeface="游ゴシック Medium" panose="020B0500000000000000" pitchFamily="50" charset="-128"/>
-                <a:cs typeface="+mn-cs"/>
-              </a:defRPr>
-            </a:lvl5pPr>
-            <a:lvl6pPr marL="1200000" indent="-171450" algn="l" defTabSz="685800" rtl="0" eaLnBrk="1" latinLnBrk="0" hangingPunct="1">
-              <a:lnSpc>
-                <a:spcPct val="90000"/>
-              </a:lnSpc>
-              <a:spcBef>
-                <a:spcPts val="300"/>
-              </a:spcBef>
-              <a:spcAft>
-                <a:spcPts val="150"/>
-              </a:spcAft>
-              <a:buClr>
-                <a:schemeClr val="accent1">
-                  <a:lumMod val="75000"/>
-                </a:schemeClr>
-              </a:buClr>
-              <a:buSzPct val="100000"/>
-              <a:buFont typeface="Arial" panose="020B0604020202020204" pitchFamily="34" charset="0"/>
-              <a:buChar char="•"/>
-              <a:defRPr kumimoji="1" sz="1200" kern="1200">
-                <a:solidFill>
-                  <a:schemeClr val="tx1"/>
-                </a:solidFill>
-                <a:latin typeface="+mn-lt"/>
-                <a:ea typeface="+mn-ea"/>
-                <a:cs typeface="+mn-cs"/>
-              </a:defRPr>
-            </a:lvl6pPr>
-            <a:lvl7pPr marL="1425000" indent="-171450" algn="l" defTabSz="685800" rtl="0" eaLnBrk="1" latinLnBrk="0" hangingPunct="1">
-              <a:lnSpc>
-                <a:spcPct val="90000"/>
-              </a:lnSpc>
-              <a:spcBef>
-                <a:spcPts val="300"/>
-              </a:spcBef>
-              <a:spcAft>
-                <a:spcPts val="150"/>
-              </a:spcAft>
-              <a:buClr>
-                <a:schemeClr val="accent1">
-                  <a:lumMod val="75000"/>
-                </a:schemeClr>
-              </a:buClr>
-              <a:buSzPct val="100000"/>
-              <a:buFont typeface="Arial" panose="020B0604020202020204" pitchFamily="34" charset="0"/>
-              <a:buChar char="•"/>
-              <a:defRPr kumimoji="1" sz="1200" kern="1200">
-                <a:solidFill>
-                  <a:schemeClr val="tx1"/>
-                </a:solidFill>
-                <a:latin typeface="+mn-lt"/>
-                <a:ea typeface="+mn-ea"/>
-                <a:cs typeface="+mn-cs"/>
-              </a:defRPr>
-            </a:lvl7pPr>
-            <a:lvl8pPr marL="1650000" indent="-171450" algn="l" defTabSz="685800" rtl="0" eaLnBrk="1" latinLnBrk="0" hangingPunct="1">
-              <a:lnSpc>
-                <a:spcPct val="90000"/>
-              </a:lnSpc>
-              <a:spcBef>
-                <a:spcPts val="300"/>
-              </a:spcBef>
-              <a:spcAft>
-                <a:spcPts val="150"/>
-              </a:spcAft>
-              <a:buClr>
-                <a:schemeClr val="accent1">
-                  <a:lumMod val="75000"/>
-                </a:schemeClr>
-              </a:buClr>
-              <a:buSzPct val="100000"/>
-              <a:buFont typeface="Arial" panose="020B0604020202020204" pitchFamily="34" charset="0"/>
-              <a:buChar char="•"/>
-              <a:defRPr kumimoji="1" sz="1200" kern="1200">
-                <a:solidFill>
-                  <a:schemeClr val="tx1"/>
-                </a:solidFill>
-                <a:latin typeface="+mn-lt"/>
-                <a:ea typeface="+mn-ea"/>
-                <a:cs typeface="+mn-cs"/>
-              </a:defRPr>
-            </a:lvl8pPr>
-            <a:lvl9pPr marL="1875000" indent="-171450" algn="l" defTabSz="685800" rtl="0" eaLnBrk="1" latinLnBrk="0" hangingPunct="1">
-              <a:lnSpc>
-                <a:spcPct val="90000"/>
-              </a:lnSpc>
-              <a:spcBef>
-                <a:spcPts val="300"/>
-              </a:spcBef>
-              <a:spcAft>
-                <a:spcPts val="150"/>
-              </a:spcAft>
-              <a:buClr>
-                <a:schemeClr val="accent1">
-                  <a:lumMod val="75000"/>
-                </a:schemeClr>
-              </a:buClr>
-              <a:buSzPct val="100000"/>
-              <a:buFont typeface="Arial" panose="020B0604020202020204" pitchFamily="34" charset="0"/>
-              <a:buChar char="•"/>
-              <a:defRPr kumimoji="1" sz="1200" kern="1200">
-                <a:solidFill>
-                  <a:schemeClr val="tx1"/>
-                </a:solidFill>
-                <a:latin typeface="+mn-lt"/>
-                <a:ea typeface="+mn-ea"/>
-                <a:cs typeface="+mn-cs"/>
-              </a:defRPr>
-            </a:lvl9pPr>
-          </a:lstStyle>
-          <a:p>
-            <a:pPr marL="0" indent="0">
-              <a:buClr>
-                <a:srgbClr val="9E3611"/>
-              </a:buClr>
-              <a:buFont typeface="Arial" panose="020B0604020202020204" pitchFamily="34" charset="0"/>
-              <a:buNone/>
-            </a:pPr>
-            <a:r>
-              <a:rPr lang="en-US" sz="2000" dirty="0"/>
-              <a:t>Optimizer:</a:t>
-            </a:r>
-          </a:p>
-          <a:p>
-            <a:pPr>
-              <a:buClr>
-                <a:srgbClr val="9E3611"/>
-              </a:buClr>
-            </a:pPr>
-            <a:r>
-              <a:rPr lang="en-US" sz="2000" b="0" dirty="0"/>
-              <a:t>Levenberg-Marquardt: Additional factor to Jacobi-matrices for solving linear optimization problem</a:t>
-            </a:r>
-          </a:p>
-          <a:p>
-            <a:pPr marL="0" indent="0">
-              <a:buClr>
-                <a:srgbClr val="9E3611"/>
-              </a:buClr>
-              <a:buNone/>
-            </a:pPr>
-            <a:endParaRPr lang="en-US" sz="2000" b="0" dirty="0"/>
-          </a:p>
-          <a:p>
-            <a:pPr marL="0" indent="0">
-              <a:buClr>
-                <a:srgbClr val="9E3611"/>
-              </a:buClr>
-              <a:buNone/>
-            </a:pPr>
-            <a:r>
-              <a:rPr lang="en-US" sz="2000" dirty="0"/>
-              <a:t>Weights:</a:t>
-            </a:r>
-          </a:p>
-          <a:p>
-            <a:pPr>
-              <a:buClr>
-                <a:srgbClr val="9E3611"/>
-              </a:buClr>
-            </a:pPr>
-            <a:r>
-              <a:rPr lang="en-US" sz="2000" b="0" dirty="0"/>
-              <a:t>Prior (first node): 6*10</a:t>
-            </a:r>
-            <a:r>
-              <a:rPr lang="en-US" sz="2000" b="0" baseline="30000" dirty="0"/>
-              <a:t>5</a:t>
-            </a:r>
-            <a:endParaRPr lang="en-US" sz="2000" b="0" dirty="0"/>
-          </a:p>
-          <a:p>
-            <a:pPr>
-              <a:buClr>
-                <a:srgbClr val="9E3611"/>
-              </a:buClr>
-            </a:pPr>
-            <a:r>
-              <a:rPr lang="en-US" sz="2000" b="0" dirty="0"/>
-              <a:t>Rest: 6*10</a:t>
-            </a:r>
-            <a:r>
-              <a:rPr lang="en-US" sz="2000" b="0" baseline="30000" dirty="0"/>
-              <a:t>2</a:t>
-            </a:r>
-          </a:p>
-          <a:p>
-            <a:pPr marL="0" indent="0">
-              <a:buClr>
-                <a:srgbClr val="9E3611"/>
-              </a:buClr>
-              <a:buNone/>
-            </a:pPr>
-            <a:endParaRPr lang="en-US" sz="2000" b="0" baseline="30000" dirty="0"/>
-          </a:p>
-          <a:p>
-            <a:pPr marL="0" indent="0">
-              <a:buClr>
-                <a:srgbClr val="9E3611"/>
-              </a:buClr>
-              <a:buNone/>
-            </a:pPr>
-            <a:r>
-              <a:rPr lang="en-US" sz="2000" dirty="0">
-                <a:solidFill>
-                  <a:schemeClr val="accent1"/>
-                </a:solidFill>
-              </a:rPr>
-              <a:t>➔ </a:t>
-            </a:r>
-            <a:r>
-              <a:rPr lang="en-US" sz="2000" b="0" dirty="0"/>
-              <a:t>Base line PGO, no individual weighting nor additional edges yet</a:t>
-            </a:r>
-          </a:p>
-          <a:p>
-            <a:pPr marL="0" indent="0">
-              <a:buClr>
-                <a:srgbClr val="9E3611"/>
-              </a:buClr>
-              <a:buFont typeface="Arial" panose="020B0604020202020204" pitchFamily="34" charset="0"/>
-              <a:buNone/>
-            </a:pPr>
-            <a:endParaRPr lang="en-US" sz="2000" b="0" dirty="0"/>
-          </a:p>
-          <a:p>
-            <a:pPr marL="0" indent="0">
-              <a:buClr>
-                <a:srgbClr val="9E3611"/>
-              </a:buClr>
-              <a:buFont typeface="Arial" panose="020B0604020202020204" pitchFamily="34" charset="0"/>
-              <a:buNone/>
-            </a:pPr>
-            <a:endParaRPr lang="en-US" sz="2000" b="0" dirty="0"/>
-          </a:p>
-        </p:txBody>
-      </p:sp>
-    </p:spTree>
-    <p:extLst>
-      <p:ext uri="{BB962C8B-B14F-4D97-AF65-F5344CB8AC3E}">
-        <p14:creationId xmlns:p14="http://schemas.microsoft.com/office/powerpoint/2010/main" val="1411381841"/>
-      </p:ext>
-    </p:extLst>
-  </p:cSld>
-  <p:clrMapOvr>
-    <a:masterClrMapping/>
-  </p:clrMapOvr>
-</p:sld>
-</file>
-
-<file path=ppt/slides/slide6.xml><?xml version="1.0" encoding="utf-8"?>
+<file path=ppt/slides/slide7.xml><?xml version="1.0" encoding="utf-8"?>
 <p:sld xmlns:a="http://schemas.openxmlformats.org/drawingml/2006/main" xmlns:r="http://schemas.openxmlformats.org/officeDocument/2006/relationships" xmlns:p="http://schemas.openxmlformats.org/presentationml/2006/main">
   <p:cSld>
     <p:spTree>
@@ -7911,40 +10487,6 @@
       </p:grpSpPr>
       <p:sp>
         <p:nvSpPr>
-          <p:cNvPr id="3" name="Slide Number Placeholder 2">
-            <a:extLst>
-              <a:ext uri="{FF2B5EF4-FFF2-40B4-BE49-F238E27FC236}">
-                <a16:creationId xmlns:a16="http://schemas.microsoft.com/office/drawing/2014/main" id="{1DE1202D-E333-3B9D-F54E-CC38ABA8E521}"/>
-              </a:ext>
-            </a:extLst>
-          </p:cNvPr>
-          <p:cNvSpPr>
-            <a:spLocks noGrp="1"/>
-          </p:cNvSpPr>
-          <p:nvPr>
-            <p:ph type="sldNum" idx="1"/>
-          </p:nvPr>
-        </p:nvSpPr>
-        <p:spPr>
-          <a:xfrm>
-            <a:off x="9093107" y="4704588"/>
-            <a:ext cx="480060" cy="273844"/>
-          </a:xfrm>
-        </p:spPr>
-        <p:txBody>
-          <a:bodyPr/>
-          <a:lstStyle/>
-          <a:p>
-            <a:fld id="{7475F232-FFFE-5E6C-5554-2F165DAD28C0}" type="slidenum">
-              <a:rPr lang="en-JP" smtClean="0"/>
-              <a:t>6</a:t>
-            </a:fld>
-            <a:endParaRPr lang="en-JP" dirty="0"/>
-          </a:p>
-        </p:txBody>
-      </p:sp>
-      <p:sp>
-        <p:nvSpPr>
           <p:cNvPr id="4" name="Title 3">
             <a:extLst>
               <a:ext uri="{FF2B5EF4-FFF2-40B4-BE49-F238E27FC236}">
@@ -7994,7 +10536,7 @@
           <p:nvPr>
             <p:extLst>
               <p:ext uri="{D42A27DB-BD31-4B8C-83A1-F6EECF244321}">
-                <p14:modId xmlns:p14="http://schemas.microsoft.com/office/powerpoint/2010/main" val="759695160"/>
+                <p14:modId xmlns:p14="http://schemas.microsoft.com/office/powerpoint/2010/main" val="387835560"/>
               </p:ext>
             </p:extLst>
           </p:nvPr>
@@ -8228,7 +10770,7 @@
                     <a:p>
                       <a:r>
                         <a:rPr lang="en-US" dirty="0"/>
-                        <a:t>AVG GPE: </a:t>
+                        <a:t>GPE: </a:t>
                       </a:r>
                       <a:r>
                         <a:rPr kumimoji="1" lang="en-US" sz="1350" b="0" kern="1200" dirty="0">
@@ -8267,6 +10809,15 @@
                       <a:r>
                         <a:rPr lang="en-US" dirty="0"/>
                         <a:t>FDR: 28.6%</a:t>
+                      </a:r>
+                    </a:p>
+                    <a:p>
+                      <a:endParaRPr lang="en-US" dirty="0"/>
+                    </a:p>
+                    <a:p>
+                      <a:r>
+                        <a:rPr lang="en-US" dirty="0"/>
+                        <a:t>GPE: /</a:t>
                       </a:r>
                     </a:p>
                   </a:txBody>
@@ -8444,6 +10995,15 @@
                         <a:t>FDR: 72.5%</a:t>
                       </a:r>
                     </a:p>
+                    <a:p>
+                      <a:endParaRPr lang="en-US" dirty="0"/>
+                    </a:p>
+                    <a:p>
+                      <a:r>
+                        <a:rPr lang="en-US" dirty="0"/>
+                        <a:t>GPE: /</a:t>
+                      </a:r>
+                    </a:p>
                   </a:txBody>
                   <a:tcPr/>
                 </a:tc>
@@ -8495,6 +11055,139 @@
           </a:p>
         </p:txBody>
       </p:sp>
+      <p:sp>
+        <p:nvSpPr>
+          <p:cNvPr id="5" name="Slide Number Placeholder 2">
+            <a:extLst>
+              <a:ext uri="{FF2B5EF4-FFF2-40B4-BE49-F238E27FC236}">
+                <a16:creationId xmlns:a16="http://schemas.microsoft.com/office/drawing/2014/main" id="{D88CC64F-AB4B-B3DB-7F56-91CD7CBFDA3A}"/>
+              </a:ext>
+            </a:extLst>
+          </p:cNvPr>
+          <p:cNvSpPr txBox="1">
+            <a:spLocks/>
+          </p:cNvSpPr>
+          <p:nvPr/>
+        </p:nvSpPr>
+        <p:spPr>
+          <a:xfrm>
+            <a:off x="8483346" y="4704588"/>
+            <a:ext cx="480060" cy="273844"/>
+          </a:xfrm>
+          <a:prstGeom prst="rect">
+            <a:avLst/>
+          </a:prstGeom>
+          <a:noFill/>
+        </p:spPr>
+        <p:txBody>
+          <a:bodyPr vert="horz" lIns="91440" tIns="45720" rIns="91440" bIns="45720" rtlCol="0" anchor="ctr">
+            <a:normAutofit/>
+          </a:bodyPr>
+          <a:lstStyle>
+            <a:defPPr>
+              <a:defRPr lang="en-US"/>
+            </a:defPPr>
+            <a:lvl1pPr marL="0" algn="ctr" defTabSz="457200" rtl="0" eaLnBrk="1" latinLnBrk="0" hangingPunct="1">
+              <a:defRPr sz="1050" b="1" kern="1200">
+                <a:solidFill>
+                  <a:srgbClr val="FFFFFF"/>
+                </a:solidFill>
+                <a:latin typeface="+mj-lt"/>
+                <a:ea typeface="+mn-ea"/>
+                <a:cs typeface="+mn-cs"/>
+              </a:defRPr>
+            </a:lvl1pPr>
+            <a:lvl2pPr marL="457200" algn="l" defTabSz="457200" rtl="0" eaLnBrk="1" latinLnBrk="0" hangingPunct="1">
+              <a:defRPr sz="1800" kern="1200">
+                <a:solidFill>
+                  <a:schemeClr val="tx1"/>
+                </a:solidFill>
+                <a:latin typeface="+mn-lt"/>
+                <a:ea typeface="+mn-ea"/>
+                <a:cs typeface="+mn-cs"/>
+              </a:defRPr>
+            </a:lvl2pPr>
+            <a:lvl3pPr marL="914400" algn="l" defTabSz="457200" rtl="0" eaLnBrk="1" latinLnBrk="0" hangingPunct="1">
+              <a:defRPr sz="1800" kern="1200">
+                <a:solidFill>
+                  <a:schemeClr val="tx1"/>
+                </a:solidFill>
+                <a:latin typeface="+mn-lt"/>
+                <a:ea typeface="+mn-ea"/>
+                <a:cs typeface="+mn-cs"/>
+              </a:defRPr>
+            </a:lvl3pPr>
+            <a:lvl4pPr marL="1371600" algn="l" defTabSz="457200" rtl="0" eaLnBrk="1" latinLnBrk="0" hangingPunct="1">
+              <a:defRPr sz="1800" kern="1200">
+                <a:solidFill>
+                  <a:schemeClr val="tx1"/>
+                </a:solidFill>
+                <a:latin typeface="+mn-lt"/>
+                <a:ea typeface="+mn-ea"/>
+                <a:cs typeface="+mn-cs"/>
+              </a:defRPr>
+            </a:lvl4pPr>
+            <a:lvl5pPr marL="1828800" algn="l" defTabSz="457200" rtl="0" eaLnBrk="1" latinLnBrk="0" hangingPunct="1">
+              <a:defRPr sz="1800" kern="1200">
+                <a:solidFill>
+                  <a:schemeClr val="tx1"/>
+                </a:solidFill>
+                <a:latin typeface="+mn-lt"/>
+                <a:ea typeface="+mn-ea"/>
+                <a:cs typeface="+mn-cs"/>
+              </a:defRPr>
+            </a:lvl5pPr>
+            <a:lvl6pPr marL="2286000" algn="l" defTabSz="457200" rtl="0" eaLnBrk="1" latinLnBrk="0" hangingPunct="1">
+              <a:defRPr sz="1800" kern="1200">
+                <a:solidFill>
+                  <a:schemeClr val="tx1"/>
+                </a:solidFill>
+                <a:latin typeface="+mn-lt"/>
+                <a:ea typeface="+mn-ea"/>
+                <a:cs typeface="+mn-cs"/>
+              </a:defRPr>
+            </a:lvl6pPr>
+            <a:lvl7pPr marL="2743200" algn="l" defTabSz="457200" rtl="0" eaLnBrk="1" latinLnBrk="0" hangingPunct="1">
+              <a:defRPr sz="1800" kern="1200">
+                <a:solidFill>
+                  <a:schemeClr val="tx1"/>
+                </a:solidFill>
+                <a:latin typeface="+mn-lt"/>
+                <a:ea typeface="+mn-ea"/>
+                <a:cs typeface="+mn-cs"/>
+              </a:defRPr>
+            </a:lvl7pPr>
+            <a:lvl8pPr marL="3200400" algn="l" defTabSz="457200" rtl="0" eaLnBrk="1" latinLnBrk="0" hangingPunct="1">
+              <a:defRPr sz="1800" kern="1200">
+                <a:solidFill>
+                  <a:schemeClr val="tx1"/>
+                </a:solidFill>
+                <a:latin typeface="+mn-lt"/>
+                <a:ea typeface="+mn-ea"/>
+                <a:cs typeface="+mn-cs"/>
+              </a:defRPr>
+            </a:lvl8pPr>
+            <a:lvl9pPr marL="3657600" algn="l" defTabSz="457200" rtl="0" eaLnBrk="1" latinLnBrk="0" hangingPunct="1">
+              <a:defRPr sz="1800" kern="1200">
+                <a:solidFill>
+                  <a:schemeClr val="tx1"/>
+                </a:solidFill>
+                <a:latin typeface="+mn-lt"/>
+                <a:ea typeface="+mn-ea"/>
+                <a:cs typeface="+mn-cs"/>
+              </a:defRPr>
+            </a:lvl9pPr>
+          </a:lstStyle>
+          <a:p>
+            <a:fld id="{7475F232-FFFE-5E6C-5554-2F165DAD28C0}" type="slidenum">
+              <a:rPr lang="en-JP" smtClean="0"/>
+              <a:pPr/>
+              <a:t>7</a:t>
+            </a:fld>
+            <a:endParaRPr lang="en-JP" dirty="0"/>
+          </a:p>
+        </p:txBody>
+      </p:sp>
     </p:spTree>
     <p:extLst>
       <p:ext uri="{BB962C8B-B14F-4D97-AF65-F5344CB8AC3E}">
@@ -8508,7 +11201,7 @@
 </p:sld>
 </file>
 
-<file path=ppt/slides/slide7.xml><?xml version="1.0" encoding="utf-8"?>
+<file path=ppt/slides/slide8.xml><?xml version="1.0" encoding="utf-8"?>
 <p:sld xmlns:a="http://schemas.openxmlformats.org/drawingml/2006/main" xmlns:r="http://schemas.openxmlformats.org/officeDocument/2006/relationships" xmlns:p="http://schemas.openxmlformats.org/presentationml/2006/main">
   <p:cSld>
     <p:spTree>
@@ -8531,40 +11224,6 @@
           <a:chExt cx="0" cy="0"/>
         </a:xfrm>
       </p:grpSpPr>
-      <p:sp>
-        <p:nvSpPr>
-          <p:cNvPr id="3" name="Slide Number Placeholder 2">
-            <a:extLst>
-              <a:ext uri="{FF2B5EF4-FFF2-40B4-BE49-F238E27FC236}">
-                <a16:creationId xmlns:a16="http://schemas.microsoft.com/office/drawing/2014/main" id="{79609723-C70E-1320-4521-B0D32D043EF8}"/>
-              </a:ext>
-            </a:extLst>
-          </p:cNvPr>
-          <p:cNvSpPr>
-            <a:spLocks noGrp="1"/>
-          </p:cNvSpPr>
-          <p:nvPr>
-            <p:ph type="sldNum" idx="1"/>
-          </p:nvPr>
-        </p:nvSpPr>
-        <p:spPr>
-          <a:xfrm>
-            <a:off x="9093107" y="4704588"/>
-            <a:ext cx="480060" cy="273844"/>
-          </a:xfrm>
-        </p:spPr>
-        <p:txBody>
-          <a:bodyPr/>
-          <a:lstStyle/>
-          <a:p>
-            <a:fld id="{7475F232-FFFE-5E6C-5554-2F165DAD28C0}" type="slidenum">
-              <a:rPr lang="en-JP" smtClean="0"/>
-              <a:t>7</a:t>
-            </a:fld>
-            <a:endParaRPr lang="en-JP" dirty="0"/>
-          </a:p>
-        </p:txBody>
-      </p:sp>
       <p:sp>
         <p:nvSpPr>
           <p:cNvPr id="4" name="Title 3">
@@ -8732,8 +11391,12 @@
               <a:buNone/>
             </a:pPr>
             <a:r>
+              <a:rPr lang="en-US" sz="2000"/>
+              <a:t>Near-zero dis-/improvement </a:t>
+            </a:r>
+            <a:r>
               <a:rPr lang="en-US" sz="2000" dirty="0"/>
-              <a:t>Near-zero improvement from PGO:</a:t>
+              <a:t>from PGO:</a:t>
             </a:r>
           </a:p>
           <a:p>
@@ -8755,6 +11418,139 @@
               <a:buNone/>
             </a:pPr>
             <a:endParaRPr lang="en-US" sz="2000" b="0" dirty="0"/>
+          </a:p>
+        </p:txBody>
+      </p:sp>
+      <p:sp>
+        <p:nvSpPr>
+          <p:cNvPr id="2" name="Slide Number Placeholder 2">
+            <a:extLst>
+              <a:ext uri="{FF2B5EF4-FFF2-40B4-BE49-F238E27FC236}">
+                <a16:creationId xmlns:a16="http://schemas.microsoft.com/office/drawing/2014/main" id="{32245063-E226-CC1B-6F00-A4FA83A243C8}"/>
+              </a:ext>
+            </a:extLst>
+          </p:cNvPr>
+          <p:cNvSpPr txBox="1">
+            <a:spLocks/>
+          </p:cNvSpPr>
+          <p:nvPr/>
+        </p:nvSpPr>
+        <p:spPr>
+          <a:xfrm>
+            <a:off x="8483346" y="4704588"/>
+            <a:ext cx="480060" cy="273844"/>
+          </a:xfrm>
+          <a:prstGeom prst="rect">
+            <a:avLst/>
+          </a:prstGeom>
+          <a:noFill/>
+        </p:spPr>
+        <p:txBody>
+          <a:bodyPr vert="horz" lIns="91440" tIns="45720" rIns="91440" bIns="45720" rtlCol="0" anchor="ctr">
+            <a:normAutofit/>
+          </a:bodyPr>
+          <a:lstStyle>
+            <a:defPPr>
+              <a:defRPr lang="en-US"/>
+            </a:defPPr>
+            <a:lvl1pPr marL="0" algn="ctr" defTabSz="457200" rtl="0" eaLnBrk="1" latinLnBrk="0" hangingPunct="1">
+              <a:defRPr sz="1050" b="1" kern="1200">
+                <a:solidFill>
+                  <a:srgbClr val="FFFFFF"/>
+                </a:solidFill>
+                <a:latin typeface="+mj-lt"/>
+                <a:ea typeface="+mn-ea"/>
+                <a:cs typeface="+mn-cs"/>
+              </a:defRPr>
+            </a:lvl1pPr>
+            <a:lvl2pPr marL="457200" algn="l" defTabSz="457200" rtl="0" eaLnBrk="1" latinLnBrk="0" hangingPunct="1">
+              <a:defRPr sz="1800" kern="1200">
+                <a:solidFill>
+                  <a:schemeClr val="tx1"/>
+                </a:solidFill>
+                <a:latin typeface="+mn-lt"/>
+                <a:ea typeface="+mn-ea"/>
+                <a:cs typeface="+mn-cs"/>
+              </a:defRPr>
+            </a:lvl2pPr>
+            <a:lvl3pPr marL="914400" algn="l" defTabSz="457200" rtl="0" eaLnBrk="1" latinLnBrk="0" hangingPunct="1">
+              <a:defRPr sz="1800" kern="1200">
+                <a:solidFill>
+                  <a:schemeClr val="tx1"/>
+                </a:solidFill>
+                <a:latin typeface="+mn-lt"/>
+                <a:ea typeface="+mn-ea"/>
+                <a:cs typeface="+mn-cs"/>
+              </a:defRPr>
+            </a:lvl3pPr>
+            <a:lvl4pPr marL="1371600" algn="l" defTabSz="457200" rtl="0" eaLnBrk="1" latinLnBrk="0" hangingPunct="1">
+              <a:defRPr sz="1800" kern="1200">
+                <a:solidFill>
+                  <a:schemeClr val="tx1"/>
+                </a:solidFill>
+                <a:latin typeface="+mn-lt"/>
+                <a:ea typeface="+mn-ea"/>
+                <a:cs typeface="+mn-cs"/>
+              </a:defRPr>
+            </a:lvl4pPr>
+            <a:lvl5pPr marL="1828800" algn="l" defTabSz="457200" rtl="0" eaLnBrk="1" latinLnBrk="0" hangingPunct="1">
+              <a:defRPr sz="1800" kern="1200">
+                <a:solidFill>
+                  <a:schemeClr val="tx1"/>
+                </a:solidFill>
+                <a:latin typeface="+mn-lt"/>
+                <a:ea typeface="+mn-ea"/>
+                <a:cs typeface="+mn-cs"/>
+              </a:defRPr>
+            </a:lvl5pPr>
+            <a:lvl6pPr marL="2286000" algn="l" defTabSz="457200" rtl="0" eaLnBrk="1" latinLnBrk="0" hangingPunct="1">
+              <a:defRPr sz="1800" kern="1200">
+                <a:solidFill>
+                  <a:schemeClr val="tx1"/>
+                </a:solidFill>
+                <a:latin typeface="+mn-lt"/>
+                <a:ea typeface="+mn-ea"/>
+                <a:cs typeface="+mn-cs"/>
+              </a:defRPr>
+            </a:lvl6pPr>
+            <a:lvl7pPr marL="2743200" algn="l" defTabSz="457200" rtl="0" eaLnBrk="1" latinLnBrk="0" hangingPunct="1">
+              <a:defRPr sz="1800" kern="1200">
+                <a:solidFill>
+                  <a:schemeClr val="tx1"/>
+                </a:solidFill>
+                <a:latin typeface="+mn-lt"/>
+                <a:ea typeface="+mn-ea"/>
+                <a:cs typeface="+mn-cs"/>
+              </a:defRPr>
+            </a:lvl7pPr>
+            <a:lvl8pPr marL="3200400" algn="l" defTabSz="457200" rtl="0" eaLnBrk="1" latinLnBrk="0" hangingPunct="1">
+              <a:defRPr sz="1800" kern="1200">
+                <a:solidFill>
+                  <a:schemeClr val="tx1"/>
+                </a:solidFill>
+                <a:latin typeface="+mn-lt"/>
+                <a:ea typeface="+mn-ea"/>
+                <a:cs typeface="+mn-cs"/>
+              </a:defRPr>
+            </a:lvl8pPr>
+            <a:lvl9pPr marL="3657600" algn="l" defTabSz="457200" rtl="0" eaLnBrk="1" latinLnBrk="0" hangingPunct="1">
+              <a:defRPr sz="1800" kern="1200">
+                <a:solidFill>
+                  <a:schemeClr val="tx1"/>
+                </a:solidFill>
+                <a:latin typeface="+mn-lt"/>
+                <a:ea typeface="+mn-ea"/>
+                <a:cs typeface="+mn-cs"/>
+              </a:defRPr>
+            </a:lvl9pPr>
+          </a:lstStyle>
+          <a:p>
+            <a:fld id="{7475F232-FFFE-5E6C-5554-2F165DAD28C0}" type="slidenum">
+              <a:rPr lang="en-JP" smtClean="0"/>
+              <a:pPr/>
+              <a:t>8</a:t>
+            </a:fld>
+            <a:endParaRPr lang="en-JP" dirty="0"/>
           </a:p>
         </p:txBody>
       </p:sp>
@@ -8762,181 +11558,6 @@
     <p:extLst>
       <p:ext uri="{BB962C8B-B14F-4D97-AF65-F5344CB8AC3E}">
         <p14:creationId xmlns:p14="http://schemas.microsoft.com/office/powerpoint/2010/main" val="4193761839"/>
-      </p:ext>
-    </p:extLst>
-  </p:cSld>
-  <p:clrMapOvr>
-    <a:masterClrMapping/>
-  </p:clrMapOvr>
-</p:sld>
-</file>
-
-<file path=ppt/slides/slide8.xml><?xml version="1.0" encoding="utf-8"?>
-<p:sld xmlns:a="http://schemas.openxmlformats.org/drawingml/2006/main" xmlns:r="http://schemas.openxmlformats.org/officeDocument/2006/relationships" xmlns:p="http://schemas.openxmlformats.org/presentationml/2006/main">
-  <p:cSld>
-    <p:spTree>
-      <p:nvGrpSpPr>
-        <p:cNvPr id="1" name="">
-          <a:extLst>
-            <a:ext uri="{FF2B5EF4-FFF2-40B4-BE49-F238E27FC236}">
-              <a16:creationId xmlns:a16="http://schemas.microsoft.com/office/drawing/2014/main" id="{5AE726CA-0C73-DB6F-B294-0390FAAB0F12}"/>
-            </a:ext>
-          </a:extLst>
-        </p:cNvPr>
-        <p:cNvGrpSpPr/>
-        <p:nvPr/>
-      </p:nvGrpSpPr>
-      <p:grpSpPr>
-        <a:xfrm>
-          <a:off x="0" y="0"/>
-          <a:ext cx="0" cy="0"/>
-          <a:chOff x="0" y="0"/>
-          <a:chExt cx="0" cy="0"/>
-        </a:xfrm>
-      </p:grpSpPr>
-      <p:sp>
-        <p:nvSpPr>
-          <p:cNvPr id="3" name="Slide Number Placeholder 2">
-            <a:extLst>
-              <a:ext uri="{FF2B5EF4-FFF2-40B4-BE49-F238E27FC236}">
-                <a16:creationId xmlns:a16="http://schemas.microsoft.com/office/drawing/2014/main" id="{92C7D031-FCFC-5294-550C-4173DEE77689}"/>
-              </a:ext>
-            </a:extLst>
-          </p:cNvPr>
-          <p:cNvSpPr>
-            <a:spLocks noGrp="1"/>
-          </p:cNvSpPr>
-          <p:nvPr>
-            <p:ph type="sldNum" idx="1"/>
-          </p:nvPr>
-        </p:nvSpPr>
-        <p:spPr>
-          <a:xfrm>
-            <a:off x="9093107" y="4704588"/>
-            <a:ext cx="480060" cy="273844"/>
-          </a:xfrm>
-        </p:spPr>
-        <p:txBody>
-          <a:bodyPr/>
-          <a:lstStyle/>
-          <a:p>
-            <a:fld id="{7475F232-FFFE-5E6C-5554-2F165DAD28C0}" type="slidenum">
-              <a:rPr lang="en-JP" smtClean="0"/>
-              <a:t>8</a:t>
-            </a:fld>
-            <a:endParaRPr lang="en-JP" dirty="0"/>
-          </a:p>
-        </p:txBody>
-      </p:sp>
-      <p:sp>
-        <p:nvSpPr>
-          <p:cNvPr id="4" name="Title 3">
-            <a:extLst>
-              <a:ext uri="{FF2B5EF4-FFF2-40B4-BE49-F238E27FC236}">
-                <a16:creationId xmlns:a16="http://schemas.microsoft.com/office/drawing/2014/main" id="{56478381-4841-7228-4B1D-4F7BD3499DF0}"/>
-              </a:ext>
-            </a:extLst>
-          </p:cNvPr>
-          <p:cNvSpPr>
-            <a:spLocks noGrp="1"/>
-          </p:cNvSpPr>
-          <p:nvPr>
-            <p:ph type="title" idx="2"/>
-          </p:nvPr>
-        </p:nvSpPr>
-        <p:spPr/>
-        <p:txBody>
-          <a:bodyPr/>
-          <a:lstStyle/>
-          <a:p>
-            <a:pPr marL="0">
-              <a:buClr>
-                <a:srgbClr val="9E3611"/>
-              </a:buClr>
-            </a:pPr>
-            <a:r>
-              <a:rPr lang="en-US" sz="2400" dirty="0">
-                <a:ea typeface="游ゴシック Medium"/>
-                <a:cs typeface="Times New Roman"/>
-              </a:rPr>
-              <a:t>   What else?</a:t>
-            </a:r>
-          </a:p>
-        </p:txBody>
-      </p:sp>
-      <p:sp>
-        <p:nvSpPr>
-          <p:cNvPr id="16" name="Text Placeholder 1">
-            <a:extLst>
-              <a:ext uri="{FF2B5EF4-FFF2-40B4-BE49-F238E27FC236}">
-                <a16:creationId xmlns:a16="http://schemas.microsoft.com/office/drawing/2014/main" id="{321A1F38-7EB0-6CA7-732A-8A35F3AD5CB0}"/>
-              </a:ext>
-            </a:extLst>
-          </p:cNvPr>
-          <p:cNvSpPr>
-            <a:spLocks noGrp="1"/>
-          </p:cNvSpPr>
-          <p:nvPr>
-            <p:ph type="body"/>
-          </p:nvPr>
-        </p:nvSpPr>
-        <p:spPr>
-          <a:xfrm>
-            <a:off x="170325" y="707816"/>
-            <a:ext cx="8218099" cy="3986866"/>
-          </a:xfrm>
-        </p:spPr>
-        <p:txBody>
-          <a:bodyPr vert="horz" lIns="91440" tIns="45720" rIns="91440" bIns="45720" rtlCol="0" anchor="t">
-            <a:normAutofit/>
-          </a:bodyPr>
-          <a:lstStyle/>
-          <a:p>
-            <a:pPr>
-              <a:buClr>
-                <a:srgbClr val="9E3611"/>
-              </a:buClr>
-            </a:pPr>
-            <a:r>
-              <a:rPr lang="en-US" sz="2000" b="0" dirty="0"/>
-              <a:t>Writing Master thesis</a:t>
-            </a:r>
-          </a:p>
-          <a:p>
-            <a:pPr marL="0" indent="0">
-              <a:buClr>
-                <a:srgbClr val="9E3611"/>
-              </a:buClr>
-              <a:buNone/>
-            </a:pPr>
-            <a:endParaRPr lang="en-US" sz="2000" b="0" dirty="0"/>
-          </a:p>
-          <a:p>
-            <a:pPr>
-              <a:buClr>
-                <a:srgbClr val="9E3611"/>
-              </a:buClr>
-            </a:pPr>
-            <a:r>
-              <a:rPr lang="en-US" sz="2000" b="0" dirty="0"/>
-              <a:t>Reading</a:t>
-            </a:r>
-          </a:p>
-          <a:p>
-            <a:pPr marL="0" indent="0">
-              <a:buClr>
-                <a:srgbClr val="9E3611"/>
-              </a:buClr>
-              <a:buNone/>
-            </a:pPr>
-            <a:endParaRPr lang="en-US" sz="2000" b="0" dirty="0"/>
-          </a:p>
-        </p:txBody>
-      </p:sp>
-    </p:spTree>
-    <p:extLst>
-      <p:ext uri="{BB962C8B-B14F-4D97-AF65-F5344CB8AC3E}">
-        <p14:creationId xmlns:p14="http://schemas.microsoft.com/office/powerpoint/2010/main" val="3849738365"/>
       </p:ext>
     </p:extLst>
   </p:cSld>
@@ -8971,40 +11592,6 @@
       </p:grpSpPr>
       <p:sp>
         <p:nvSpPr>
-          <p:cNvPr id="3" name="Slide Number Placeholder 2">
-            <a:extLst>
-              <a:ext uri="{FF2B5EF4-FFF2-40B4-BE49-F238E27FC236}">
-                <a16:creationId xmlns:a16="http://schemas.microsoft.com/office/drawing/2014/main" id="{D4B1C4A8-5367-B5DE-7B2A-2E206E2D51BE}"/>
-              </a:ext>
-            </a:extLst>
-          </p:cNvPr>
-          <p:cNvSpPr>
-            <a:spLocks noGrp="1"/>
-          </p:cNvSpPr>
-          <p:nvPr>
-            <p:ph type="sldNum" idx="1"/>
-          </p:nvPr>
-        </p:nvSpPr>
-        <p:spPr>
-          <a:xfrm>
-            <a:off x="9093107" y="4704588"/>
-            <a:ext cx="480060" cy="273844"/>
-          </a:xfrm>
-        </p:spPr>
-        <p:txBody>
-          <a:bodyPr/>
-          <a:lstStyle/>
-          <a:p>
-            <a:fld id="{7475F232-FFFE-5E6C-5554-2F165DAD28C0}" type="slidenum">
-              <a:rPr lang="en-JP" smtClean="0"/>
-              <a:t>9</a:t>
-            </a:fld>
-            <a:endParaRPr lang="en-JP" dirty="0"/>
-          </a:p>
-        </p:txBody>
-      </p:sp>
-      <p:sp>
-        <p:nvSpPr>
           <p:cNvPr id="4" name="Title 3">
             <a:extLst>
               <a:ext uri="{FF2B5EF4-FFF2-40B4-BE49-F238E27FC236}">
@@ -9152,6 +11739,139 @@
               <a:buNone/>
             </a:pPr>
             <a:endParaRPr lang="en-US" sz="2000" b="0" dirty="0"/>
+          </a:p>
+        </p:txBody>
+      </p:sp>
+      <p:sp>
+        <p:nvSpPr>
+          <p:cNvPr id="2" name="Slide Number Placeholder 2">
+            <a:extLst>
+              <a:ext uri="{FF2B5EF4-FFF2-40B4-BE49-F238E27FC236}">
+                <a16:creationId xmlns:a16="http://schemas.microsoft.com/office/drawing/2014/main" id="{6FE72020-ED4A-43E5-D50F-64BDDD3FDBD4}"/>
+              </a:ext>
+            </a:extLst>
+          </p:cNvPr>
+          <p:cNvSpPr txBox="1">
+            <a:spLocks/>
+          </p:cNvSpPr>
+          <p:nvPr/>
+        </p:nvSpPr>
+        <p:spPr>
+          <a:xfrm>
+            <a:off x="8483346" y="4704588"/>
+            <a:ext cx="480060" cy="273844"/>
+          </a:xfrm>
+          <a:prstGeom prst="rect">
+            <a:avLst/>
+          </a:prstGeom>
+          <a:noFill/>
+        </p:spPr>
+        <p:txBody>
+          <a:bodyPr vert="horz" lIns="91440" tIns="45720" rIns="91440" bIns="45720" rtlCol="0" anchor="ctr">
+            <a:normAutofit/>
+          </a:bodyPr>
+          <a:lstStyle>
+            <a:defPPr>
+              <a:defRPr lang="en-US"/>
+            </a:defPPr>
+            <a:lvl1pPr marL="0" algn="ctr" defTabSz="457200" rtl="0" eaLnBrk="1" latinLnBrk="0" hangingPunct="1">
+              <a:defRPr sz="1050" b="1" kern="1200">
+                <a:solidFill>
+                  <a:srgbClr val="FFFFFF"/>
+                </a:solidFill>
+                <a:latin typeface="+mj-lt"/>
+                <a:ea typeface="+mn-ea"/>
+                <a:cs typeface="+mn-cs"/>
+              </a:defRPr>
+            </a:lvl1pPr>
+            <a:lvl2pPr marL="457200" algn="l" defTabSz="457200" rtl="0" eaLnBrk="1" latinLnBrk="0" hangingPunct="1">
+              <a:defRPr sz="1800" kern="1200">
+                <a:solidFill>
+                  <a:schemeClr val="tx1"/>
+                </a:solidFill>
+                <a:latin typeface="+mn-lt"/>
+                <a:ea typeface="+mn-ea"/>
+                <a:cs typeface="+mn-cs"/>
+              </a:defRPr>
+            </a:lvl2pPr>
+            <a:lvl3pPr marL="914400" algn="l" defTabSz="457200" rtl="0" eaLnBrk="1" latinLnBrk="0" hangingPunct="1">
+              <a:defRPr sz="1800" kern="1200">
+                <a:solidFill>
+                  <a:schemeClr val="tx1"/>
+                </a:solidFill>
+                <a:latin typeface="+mn-lt"/>
+                <a:ea typeface="+mn-ea"/>
+                <a:cs typeface="+mn-cs"/>
+              </a:defRPr>
+            </a:lvl3pPr>
+            <a:lvl4pPr marL="1371600" algn="l" defTabSz="457200" rtl="0" eaLnBrk="1" latinLnBrk="0" hangingPunct="1">
+              <a:defRPr sz="1800" kern="1200">
+                <a:solidFill>
+                  <a:schemeClr val="tx1"/>
+                </a:solidFill>
+                <a:latin typeface="+mn-lt"/>
+                <a:ea typeface="+mn-ea"/>
+                <a:cs typeface="+mn-cs"/>
+              </a:defRPr>
+            </a:lvl4pPr>
+            <a:lvl5pPr marL="1828800" algn="l" defTabSz="457200" rtl="0" eaLnBrk="1" latinLnBrk="0" hangingPunct="1">
+              <a:defRPr sz="1800" kern="1200">
+                <a:solidFill>
+                  <a:schemeClr val="tx1"/>
+                </a:solidFill>
+                <a:latin typeface="+mn-lt"/>
+                <a:ea typeface="+mn-ea"/>
+                <a:cs typeface="+mn-cs"/>
+              </a:defRPr>
+            </a:lvl5pPr>
+            <a:lvl6pPr marL="2286000" algn="l" defTabSz="457200" rtl="0" eaLnBrk="1" latinLnBrk="0" hangingPunct="1">
+              <a:defRPr sz="1800" kern="1200">
+                <a:solidFill>
+                  <a:schemeClr val="tx1"/>
+                </a:solidFill>
+                <a:latin typeface="+mn-lt"/>
+                <a:ea typeface="+mn-ea"/>
+                <a:cs typeface="+mn-cs"/>
+              </a:defRPr>
+            </a:lvl6pPr>
+            <a:lvl7pPr marL="2743200" algn="l" defTabSz="457200" rtl="0" eaLnBrk="1" latinLnBrk="0" hangingPunct="1">
+              <a:defRPr sz="1800" kern="1200">
+                <a:solidFill>
+                  <a:schemeClr val="tx1"/>
+                </a:solidFill>
+                <a:latin typeface="+mn-lt"/>
+                <a:ea typeface="+mn-ea"/>
+                <a:cs typeface="+mn-cs"/>
+              </a:defRPr>
+            </a:lvl7pPr>
+            <a:lvl8pPr marL="3200400" algn="l" defTabSz="457200" rtl="0" eaLnBrk="1" latinLnBrk="0" hangingPunct="1">
+              <a:defRPr sz="1800" kern="1200">
+                <a:solidFill>
+                  <a:schemeClr val="tx1"/>
+                </a:solidFill>
+                <a:latin typeface="+mn-lt"/>
+                <a:ea typeface="+mn-ea"/>
+                <a:cs typeface="+mn-cs"/>
+              </a:defRPr>
+            </a:lvl8pPr>
+            <a:lvl9pPr marL="3657600" algn="l" defTabSz="457200" rtl="0" eaLnBrk="1" latinLnBrk="0" hangingPunct="1">
+              <a:defRPr sz="1800" kern="1200">
+                <a:solidFill>
+                  <a:schemeClr val="tx1"/>
+                </a:solidFill>
+                <a:latin typeface="+mn-lt"/>
+                <a:ea typeface="+mn-ea"/>
+                <a:cs typeface="+mn-cs"/>
+              </a:defRPr>
+            </a:lvl9pPr>
+          </a:lstStyle>
+          <a:p>
+            <a:fld id="{7475F232-FFFE-5E6C-5554-2F165DAD28C0}" type="slidenum">
+              <a:rPr lang="en-JP" smtClean="0"/>
+              <a:pPr/>
+              <a:t>9</a:t>
+            </a:fld>
+            <a:endParaRPr lang="en-JP" dirty="0"/>
           </a:p>
         </p:txBody>
       </p:sp>
@@ -9681,6 +12401,15 @@
 </file>
 
 <file path=customXml/item1.xml><?xml version="1.0" encoding="utf-8"?>
+<?mso-contentType ?>
+<FormTemplates xmlns="http://schemas.microsoft.com/sharepoint/v3/contenttype/forms">
+  <Display>DocumentLibraryForm</Display>
+  <Edit>DocumentLibraryForm</Edit>
+  <New>DocumentLibraryForm</New>
+</FormTemplates>
+</file>
+
+<file path=customXml/item2.xml><?xml version="1.0" encoding="utf-8"?>
 <ct:contentTypeSchema xmlns:ct="http://schemas.microsoft.com/office/2006/metadata/contentType" xmlns:ma="http://schemas.microsoft.com/office/2006/metadata/properties/metaAttributes" ct:_="" ma:_="" ma:contentTypeName="ドキュメント" ma:contentTypeID="0x010100352A53F757E5E848A18782864458E644" ma:contentTypeVersion="43" ma:contentTypeDescription="新しいドキュメントを作成します。" ma:contentTypeScope="" ma:versionID="e58177412e1512208a553d6b419372bf">
   <xsd:schema xmlns:xsd="http://www.w3.org/2001/XMLSchema" xmlns:xs="http://www.w3.org/2001/XMLSchema" xmlns:p="http://schemas.microsoft.com/office/2006/metadata/properties" xmlns:ns2="f61654bb-b7fc-45ad-85e3-d08f7c4a7ee2" xmlns:ns3="bbdc8989-56fb-4b1d-a38b-166581c893ff" targetNamespace="http://schemas.microsoft.com/office/2006/metadata/properties" ma:root="true" ma:fieldsID="41a5810d8518a876aecc1f17313a65be" ns2:_="" ns3:_="">
     <xsd:import namespace="f61654bb-b7fc-45ad-85e3-d08f7c4a7ee2"/>
@@ -10151,15 +12880,6 @@
 </ct:contentTypeSchema>
 </file>
 
-<file path=customXml/item2.xml><?xml version="1.0" encoding="utf-8"?>
-<?mso-contentType ?>
-<FormTemplates xmlns="http://schemas.microsoft.com/sharepoint/v3/contenttype/forms">
-  <Display>DocumentLibraryForm</Display>
-  <Edit>DocumentLibraryForm</Edit>
-  <New>DocumentLibraryForm</New>
-</FormTemplates>
-</file>
-
 <file path=customXml/item3.xml><?xml version="1.0" encoding="utf-8"?>
 <p:properties xmlns:p="http://schemas.microsoft.com/office/2006/metadata/properties" xmlns:xsi="http://www.w3.org/2001/XMLSchema-instance" xmlns:pc="http://schemas.microsoft.com/office/infopath/2007/PartnerControls">
   <documentManagement>
@@ -10222,6 +12942,14 @@
 </file>
 
 <file path=customXml/itemProps1.xml><?xml version="1.0" encoding="utf-8"?>
+<ds:datastoreItem xmlns:ds="http://schemas.openxmlformats.org/officeDocument/2006/customXml" ds:itemID="{0A8BCAEC-5EDD-4F8B-8062-E645C37DABB6}">
+  <ds:schemaRefs>
+    <ds:schemaRef ds:uri="http://schemas.microsoft.com/sharepoint/v3/contenttype/forms"/>
+  </ds:schemaRefs>
+</ds:datastoreItem>
+</file>
+
+<file path=customXml/itemProps2.xml><?xml version="1.0" encoding="utf-8"?>
 <ds:datastoreItem xmlns:ds="http://schemas.openxmlformats.org/officeDocument/2006/customXml" ds:itemID="{F2D09310-C45E-477D-9B05-494A1C2D1783}">
   <ds:schemaRefs>
     <ds:schemaRef ds:uri="http://schemas.microsoft.com/office/2006/metadata/contentType"/>
@@ -10236,14 +12964,6 @@
     <ds:schemaRef ds:uri="http://purl.org/dc/elements/1.1/"/>
     <ds:schemaRef ds:uri="http://purl.org/dc/terms/"/>
     <ds:schemaRef ds:uri="http://schemas.microsoft.com/internal/obd"/>
-  </ds:schemaRefs>
-</ds:datastoreItem>
-</file>
-
-<file path=customXml/itemProps2.xml><?xml version="1.0" encoding="utf-8"?>
-<ds:datastoreItem xmlns:ds="http://schemas.openxmlformats.org/officeDocument/2006/customXml" ds:itemID="{0A8BCAEC-5EDD-4F8B-8062-E645C37DABB6}">
-  <ds:schemaRefs>
-    <ds:schemaRef ds:uri="http://schemas.microsoft.com/sharepoint/v3/contenttype/forms"/>
   </ds:schemaRefs>
 </ds:datastoreItem>
 </file>

--- a/documents/presentations/Jannis_Meyer_Presentation_01_06_2026.pptx
+++ b/documents/presentations/Jannis_Meyer_Presentation_01_06_2026.pptx
@@ -2324,7 +2324,7 @@
           <a:p>
             <a:fld id="{8664C608-40B1-4030-A28D-5B74BC98ADCE}" type="datetimeFigureOut">
               <a:rPr lang="en-US" dirty="0"/>
-              <a:t>6/2/2026</a:t>
+              <a:t>6/5/2026</a:t>
             </a:fld>
             <a:endParaRPr lang="en-US" dirty="0"/>
           </a:p>
@@ -7733,8 +7733,8 @@
           </a:p>
         </p:txBody>
       </p:sp>
-      <mc:AlternateContent xmlns:mc="http://schemas.openxmlformats.org/markup-compatibility/2006">
-        <mc:Choice xmlns:a14="http://schemas.microsoft.com/office/drawing/2010/main" Requires="a14">
+      <mc:AlternateContent xmlns:mc="http://schemas.openxmlformats.org/markup-compatibility/2006" xmlns:a14="http://schemas.microsoft.com/office/drawing/2010/main">
+        <mc:Choice Requires="a14">
           <p:sp>
             <p:nvSpPr>
               <p:cNvPr id="5" name="Text Placeholder 1">
@@ -9052,7 +9052,7 @@
             </p:txBody>
           </p:sp>
         </mc:Choice>
-        <mc:Fallback>
+        <mc:Fallback xmlns="">
           <p:sp>
             <p:nvSpPr>
               <p:cNvPr id="5" name="Text Placeholder 1">
@@ -10536,7 +10536,7 @@
           <p:nvPr>
             <p:extLst>
               <p:ext uri="{D42A27DB-BD31-4B8C-83A1-F6EECF244321}">
-                <p14:modId xmlns:p14="http://schemas.microsoft.com/office/powerpoint/2010/main" val="387835560"/>
+                <p14:modId xmlns:p14="http://schemas.microsoft.com/office/powerpoint/2010/main" val="3321014242"/>
               </p:ext>
             </p:extLst>
           </p:nvPr>
@@ -10730,7 +10730,7 @@
                     <a:p>
                       <a:r>
                         <a:rPr lang="en-US" dirty="0"/>
-                        <a:t>GPE: 4.9mm</a:t>
+                        <a:t>GPE: 4.92mm</a:t>
                       </a:r>
                     </a:p>
                     <a:p>
@@ -10782,7 +10782,7 @@
                           <a:ea typeface="+mn-ea"/>
                           <a:cs typeface="+mn-cs"/>
                         </a:rPr>
-                        <a:t>24.79mm</a:t>
+                        <a:t>24.51mm</a:t>
                       </a:r>
                     </a:p>
                   </a:txBody>
@@ -10817,7 +10817,7 @@
                     <a:p>
                       <a:r>
                         <a:rPr lang="en-US" dirty="0"/>
-                        <a:t>GPE: /</a:t>
+                        <a:t>GPE: 24.64mm</a:t>
                       </a:r>
                     </a:p>
                   </a:txBody>
@@ -10935,7 +10935,7 @@
                           <a:ea typeface="+mn-ea"/>
                           <a:cs typeface="+mn-cs"/>
                         </a:rPr>
-                        <a:t>GPE: 56.5mm</a:t>
+                        <a:t>GPE: 56.53mm</a:t>
                       </a:r>
                     </a:p>
                   </a:txBody>
@@ -10957,7 +10957,7 @@
                     <a:p>
                       <a:r>
                         <a:rPr lang="en-US" dirty="0"/>
-                        <a:t>GPE: 9.1mm</a:t>
+                        <a:t>GPE: 9.45mm</a:t>
                       </a:r>
                     </a:p>
                     <a:p>
@@ -10999,10 +10999,30 @@
                       <a:endParaRPr lang="en-US" dirty="0"/>
                     </a:p>
                     <a:p>
+                      <a:pPr marL="0" marR="0" lvl="0" indent="0" algn="l" defTabSz="685800" rtl="0" eaLnBrk="1" fontAlgn="auto" latinLnBrk="0" hangingPunct="1">
+                        <a:lnSpc>
+                          <a:spcPct val="100000"/>
+                        </a:lnSpc>
+                        <a:spcBef>
+                          <a:spcPts val="0"/>
+                        </a:spcBef>
+                        <a:spcAft>
+                          <a:spcPts val="0"/>
+                        </a:spcAft>
+                        <a:buClrTx/>
+                        <a:buSzTx/>
+                        <a:buFontTx/>
+                        <a:buNone/>
+                        <a:tabLst/>
+                        <a:defRPr/>
+                      </a:pPr>
                       <a:r>
                         <a:rPr lang="en-US" dirty="0"/>
-                        <a:t>GPE: /</a:t>
+                        <a:t>GPE: 9.43mm</a:t>
                       </a:r>
+                    </a:p>
+                    <a:p>
+                      <a:endParaRPr lang="en-US" dirty="0"/>
                     </a:p>
                   </a:txBody>
                   <a:tcPr/>
@@ -12401,12 +12421,64 @@
 </file>
 
 <file path=customXml/item1.xml><?xml version="1.0" encoding="utf-8"?>
-<?mso-contentType ?>
-<FormTemplates xmlns="http://schemas.microsoft.com/sharepoint/v3/contenttype/forms">
-  <Display>DocumentLibraryForm</Display>
-  <Edit>DocumentLibraryForm</Edit>
-  <New>DocumentLibraryForm</New>
-</FormTemplates>
+<p:properties xmlns:p="http://schemas.microsoft.com/office/2006/metadata/properties" xmlns:xsi="http://www.w3.org/2001/XMLSchema-instance" xmlns:pc="http://schemas.microsoft.com/office/infopath/2007/PartnerControls">
+  <documentManagement>
+    <TaxCatchAll xmlns="bbdc8989-56fb-4b1d-a38b-166581c893ff" xsi:nil="true"/>
+    <lcf76f155ced4ddcb4097134ff3c332f xmlns="f61654bb-b7fc-45ad-85e3-d08f7c4a7ee2">
+      <Terms xmlns="http://schemas.microsoft.com/office/infopath/2007/PartnerControls"/>
+    </lcf76f155ced4ddcb4097134ff3c332f>
+    <Title0 xmlns="f61654bb-b7fc-45ad-85e3-d08f7c4a7ee2" xsi:nil="true"/>
+    <Year xmlns="f61654bb-b7fc-45ad-85e3-d08f7c4a7ee2" xsi:nil="true"/>
+    <Author0 xmlns="f61654bb-b7fc-45ad-85e3-d08f7c4a7ee2" xsi:nil="true"/>
+    <Authors xmlns="f61654bb-b7fc-45ad-85e3-d08f7c4a7ee2" xsi:nil="true"/>
+    <NotebookType xmlns="f61654bb-b7fc-45ad-85e3-d08f7c4a7ee2" xsi:nil="true"/>
+    <Templates xmlns="f61654bb-b7fc-45ad-85e3-d08f7c4a7ee2" xsi:nil="true"/>
+    <AppVersion xmlns="f61654bb-b7fc-45ad-85e3-d08f7c4a7ee2" xsi:nil="true"/>
+    <IsNotebookLocked xmlns="f61654bb-b7fc-45ad-85e3-d08f7c4a7ee2" xsi:nil="true"/>
+    <Self_Registration_Enabled xmlns="f61654bb-b7fc-45ad-85e3-d08f7c4a7ee2" xsi:nil="true"/>
+    <Has_Leaders_Only_SectionGroup xmlns="f61654bb-b7fc-45ad-85e3-d08f7c4a7ee2" xsi:nil="true"/>
+    <Invited_Members xmlns="f61654bb-b7fc-45ad-85e3-d08f7c4a7ee2" xsi:nil="true"/>
+    <Is_Collaboration_Space_Locked xmlns="f61654bb-b7fc-45ad-85e3-d08f7c4a7ee2" xsi:nil="true"/>
+    <LMS_Mappings xmlns="f61654bb-b7fc-45ad-85e3-d08f7c4a7ee2" xsi:nil="true"/>
+    <Invited_Leaders xmlns="f61654bb-b7fc-45ad-85e3-d08f7c4a7ee2" xsi:nil="true"/>
+    <Math_Settings xmlns="f61654bb-b7fc-45ad-85e3-d08f7c4a7ee2" xsi:nil="true"/>
+    <Members xmlns="f61654bb-b7fc-45ad-85e3-d08f7c4a7ee2">
+      <UserInfo>
+        <DisplayName/>
+        <AccountId xsi:nil="true"/>
+        <AccountType/>
+      </UserInfo>
+    </Members>
+    <DefaultSectionNames xmlns="f61654bb-b7fc-45ad-85e3-d08f7c4a7ee2" xsi:nil="true"/>
+    <TeamsChannelId xmlns="f61654bb-b7fc-45ad-85e3-d08f7c4a7ee2" xsi:nil="true"/>
+    <FolderType xmlns="f61654bb-b7fc-45ad-85e3-d08f7c4a7ee2" xsi:nil="true"/>
+    <Leaders xmlns="f61654bb-b7fc-45ad-85e3-d08f7c4a7ee2">
+      <UserInfo>
+        <DisplayName/>
+        <AccountId xsi:nil="true"/>
+        <AccountType/>
+      </UserInfo>
+    </Leaders>
+    <Distribution_Groups xmlns="f61654bb-b7fc-45ad-85e3-d08f7c4a7ee2" xsi:nil="true"/>
+    <Member_Groups xmlns="f61654bb-b7fc-45ad-85e3-d08f7c4a7ee2">
+      <UserInfo>
+        <DisplayName/>
+        <AccountId xsi:nil="true"/>
+        <AccountType/>
+      </UserInfo>
+    </Member_Groups>
+    <Teams_Channel_Section_Location xmlns="f61654bb-b7fc-45ad-85e3-d08f7c4a7ee2" xsi:nil="true"/>
+    <CultureName xmlns="f61654bb-b7fc-45ad-85e3-d08f7c4a7ee2" xsi:nil="true"/>
+    <Owner xmlns="f61654bb-b7fc-45ad-85e3-d08f7c4a7ee2">
+      <UserInfo>
+        <DisplayName/>
+        <AccountId xsi:nil="true"/>
+        <AccountType/>
+      </UserInfo>
+    </Owner>
+    <_x30a2__x30c3__x30d7__x30ed__x30fc__x30c9__x65e5__x4ed8_ xmlns="f61654bb-b7fc-45ad-85e3-d08f7c4a7ee2" xsi:nil="true"/>
+  </documentManagement>
+</p:properties>
 </file>
 
 <file path=customXml/item2.xml><?xml version="1.0" encoding="utf-8"?>
@@ -12881,70 +12953,27 @@
 </file>
 
 <file path=customXml/item3.xml><?xml version="1.0" encoding="utf-8"?>
-<p:properties xmlns:p="http://schemas.microsoft.com/office/2006/metadata/properties" xmlns:xsi="http://www.w3.org/2001/XMLSchema-instance" xmlns:pc="http://schemas.microsoft.com/office/infopath/2007/PartnerControls">
-  <documentManagement>
-    <TaxCatchAll xmlns="bbdc8989-56fb-4b1d-a38b-166581c893ff" xsi:nil="true"/>
-    <lcf76f155ced4ddcb4097134ff3c332f xmlns="f61654bb-b7fc-45ad-85e3-d08f7c4a7ee2">
-      <Terms xmlns="http://schemas.microsoft.com/office/infopath/2007/PartnerControls"/>
-    </lcf76f155ced4ddcb4097134ff3c332f>
-    <Title0 xmlns="f61654bb-b7fc-45ad-85e3-d08f7c4a7ee2" xsi:nil="true"/>
-    <Year xmlns="f61654bb-b7fc-45ad-85e3-d08f7c4a7ee2" xsi:nil="true"/>
-    <Author0 xmlns="f61654bb-b7fc-45ad-85e3-d08f7c4a7ee2" xsi:nil="true"/>
-    <Authors xmlns="f61654bb-b7fc-45ad-85e3-d08f7c4a7ee2" xsi:nil="true"/>
-    <NotebookType xmlns="f61654bb-b7fc-45ad-85e3-d08f7c4a7ee2" xsi:nil="true"/>
-    <Templates xmlns="f61654bb-b7fc-45ad-85e3-d08f7c4a7ee2" xsi:nil="true"/>
-    <AppVersion xmlns="f61654bb-b7fc-45ad-85e3-d08f7c4a7ee2" xsi:nil="true"/>
-    <IsNotebookLocked xmlns="f61654bb-b7fc-45ad-85e3-d08f7c4a7ee2" xsi:nil="true"/>
-    <Self_Registration_Enabled xmlns="f61654bb-b7fc-45ad-85e3-d08f7c4a7ee2" xsi:nil="true"/>
-    <Has_Leaders_Only_SectionGroup xmlns="f61654bb-b7fc-45ad-85e3-d08f7c4a7ee2" xsi:nil="true"/>
-    <Invited_Members xmlns="f61654bb-b7fc-45ad-85e3-d08f7c4a7ee2" xsi:nil="true"/>
-    <Is_Collaboration_Space_Locked xmlns="f61654bb-b7fc-45ad-85e3-d08f7c4a7ee2" xsi:nil="true"/>
-    <LMS_Mappings xmlns="f61654bb-b7fc-45ad-85e3-d08f7c4a7ee2" xsi:nil="true"/>
-    <Invited_Leaders xmlns="f61654bb-b7fc-45ad-85e3-d08f7c4a7ee2" xsi:nil="true"/>
-    <Math_Settings xmlns="f61654bb-b7fc-45ad-85e3-d08f7c4a7ee2" xsi:nil="true"/>
-    <Members xmlns="f61654bb-b7fc-45ad-85e3-d08f7c4a7ee2">
-      <UserInfo>
-        <DisplayName/>
-        <AccountId xsi:nil="true"/>
-        <AccountType/>
-      </UserInfo>
-    </Members>
-    <DefaultSectionNames xmlns="f61654bb-b7fc-45ad-85e3-d08f7c4a7ee2" xsi:nil="true"/>
-    <TeamsChannelId xmlns="f61654bb-b7fc-45ad-85e3-d08f7c4a7ee2" xsi:nil="true"/>
-    <FolderType xmlns="f61654bb-b7fc-45ad-85e3-d08f7c4a7ee2" xsi:nil="true"/>
-    <Leaders xmlns="f61654bb-b7fc-45ad-85e3-d08f7c4a7ee2">
-      <UserInfo>
-        <DisplayName/>
-        <AccountId xsi:nil="true"/>
-        <AccountType/>
-      </UserInfo>
-    </Leaders>
-    <Distribution_Groups xmlns="f61654bb-b7fc-45ad-85e3-d08f7c4a7ee2" xsi:nil="true"/>
-    <Member_Groups xmlns="f61654bb-b7fc-45ad-85e3-d08f7c4a7ee2">
-      <UserInfo>
-        <DisplayName/>
-        <AccountId xsi:nil="true"/>
-        <AccountType/>
-      </UserInfo>
-    </Member_Groups>
-    <Teams_Channel_Section_Location xmlns="f61654bb-b7fc-45ad-85e3-d08f7c4a7ee2" xsi:nil="true"/>
-    <CultureName xmlns="f61654bb-b7fc-45ad-85e3-d08f7c4a7ee2" xsi:nil="true"/>
-    <Owner xmlns="f61654bb-b7fc-45ad-85e3-d08f7c4a7ee2">
-      <UserInfo>
-        <DisplayName/>
-        <AccountId xsi:nil="true"/>
-        <AccountType/>
-      </UserInfo>
-    </Owner>
-    <_x30a2__x30c3__x30d7__x30ed__x30fc__x30c9__x65e5__x4ed8_ xmlns="f61654bb-b7fc-45ad-85e3-d08f7c4a7ee2" xsi:nil="true"/>
-  </documentManagement>
-</p:properties>
+<?mso-contentType ?>
+<FormTemplates xmlns="http://schemas.microsoft.com/sharepoint/v3/contenttype/forms">
+  <Display>DocumentLibraryForm</Display>
+  <Edit>DocumentLibraryForm</Edit>
+  <New>DocumentLibraryForm</New>
+</FormTemplates>
 </file>
 
 <file path=customXml/itemProps1.xml><?xml version="1.0" encoding="utf-8"?>
-<ds:datastoreItem xmlns:ds="http://schemas.openxmlformats.org/officeDocument/2006/customXml" ds:itemID="{0A8BCAEC-5EDD-4F8B-8062-E645C37DABB6}">
+<ds:datastoreItem xmlns:ds="http://schemas.openxmlformats.org/officeDocument/2006/customXml" ds:itemID="{726A834E-B1B5-46FD-BC6A-86110B9E53A8}">
   <ds:schemaRefs>
-    <ds:schemaRef ds:uri="http://schemas.microsoft.com/sharepoint/v3/contenttype/forms"/>
+    <ds:schemaRef ds:uri="f61654bb-b7fc-45ad-85e3-d08f7c4a7ee2"/>
+    <ds:schemaRef ds:uri="http://schemas.microsoft.com/office/infopath/2007/PartnerControls"/>
+    <ds:schemaRef ds:uri="http://purl.org/dc/dcmitype/"/>
+    <ds:schemaRef ds:uri="http://purl.org/dc/elements/1.1/"/>
+    <ds:schemaRef ds:uri="bbdc8989-56fb-4b1d-a38b-166581c893ff"/>
+    <ds:schemaRef ds:uri="http://purl.org/dc/terms/"/>
+    <ds:schemaRef ds:uri="http://schemas.microsoft.com/office/2006/documentManagement/types"/>
+    <ds:schemaRef ds:uri="http://www.w3.org/XML/1998/namespace"/>
+    <ds:schemaRef ds:uri="http://schemas.openxmlformats.org/package/2006/metadata/core-properties"/>
+    <ds:schemaRef ds:uri="http://schemas.microsoft.com/office/2006/metadata/properties"/>
   </ds:schemaRefs>
 </ds:datastoreItem>
 </file>
@@ -12969,18 +12998,9 @@
 </file>
 
 <file path=customXml/itemProps3.xml><?xml version="1.0" encoding="utf-8"?>
-<ds:datastoreItem xmlns:ds="http://schemas.openxmlformats.org/officeDocument/2006/customXml" ds:itemID="{726A834E-B1B5-46FD-BC6A-86110B9E53A8}">
+<ds:datastoreItem xmlns:ds="http://schemas.openxmlformats.org/officeDocument/2006/customXml" ds:itemID="{0A8BCAEC-5EDD-4F8B-8062-E645C37DABB6}">
   <ds:schemaRefs>
-    <ds:schemaRef ds:uri="f61654bb-b7fc-45ad-85e3-d08f7c4a7ee2"/>
-    <ds:schemaRef ds:uri="http://schemas.microsoft.com/office/infopath/2007/PartnerControls"/>
-    <ds:schemaRef ds:uri="http://purl.org/dc/dcmitype/"/>
-    <ds:schemaRef ds:uri="http://purl.org/dc/elements/1.1/"/>
-    <ds:schemaRef ds:uri="bbdc8989-56fb-4b1d-a38b-166581c893ff"/>
-    <ds:schemaRef ds:uri="http://purl.org/dc/terms/"/>
-    <ds:schemaRef ds:uri="http://schemas.microsoft.com/office/2006/documentManagement/types"/>
-    <ds:schemaRef ds:uri="http://www.w3.org/XML/1998/namespace"/>
-    <ds:schemaRef ds:uri="http://schemas.openxmlformats.org/package/2006/metadata/core-properties"/>
-    <ds:schemaRef ds:uri="http://schemas.microsoft.com/office/2006/metadata/properties"/>
+    <ds:schemaRef ds:uri="http://schemas.microsoft.com/sharepoint/v3/contenttype/forms"/>
   </ds:schemaRefs>
 </ds:datastoreItem>
 </file>